--- a/submission/Boloka-pitch.pptx
+++ b/submission/Boloka-pitch.pptx
@@ -3238,7 +3238,7 @@
                 <a:ea typeface="Aptos Display"/>
                 <a:cs typeface="Aptos Display"/>
               </a:rPr>
-              <a:t>KE A</a:t>
+              <a:t>KEA</a:t>
             </a:r>
             <a:endParaRPr sz="3000"/>
           </a:p>

--- a/submission/Boloka-pitch.pptx
+++ b/submission/Boloka-pitch.pptx
@@ -2,20 +2,21 @@
 <file path=ppt/presentation.xml><?xml version="1.0" encoding="utf-8"?>
 <p:presentation xmlns:p="http://schemas.openxmlformats.org/presentationml/2006/main">
   <p:sldMasterIdLst>
-    <p:sldMasterId xmlns:r="http://schemas.openxmlformats.org/officeDocument/2006/relationships" id="2147483648" r:id="R0b935e3148aa469b"/>
+    <p:sldMasterId xmlns:r="http://schemas.openxmlformats.org/officeDocument/2006/relationships" id="2147483648" r:id="Ra958bb5a89944fb7"/>
   </p:sldMasterIdLst>
   <p:notesMasterIdLst>
-    <p:notesMasterId xmlns:r="http://schemas.openxmlformats.org/officeDocument/2006/relationships" r:id="R39ffeea12b874e75"/>
+    <p:notesMasterId xmlns:r="http://schemas.openxmlformats.org/officeDocument/2006/relationships" r:id="R3d4bf22d37574caf"/>
   </p:notesMasterIdLst>
   <p:sldIdLst>
-    <p:sldId xmlns:r="http://schemas.openxmlformats.org/officeDocument/2006/relationships" id="256" r:id="R82e6627904e14a95"/>
-    <p:sldId xmlns:r="http://schemas.openxmlformats.org/officeDocument/2006/relationships" id="257" r:id="R6e094ea1db3940b3"/>
-    <p:sldId xmlns:r="http://schemas.openxmlformats.org/officeDocument/2006/relationships" id="258" r:id="R5c2bcb73633e4f8e"/>
-    <p:sldId xmlns:r="http://schemas.openxmlformats.org/officeDocument/2006/relationships" id="259" r:id="Rf8a0bad05e5c4039"/>
-    <p:sldId xmlns:r="http://schemas.openxmlformats.org/officeDocument/2006/relationships" id="260" r:id="R12f91280c15044a9"/>
-    <p:sldId xmlns:r="http://schemas.openxmlformats.org/officeDocument/2006/relationships" id="261" r:id="R412053d6f4024513"/>
-    <p:sldId xmlns:r="http://schemas.openxmlformats.org/officeDocument/2006/relationships" id="262" r:id="Rb785e08673264289"/>
-    <p:sldId xmlns:r="http://schemas.openxmlformats.org/officeDocument/2006/relationships" id="263" r:id="R54f3081c76ad4701"/>
+    <p:sldId xmlns:r="http://schemas.openxmlformats.org/officeDocument/2006/relationships" id="256" r:id="Re49067a6c10b43c0"/>
+    <p:sldId xmlns:r="http://schemas.openxmlformats.org/officeDocument/2006/relationships" id="257" r:id="Reb80940cdd0046dd"/>
+    <p:sldId xmlns:r="http://schemas.openxmlformats.org/officeDocument/2006/relationships" id="258" r:id="R08a16c2554f94691"/>
+    <p:sldId xmlns:r="http://schemas.openxmlformats.org/officeDocument/2006/relationships" id="259" r:id="R5de5014affca49f7"/>
+    <p:sldId xmlns:r="http://schemas.openxmlformats.org/officeDocument/2006/relationships" id="260" r:id="R07d55d85b8b94cf0"/>
+    <p:sldId xmlns:r="http://schemas.openxmlformats.org/officeDocument/2006/relationships" id="261" r:id="Rfca040ab834a4d5a"/>
+    <p:sldId xmlns:r="http://schemas.openxmlformats.org/officeDocument/2006/relationships" id="262" r:id="Rfd1fb95e23d34dea"/>
+    <p:sldId xmlns:r="http://schemas.openxmlformats.org/officeDocument/2006/relationships" id="263" r:id="R1bec821b10c7409e"/>
+    <p:sldId xmlns:r="http://schemas.openxmlformats.org/officeDocument/2006/relationships" id="264" r:id="Rdcfbf7cbf1a3414c"/>
   </p:sldIdLst>
   <p:sldSz cx="12192000" cy="6858000"/>
   <p:notesSz cx="6858000" cy="9144000"/>
@@ -1014,12 +1015,7 @@
         <p:txBody>
           <a:bodyPr xmlns:a="http://schemas.openxmlformats.org/drawingml/2006/main"/>
           <a:lstStyle xmlns:a="http://schemas.openxmlformats.org/drawingml/2006/main"/>
-          <a:p xmlns:a="http://schemas.openxmlformats.org/drawingml/2006/main">
-            <a:r>
-              <a:t>The official past winners page includes products such as Easy Equities and StokFella; product-market fit and usefulness matter more than feature count. Source: https://appoftheyear.co.za/past-winners/</a:t>
-            </a:r>
-            <a:endParaRPr/>
-          </a:p>
+          <a:p xmlns:a="http://schemas.openxmlformats.org/drawingml/2006/main"/>
         </p:txBody>
       </p:sp>
       <p:sp>
@@ -1048,6 +1044,77 @@
 </file>
 
 <file path=ppt/notesSlides/notesSlide8.xml><?xml version="1.0" encoding="utf-8"?>
+<p:notes xmlns:p="http://schemas.openxmlformats.org/presentationml/2006/main">
+  <p:cSld>
+    <p:spTree>
+      <p:nvGrpSpPr>
+        <p:cNvPr id="1" name=""/>
+        <p:cNvGrpSpPr/>
+        <p:nvPr/>
+      </p:nvGrpSpPr>
+      <p:grpSpPr>
+        <a:xfrm xmlns:a="http://schemas.openxmlformats.org/drawingml/2006/main"/>
+      </p:grpSpPr>
+      <p:sp>
+        <p:nvSpPr>
+          <p:cNvPr id="2" name="Slide Image Placeholder 1"/>
+          <p:cNvSpPr>
+            <a:spLocks xmlns:a="http://schemas.openxmlformats.org/drawingml/2006/main" noGrp="1"/>
+          </p:cNvSpPr>
+          <p:nvPr>
+            <p:ph type="sldImg" idx="0"/>
+          </p:nvPr>
+        </p:nvSpPr>
+        <p:spPr/>
+      </p:sp>
+      <p:sp>
+        <p:nvSpPr>
+          <p:cNvPr id="3" name="Notes Placeholder 2"/>
+          <p:cNvSpPr>
+            <a:spLocks xmlns:a="http://schemas.openxmlformats.org/drawingml/2006/main" noGrp="1"/>
+          </p:cNvSpPr>
+          <p:nvPr>
+            <p:ph type="body" idx="1"/>
+          </p:nvPr>
+        </p:nvSpPr>
+        <p:spPr/>
+        <p:txBody>
+          <a:bodyPr xmlns:a="http://schemas.openxmlformats.org/drawingml/2006/main"/>
+          <a:lstStyle xmlns:a="http://schemas.openxmlformats.org/drawingml/2006/main"/>
+          <a:p xmlns:a="http://schemas.openxmlformats.org/drawingml/2006/main">
+            <a:r>
+              <a:t>The official past winners page includes products such as Easy Equities and StokFella; product-market fit and usefulness matter more than feature count. Source: https://appoftheyear.co.za/past-winners/</a:t>
+            </a:r>
+            <a:endParaRPr/>
+          </a:p>
+        </p:txBody>
+      </p:sp>
+      <p:sp>
+        <p:nvSpPr>
+          <p:cNvPr id="4" name="Slide Number Placeholder 3"/>
+          <p:cNvSpPr>
+            <a:spLocks xmlns:a="http://schemas.openxmlformats.org/drawingml/2006/main" noGrp="1"/>
+          </p:cNvSpPr>
+          <p:nvPr>
+            <p:ph type="sldNum" idx="5"/>
+          </p:nvPr>
+        </p:nvSpPr>
+        <p:spPr/>
+        <p:txBody>
+          <a:bodyPr xmlns:a="http://schemas.openxmlformats.org/drawingml/2006/main"/>
+          <a:lstStyle xmlns:a="http://schemas.openxmlformats.org/drawingml/2006/main"/>
+          <a:p xmlns:a="http://schemas.openxmlformats.org/drawingml/2006/main"/>
+        </p:txBody>
+      </p:sp>
+    </p:spTree>
+  </p:cSld>
+  <p:clrMapOvr>
+    <a:masterClrMapping xmlns:a="http://schemas.openxmlformats.org/drawingml/2006/main"/>
+  </p:clrMapOvr>
+</p:notes>
+</file>
+
+<file path=ppt/notesSlides/notesSlide9.xml><?xml version="1.0" encoding="utf-8"?>
 <p:notes xmlns:p="http://schemas.openxmlformats.org/presentationml/2006/main">
   <p:cSld>
     <p:spTree>
@@ -1319,8 +1386,8 @@
   </p:cSld>
   <p:clrMap bg1="lt1" tx1="dk1" bg2="lt2" tx2="dk2" accent1="accent1" accent2="accent2" accent3="accent3" accent4="accent4" accent5="accent5" accent6="accent6" hlink="hlink" folHlink="folHlink"/>
   <p:sldLayoutIdLst>
-    <p:sldLayoutId xmlns:r="http://schemas.openxmlformats.org/officeDocument/2006/relationships" id="2147483649" r:id="R3df0a4550a844d33"/>
-    <p:sldLayoutId xmlns:r="http://schemas.openxmlformats.org/officeDocument/2006/relationships" id="2147483650" r:id="Re678e642cc5d49fe"/>
+    <p:sldLayoutId xmlns:r="http://schemas.openxmlformats.org/officeDocument/2006/relationships" id="2147483649" r:id="R8d1f366b0a594861"/>
+    <p:sldLayoutId xmlns:r="http://schemas.openxmlformats.org/officeDocument/2006/relationships" id="2147483650" r:id="Re1d3c31c03564ad9"/>
   </p:sldLayoutIdLst>
   <p:hf sldNum="0" hdr="0" ftr="0" dt="0"/>
   <p:txStyles>
@@ -4209,7 +4276,7 @@
         </p:spPr>
         <p:txBody>
           <a:bodyPr xmlns:a="http://schemas.openxmlformats.org/drawingml/2006/main" wrap="square" lIns="0" tIns="0" rIns="0" bIns="0" anchor="t">
-            <a:normAutofit/>
+            <a:normAutofit fontScale="100000"/>
           </a:bodyPr>
           <a:lstStyle xmlns:a="http://schemas.openxmlformats.org/drawingml/2006/main"/>
           <a:p xmlns:a="http://schemas.openxmlformats.org/drawingml/2006/main">
@@ -4225,7 +4292,7 @@
                 <a:ea typeface="Aptos"/>
                 <a:cs typeface="Aptos"/>
               </a:rPr>
-              <a:t>A dated warning and</a:t>
+              <a:t>A conditional estimate and</a:t>
             </a:r>
             <a:endParaRPr sz="1700"/>
           </a:p>
@@ -4244,7 +4311,6 @@
               </a:rPr>
               <a:t>weekly set-aside idea</a:t>
             </a:r>
-            <a:endParaRPr sz="1700"/>
           </a:p>
         </p:txBody>
       </p:sp>
@@ -4636,7 +4702,7 @@
         </p:spPr>
         <p:txBody>
           <a:bodyPr xmlns:a="http://schemas.openxmlformats.org/drawingml/2006/main" wrap="square" lIns="0" tIns="0" rIns="0" bIns="0" anchor="t">
-            <a:normAutofit/>
+            <a:normAutofit fontScale="100000"/>
           </a:bodyPr>
           <a:lstStyle xmlns:a="http://schemas.openxmlformats.org/drawingml/2006/main"/>
           <a:p xmlns:a="http://schemas.openxmlformats.org/drawingml/2006/main">
@@ -4652,7 +4718,7 @@
                 <a:ea typeface="Aptos"/>
                 <a:cs typeface="Aptos"/>
               </a:rPr>
-              <a:t>“Your recent income is uneven and rent is due soon. Saving a small amount each week builds a cushion.”</a:t>
+              <a:t>Based on entries you choose to add, Boloka can show a planning gap. It does not predict a shortfall date.</a:t>
             </a:r>
             <a:endParaRPr sz="2200"/>
           </a:p>
@@ -5289,7 +5355,7 @@
         </p:spPr>
         <p:txBody>
           <a:bodyPr xmlns:a="http://schemas.openxmlformats.org/drawingml/2006/main" wrap="square" lIns="0" tIns="0" rIns="0" bIns="0" anchor="ctr">
-            <a:normAutofit/>
+            <a:normAutofit fontScale="100000"/>
           </a:bodyPr>
           <a:lstStyle xmlns:a="http://schemas.openxmlformats.org/drawingml/2006/main"/>
           <a:p xmlns:a="http://schemas.openxmlformats.org/drawingml/2006/main">
@@ -5305,7 +5371,7 @@
                 <a:ea typeface="Aptos"/>
                 <a:cs typeface="Aptos"/>
               </a:rPr>
-              <a:t>Sparse history gets a low-confidence heuristic, not false precision.</a:t>
+              <a:t>Sparse history is labelled insufficient; Boloka does not predict a shortfall date.</a:t>
             </a:r>
             <a:endParaRPr sz="1700"/>
           </a:p>
@@ -5553,6 +5619,13 @@
 <file path=ppt/slides/slide7.xml><?xml version="1.0" encoding="utf-8"?>
 <p:sld xmlns:p="http://schemas.openxmlformats.org/presentationml/2006/main">
   <p:cSld>
+    <p:bg>
+      <p:bgPr>
+        <a:solidFill xmlns:a="http://schemas.openxmlformats.org/drawingml/2006/main">
+          <a:srgbClr val="0C1512"/>
+        </a:solidFill>
+      </p:bgPr>
+    </p:bg>
     <p:spTree>
       <p:nvGrpSpPr>
         <p:cNvPr id="1" name=""/>
@@ -5564,84 +5637,334 @@
       </p:grpSpPr>
       <p:sp>
         <p:nvSpPr>
-          <p:cNvPr id="2" name="Text 0">
-            <a:extLst xmlns:a="http://schemas.openxmlformats.org/drawingml/2006/main">
-              <a:ext uri="{FF2B5EF4-FFF2-40B4-BE49-F238E27FC236}">
-                <a16:creationId xmlns:a16="http://schemas.microsoft.com/office/drawing/2014/main" id="{76878712-9A9C-4C3B-9EA1-9D755AB8C593}"/>
-              </a:ext>
-            </a:extLst>
-          </p:cNvPr>
-          <p:cNvSpPr>
-            <a:spLocks xmlns:a="http://schemas.openxmlformats.org/drawingml/2006/main" noGrp="1"/>
-          </p:cNvSpPr>
-          <p:nvPr/>
-        </p:nvSpPr>
-        <p:spPr>
-          <a:xfrm xmlns:a="http://schemas.openxmlformats.org/drawingml/2006/main">
-            <a:off x="658368" y="475488"/>
-            <a:ext cx="9875520" cy="237744"/>
+          <p:cNvPr id="24" name="template-accent-bar">
+            <a:extLst xmlns:a="http://schemas.openxmlformats.org/drawingml/2006/main">
+              <a:ext uri="{FF2B5EF4-FFF2-40B4-BE49-F238E27FC236}">
+                <a16:creationId xmlns:a16="http://schemas.microsoft.com/office/drawing/2014/main" id="{7489228B-A759-42C0-9A95-8B0949682F17}"/>
+              </a:ext>
+            </a:extLst>
+          </p:cNvPr>
+          <p:cNvSpPr>
+            <a:spLocks xmlns:a="http://schemas.openxmlformats.org/drawingml/2006/main" noGrp="1"/>
+          </p:cNvSpPr>
+          <p:nvPr/>
+        </p:nvSpPr>
+        <p:spPr>
+          <a:xfrm xmlns:a="http://schemas.openxmlformats.org/drawingml/2006/main">
+            <a:off x="0" y="0"/>
+            <a:ext cx="109728" cy="6858000"/>
+          </a:xfrm>
+          <a:prstGeom xmlns:a="http://schemas.openxmlformats.org/drawingml/2006/main" prst="rect">
+            <a:avLst/>
+          </a:prstGeom>
+          <a:solidFill xmlns:a="http://schemas.openxmlformats.org/drawingml/2006/main">
+            <a:srgbClr val="32D6A6"/>
+          </a:solidFill>
+          <a:ln xmlns:a="http://schemas.openxmlformats.org/drawingml/2006/main" w="0">
+            <a:noFill/>
+            <a:prstDash val="solid"/>
+          </a:ln>
+        </p:spPr>
+      </p:sp>
+      <p:sp>
+        <p:nvSpPr>
+          <p:cNvPr id="2" name="architecture-kicker">
+            <a:extLst xmlns:a="http://schemas.openxmlformats.org/drawingml/2006/main">
+              <a:ext uri="{FF2B5EF4-FFF2-40B4-BE49-F238E27FC236}">
+                <a16:creationId xmlns:a16="http://schemas.microsoft.com/office/drawing/2014/main" id="{A0654E9A-FCBB-4EF1-AD11-86FF6D152C8B}"/>
+              </a:ext>
+            </a:extLst>
+          </p:cNvPr>
+          <p:cNvSpPr>
+            <a:spLocks xmlns:a="http://schemas.openxmlformats.org/drawingml/2006/main" noGrp="1"/>
+          </p:cNvSpPr>
+          <p:nvPr/>
+        </p:nvSpPr>
+        <p:spPr>
+          <a:xfrm xmlns:a="http://schemas.openxmlformats.org/drawingml/2006/main">
+            <a:off x="657225" y="476250"/>
+            <a:ext cx="10382250" cy="238125"/>
           </a:xfrm>
           <a:prstGeom xmlns:a="http://schemas.openxmlformats.org/drawingml/2006/main" prst="rect">
             <a:avLst/>
           </a:prstGeom>
           <a:noFill xmlns:a="http://schemas.openxmlformats.org/drawingml/2006/main"/>
-        </p:spPr>
-        <p:txBody>
-          <a:bodyPr xmlns:a="http://schemas.openxmlformats.org/drawingml/2006/main" wrap="square" lIns="0" tIns="0" rIns="0" bIns="0" anchor="ctr">
-            <a:normAutofit/>
-          </a:bodyPr>
-          <a:lstStyle xmlns:a="http://schemas.openxmlformats.org/drawingml/2006/main"/>
-          <a:p xmlns:a="http://schemas.openxmlformats.org/drawingml/2006/main">
-            <a:pPr marL="0" indent="0">
-              <a:buNone/>
-            </a:pPr>
-            <a:r>
-              <a:rPr sz="1100" b="1" spc="130">
-                <a:solidFill>
-                  <a:srgbClr val="32D6A6"/>
-                </a:solidFill>
-                <a:latin typeface="Aptos Display"/>
-                <a:ea typeface="Aptos Display"/>
-                <a:cs typeface="Aptos Display"/>
-              </a:rPr>
-              <a:t>06 / PATH TO ADOPTION</a:t>
-            </a:r>
-            <a:endParaRPr sz="1100"/>
-          </a:p>
-        </p:txBody>
-      </p:sp>
-      <p:sp>
-        <p:nvSpPr>
-          <p:cNvPr id="3" name="Text 1">
-            <a:extLst xmlns:a="http://schemas.openxmlformats.org/drawingml/2006/main">
-              <a:ext uri="{FF2B5EF4-FFF2-40B4-BE49-F238E27FC236}">
-                <a16:creationId xmlns:a16="http://schemas.microsoft.com/office/drawing/2014/main" id="{51B12F3D-567B-4C70-AAD1-BBA1872288EB}"/>
-              </a:ext>
-            </a:extLst>
-          </p:cNvPr>
-          <p:cNvSpPr>
-            <a:spLocks xmlns:a="http://schemas.openxmlformats.org/drawingml/2006/main" noGrp="1"/>
-          </p:cNvSpPr>
-          <p:nvPr/>
-        </p:nvSpPr>
-        <p:spPr>
-          <a:xfrm xmlns:a="http://schemas.openxmlformats.org/drawingml/2006/main">
-            <a:off x="658368" y="896112"/>
-            <a:ext cx="10789920" cy="749808"/>
+          <a:ln xmlns:a="http://schemas.openxmlformats.org/drawingml/2006/main" w="0">
+            <a:noFill/>
+            <a:prstDash val="solid"/>
+          </a:ln>
+        </p:spPr>
+        <p:txBody>
+          <a:bodyPr xmlns:a="http://schemas.openxmlformats.org/drawingml/2006/main" wrap="square" anchor="t"/>
+          <a:lstStyle xmlns:a="http://schemas.openxmlformats.org/drawingml/2006/main">
+            <a:defPPr algn="l">
+              <a:defRPr sz="1125" b="1">
+                <a:solidFill>
+                  <a:srgbClr val="32D6A6"/>
+                </a:solidFill>
+                <a:latin typeface="Aptos Display"/>
+                <a:ea typeface="Aptos Display"/>
+                <a:cs typeface="Aptos Display"/>
+              </a:defRPr>
+            </a:defPPr>
+            <a:lvl1pPr algn="l">
+              <a:defRPr sz="1125" b="1">
+                <a:solidFill>
+                  <a:srgbClr val="32D6A6"/>
+                </a:solidFill>
+                <a:latin typeface="Aptos Display"/>
+                <a:ea typeface="Aptos Display"/>
+                <a:cs typeface="Aptos Display"/>
+              </a:defRPr>
+            </a:lvl1pPr>
+            <a:lvl2pPr algn="l">
+              <a:defRPr sz="1125" b="1">
+                <a:solidFill>
+                  <a:srgbClr val="32D6A6"/>
+                </a:solidFill>
+                <a:latin typeface="Aptos Display"/>
+                <a:ea typeface="Aptos Display"/>
+                <a:cs typeface="Aptos Display"/>
+              </a:defRPr>
+            </a:lvl2pPr>
+            <a:lvl3pPr algn="l">
+              <a:defRPr sz="1125" b="1">
+                <a:solidFill>
+                  <a:srgbClr val="32D6A6"/>
+                </a:solidFill>
+                <a:latin typeface="Aptos Display"/>
+                <a:ea typeface="Aptos Display"/>
+                <a:cs typeface="Aptos Display"/>
+              </a:defRPr>
+            </a:lvl3pPr>
+            <a:lvl4pPr algn="l">
+              <a:defRPr sz="1125" b="1">
+                <a:solidFill>
+                  <a:srgbClr val="32D6A6"/>
+                </a:solidFill>
+                <a:latin typeface="Aptos Display"/>
+                <a:ea typeface="Aptos Display"/>
+                <a:cs typeface="Aptos Display"/>
+              </a:defRPr>
+            </a:lvl4pPr>
+            <a:lvl5pPr algn="l">
+              <a:defRPr sz="1125" b="1">
+                <a:solidFill>
+                  <a:srgbClr val="32D6A6"/>
+                </a:solidFill>
+                <a:latin typeface="Aptos Display"/>
+                <a:ea typeface="Aptos Display"/>
+                <a:cs typeface="Aptos Display"/>
+              </a:defRPr>
+            </a:lvl5pPr>
+            <a:lvl6pPr algn="l">
+              <a:defRPr sz="1125" b="1">
+                <a:solidFill>
+                  <a:srgbClr val="32D6A6"/>
+                </a:solidFill>
+                <a:latin typeface="Aptos Display"/>
+                <a:ea typeface="Aptos Display"/>
+                <a:cs typeface="Aptos Display"/>
+              </a:defRPr>
+            </a:lvl6pPr>
+            <a:lvl7pPr algn="l">
+              <a:defRPr sz="1125" b="1">
+                <a:solidFill>
+                  <a:srgbClr val="32D6A6"/>
+                </a:solidFill>
+                <a:latin typeface="Aptos Display"/>
+                <a:ea typeface="Aptos Display"/>
+                <a:cs typeface="Aptos Display"/>
+              </a:defRPr>
+            </a:lvl7pPr>
+            <a:lvl8pPr algn="l">
+              <a:defRPr sz="1125" b="1">
+                <a:solidFill>
+                  <a:srgbClr val="32D6A6"/>
+                </a:solidFill>
+                <a:latin typeface="Aptos Display"/>
+                <a:ea typeface="Aptos Display"/>
+                <a:cs typeface="Aptos Display"/>
+              </a:defRPr>
+            </a:lvl8pPr>
+            <a:lvl9pPr algn="l">
+              <a:defRPr sz="1125" b="1">
+                <a:solidFill>
+                  <a:srgbClr val="32D6A6"/>
+                </a:solidFill>
+                <a:latin typeface="Aptos Display"/>
+                <a:ea typeface="Aptos Display"/>
+                <a:cs typeface="Aptos Display"/>
+              </a:defRPr>
+            </a:lvl9pPr>
+          </a:lstStyle>
+          <a:p xmlns:a="http://schemas.openxmlformats.org/drawingml/2006/main">
+            <a:pPr algn="l">
+              <a:defRPr sz="1125" b="1">
+                <a:solidFill>
+                  <a:srgbClr val="32D6A6"/>
+                </a:solidFill>
+                <a:latin typeface="Aptos Display"/>
+                <a:ea typeface="Aptos Display"/>
+                <a:cs typeface="Aptos Display"/>
+              </a:defRPr>
+            </a:pPr>
+            <a:r>
+              <a:rPr sz="1125" b="1">
+                <a:solidFill>
+                  <a:srgbClr val="32D6A6"/>
+                </a:solidFill>
+                <a:latin typeface="Aptos Display"/>
+                <a:ea typeface="Aptos Display"/>
+                <a:cs typeface="Aptos Display"/>
+              </a:rPr>
+              <a:t>06 / ARCHITECTURE &amp; JUDGE ACCESS</a:t>
+            </a:r>
+          </a:p>
+        </p:txBody>
+      </p:sp>
+      <p:sp>
+        <p:nvSpPr>
+          <p:cNvPr id="3" name="architecture-title">
+            <a:extLst xmlns:a="http://schemas.openxmlformats.org/drawingml/2006/main">
+              <a:ext uri="{FF2B5EF4-FFF2-40B4-BE49-F238E27FC236}">
+                <a16:creationId xmlns:a16="http://schemas.microsoft.com/office/drawing/2014/main" id="{124E3187-6DA7-47E9-84BE-6110B825C732}"/>
+              </a:ext>
+            </a:extLst>
+          </p:cNvPr>
+          <p:cNvSpPr>
+            <a:spLocks xmlns:a="http://schemas.openxmlformats.org/drawingml/2006/main" noGrp="1"/>
+          </p:cNvSpPr>
+          <p:nvPr/>
+        </p:nvSpPr>
+        <p:spPr>
+          <a:xfrm xmlns:a="http://schemas.openxmlformats.org/drawingml/2006/main">
+            <a:off x="657225" y="895350"/>
+            <a:ext cx="10668000" cy="552450"/>
           </a:xfrm>
           <a:prstGeom xmlns:a="http://schemas.openxmlformats.org/drawingml/2006/main" prst="rect">
             <a:avLst/>
           </a:prstGeom>
           <a:noFill xmlns:a="http://schemas.openxmlformats.org/drawingml/2006/main"/>
-        </p:spPr>
-        <p:txBody>
-          <a:bodyPr xmlns:a="http://schemas.openxmlformats.org/drawingml/2006/main" wrap="square" lIns="0" tIns="0" rIns="0" bIns="0" anchor="t">
-            <a:normAutofit/>
-          </a:bodyPr>
-          <a:lstStyle xmlns:a="http://schemas.openxmlformats.org/drawingml/2006/main"/>
-          <a:p xmlns:a="http://schemas.openxmlformats.org/drawingml/2006/main">
-            <a:pPr marL="0" indent="0">
-              <a:buNone/>
+          <a:ln xmlns:a="http://schemas.openxmlformats.org/drawingml/2006/main" w="0">
+            <a:noFill/>
+            <a:prstDash val="solid"/>
+          </a:ln>
+        </p:spPr>
+        <p:txBody>
+          <a:bodyPr xmlns:a="http://schemas.openxmlformats.org/drawingml/2006/main" wrap="square" anchor="t"/>
+          <a:lstStyle xmlns:a="http://schemas.openxmlformats.org/drawingml/2006/main">
+            <a:defPPr algn="l">
+              <a:defRPr sz="3000" b="1">
+                <a:solidFill>
+                  <a:srgbClr val="F3F7F4"/>
+                </a:solidFill>
+                <a:latin typeface="Aptos Display"/>
+                <a:ea typeface="Aptos Display"/>
+                <a:cs typeface="Aptos Display"/>
+              </a:defRPr>
+            </a:defPPr>
+            <a:lvl1pPr algn="l">
+              <a:defRPr sz="3000" b="1">
+                <a:solidFill>
+                  <a:srgbClr val="F3F7F4"/>
+                </a:solidFill>
+                <a:latin typeface="Aptos Display"/>
+                <a:ea typeface="Aptos Display"/>
+                <a:cs typeface="Aptos Display"/>
+              </a:defRPr>
+            </a:lvl1pPr>
+            <a:lvl2pPr algn="l">
+              <a:defRPr sz="3000" b="1">
+                <a:solidFill>
+                  <a:srgbClr val="F3F7F4"/>
+                </a:solidFill>
+                <a:latin typeface="Aptos Display"/>
+                <a:ea typeface="Aptos Display"/>
+                <a:cs typeface="Aptos Display"/>
+              </a:defRPr>
+            </a:lvl2pPr>
+            <a:lvl3pPr algn="l">
+              <a:defRPr sz="3000" b="1">
+                <a:solidFill>
+                  <a:srgbClr val="F3F7F4"/>
+                </a:solidFill>
+                <a:latin typeface="Aptos Display"/>
+                <a:ea typeface="Aptos Display"/>
+                <a:cs typeface="Aptos Display"/>
+              </a:defRPr>
+            </a:lvl3pPr>
+            <a:lvl4pPr algn="l">
+              <a:defRPr sz="3000" b="1">
+                <a:solidFill>
+                  <a:srgbClr val="F3F7F4"/>
+                </a:solidFill>
+                <a:latin typeface="Aptos Display"/>
+                <a:ea typeface="Aptos Display"/>
+                <a:cs typeface="Aptos Display"/>
+              </a:defRPr>
+            </a:lvl4pPr>
+            <a:lvl5pPr algn="l">
+              <a:defRPr sz="3000" b="1">
+                <a:solidFill>
+                  <a:srgbClr val="F3F7F4"/>
+                </a:solidFill>
+                <a:latin typeface="Aptos Display"/>
+                <a:ea typeface="Aptos Display"/>
+                <a:cs typeface="Aptos Display"/>
+              </a:defRPr>
+            </a:lvl5pPr>
+            <a:lvl6pPr algn="l">
+              <a:defRPr sz="3000" b="1">
+                <a:solidFill>
+                  <a:srgbClr val="F3F7F4"/>
+                </a:solidFill>
+                <a:latin typeface="Aptos Display"/>
+                <a:ea typeface="Aptos Display"/>
+                <a:cs typeface="Aptos Display"/>
+              </a:defRPr>
+            </a:lvl6pPr>
+            <a:lvl7pPr algn="l">
+              <a:defRPr sz="3000" b="1">
+                <a:solidFill>
+                  <a:srgbClr val="F3F7F4"/>
+                </a:solidFill>
+                <a:latin typeface="Aptos Display"/>
+                <a:ea typeface="Aptos Display"/>
+                <a:cs typeface="Aptos Display"/>
+              </a:defRPr>
+            </a:lvl7pPr>
+            <a:lvl8pPr algn="l">
+              <a:defRPr sz="3000" b="1">
+                <a:solidFill>
+                  <a:srgbClr val="F3F7F4"/>
+                </a:solidFill>
+                <a:latin typeface="Aptos Display"/>
+                <a:ea typeface="Aptos Display"/>
+                <a:cs typeface="Aptos Display"/>
+              </a:defRPr>
+            </a:lvl8pPr>
+            <a:lvl9pPr algn="l">
+              <a:defRPr sz="3000" b="1">
+                <a:solidFill>
+                  <a:srgbClr val="F3F7F4"/>
+                </a:solidFill>
+                <a:latin typeface="Aptos Display"/>
+                <a:ea typeface="Aptos Display"/>
+                <a:cs typeface="Aptos Display"/>
+              </a:defRPr>
+            </a:lvl9pPr>
+          </a:lstStyle>
+          <a:p xmlns:a="http://schemas.openxmlformats.org/drawingml/2006/main">
+            <a:pPr algn="l">
+              <a:defRPr sz="3000" b="1">
+                <a:solidFill>
+                  <a:srgbClr val="F3F7F4"/>
+                </a:solidFill>
+                <a:latin typeface="Aptos Display"/>
+                <a:ea typeface="Aptos Display"/>
+                <a:cs typeface="Aptos Display"/>
+              </a:defRPr>
             </a:pPr>
             <a:r>
               <a:rPr sz="3000" b="1">
@@ -5652,121 +5975,533 @@
                 <a:ea typeface="Aptos Display"/>
                 <a:cs typeface="Aptos Display"/>
               </a:rPr>
-              <a:t>Start with a habit. Earn the right to scale.</a:t>
-            </a:r>
-            <a:endParaRPr sz="3000"/>
-          </a:p>
-        </p:txBody>
-      </p:sp>
-      <p:sp>
-        <p:nvSpPr>
-          <p:cNvPr id="4" name="Text 2">
-            <a:extLst xmlns:a="http://schemas.openxmlformats.org/drawingml/2006/main">
-              <a:ext uri="{FF2B5EF4-FFF2-40B4-BE49-F238E27FC236}">
-                <a16:creationId xmlns:a16="http://schemas.microsoft.com/office/drawing/2014/main" id="{A68DF88C-A3B8-435A-8754-682ECD94174F}"/>
-              </a:ext>
-            </a:extLst>
-          </p:cNvPr>
-          <p:cNvSpPr>
-            <a:spLocks xmlns:a="http://schemas.openxmlformats.org/drawingml/2006/main" noGrp="1"/>
-          </p:cNvSpPr>
-          <p:nvPr/>
-        </p:nvSpPr>
-        <p:spPr>
-          <a:xfrm xmlns:a="http://schemas.openxmlformats.org/drawingml/2006/main">
-            <a:off x="676656" y="1737360"/>
-            <a:ext cx="10424160" cy="475488"/>
+              <a:t>The judge flow</a:t>
+            </a:r>
+          </a:p>
+        </p:txBody>
+      </p:sp>
+      <p:sp>
+        <p:nvSpPr>
+          <p:cNvPr id="4" name="architecture-subtitle">
+            <a:extLst xmlns:a="http://schemas.openxmlformats.org/drawingml/2006/main">
+              <a:ext uri="{FF2B5EF4-FFF2-40B4-BE49-F238E27FC236}">
+                <a16:creationId xmlns:a16="http://schemas.microsoft.com/office/drawing/2014/main" id="{4594CC66-2579-4B81-ACB4-D20023E64117}"/>
+              </a:ext>
+            </a:extLst>
+          </p:cNvPr>
+          <p:cNvSpPr>
+            <a:spLocks xmlns:a="http://schemas.openxmlformats.org/drawingml/2006/main" noGrp="1"/>
+          </p:cNvSpPr>
+          <p:nvPr/>
+        </p:nvSpPr>
+        <p:spPr>
+          <a:xfrm xmlns:a="http://schemas.openxmlformats.org/drawingml/2006/main">
+            <a:off x="676275" y="1619250"/>
+            <a:ext cx="10477500" cy="400050"/>
           </a:xfrm>
           <a:prstGeom xmlns:a="http://schemas.openxmlformats.org/drawingml/2006/main" prst="rect">
             <a:avLst/>
           </a:prstGeom>
           <a:noFill xmlns:a="http://schemas.openxmlformats.org/drawingml/2006/main"/>
-        </p:spPr>
-        <p:txBody>
-          <a:bodyPr xmlns:a="http://schemas.openxmlformats.org/drawingml/2006/main" wrap="square" lIns="0" tIns="0" rIns="0" bIns="0" anchor="t">
-            <a:normAutofit/>
-          </a:bodyPr>
-          <a:lstStyle xmlns:a="http://schemas.openxmlformats.org/drawingml/2006/main"/>
-          <a:p xmlns:a="http://schemas.openxmlformats.org/drawingml/2006/main">
-            <a:pPr marL="0" indent="0">
-              <a:buNone/>
-            </a:pPr>
-            <a:r>
-              <a:rPr sz="1500">
+          <a:ln xmlns:a="http://schemas.openxmlformats.org/drawingml/2006/main" w="0">
+            <a:noFill/>
+            <a:prstDash val="solid"/>
+          </a:ln>
+        </p:spPr>
+        <p:txBody>
+          <a:bodyPr xmlns:a="http://schemas.openxmlformats.org/drawingml/2006/main" wrap="square" anchor="t"/>
+          <a:lstStyle xmlns:a="http://schemas.openxmlformats.org/drawingml/2006/main">
+            <a:defPPr algn="l">
+              <a:defRPr sz="1500" b="0">
                 <a:solidFill>
                   <a:srgbClr val="8CA399"/>
                 </a:solidFill>
                 <a:latin typeface="Aptos"/>
                 <a:ea typeface="Aptos"/>
                 <a:cs typeface="Aptos"/>
-              </a:rPr>
-              <a:t>Avoid adding features until the weekly cash-flow action helps people return and act.</a:t>
-            </a:r>
-            <a:endParaRPr sz="1500"/>
-          </a:p>
-        </p:txBody>
-      </p:sp>
-      <p:sp>
-        <p:nvSpPr>
-          <p:cNvPr id="5" name="Shape 3">
-            <a:extLst xmlns:a="http://schemas.openxmlformats.org/drawingml/2006/main">
-              <a:ext uri="{FF2B5EF4-FFF2-40B4-BE49-F238E27FC236}">
-                <a16:creationId xmlns:a16="http://schemas.microsoft.com/office/drawing/2014/main" id="{A1A72E0A-3A29-4BE5-9471-F4225427444A}"/>
-              </a:ext>
-            </a:extLst>
-          </p:cNvPr>
-          <p:cNvSpPr>
-            <a:spLocks xmlns:a="http://schemas.openxmlformats.org/drawingml/2006/main" noGrp="1"/>
-          </p:cNvSpPr>
-          <p:nvPr/>
-        </p:nvSpPr>
-        <p:spPr>
-          <a:xfrm xmlns:a="http://schemas.openxmlformats.org/drawingml/2006/main">
-            <a:off x="960120" y="2971800"/>
-            <a:ext cx="9738360" cy="0"/>
-          </a:xfrm>
-          <a:prstGeom xmlns:a="http://schemas.openxmlformats.org/drawingml/2006/main" prst="line">
+              </a:defRPr>
+            </a:defPPr>
+            <a:lvl1pPr algn="l">
+              <a:defRPr sz="1500" b="0">
+                <a:solidFill>
+                  <a:srgbClr val="8CA399"/>
+                </a:solidFill>
+                <a:latin typeface="Aptos"/>
+                <a:ea typeface="Aptos"/>
+                <a:cs typeface="Aptos"/>
+              </a:defRPr>
+            </a:lvl1pPr>
+            <a:lvl2pPr algn="l">
+              <a:defRPr sz="1500" b="0">
+                <a:solidFill>
+                  <a:srgbClr val="8CA399"/>
+                </a:solidFill>
+                <a:latin typeface="Aptos"/>
+                <a:ea typeface="Aptos"/>
+                <a:cs typeface="Aptos"/>
+              </a:defRPr>
+            </a:lvl2pPr>
+            <a:lvl3pPr algn="l">
+              <a:defRPr sz="1500" b="0">
+                <a:solidFill>
+                  <a:srgbClr val="8CA399"/>
+                </a:solidFill>
+                <a:latin typeface="Aptos"/>
+                <a:ea typeface="Aptos"/>
+                <a:cs typeface="Aptos"/>
+              </a:defRPr>
+            </a:lvl3pPr>
+            <a:lvl4pPr algn="l">
+              <a:defRPr sz="1500" b="0">
+                <a:solidFill>
+                  <a:srgbClr val="8CA399"/>
+                </a:solidFill>
+                <a:latin typeface="Aptos"/>
+                <a:ea typeface="Aptos"/>
+                <a:cs typeface="Aptos"/>
+              </a:defRPr>
+            </a:lvl4pPr>
+            <a:lvl5pPr algn="l">
+              <a:defRPr sz="1500" b="0">
+                <a:solidFill>
+                  <a:srgbClr val="8CA399"/>
+                </a:solidFill>
+                <a:latin typeface="Aptos"/>
+                <a:ea typeface="Aptos"/>
+                <a:cs typeface="Aptos"/>
+              </a:defRPr>
+            </a:lvl5pPr>
+            <a:lvl6pPr algn="l">
+              <a:defRPr sz="1500" b="0">
+                <a:solidFill>
+                  <a:srgbClr val="8CA399"/>
+                </a:solidFill>
+                <a:latin typeface="Aptos"/>
+                <a:ea typeface="Aptos"/>
+                <a:cs typeface="Aptos"/>
+              </a:defRPr>
+            </a:lvl6pPr>
+            <a:lvl7pPr algn="l">
+              <a:defRPr sz="1500" b="0">
+                <a:solidFill>
+                  <a:srgbClr val="8CA399"/>
+                </a:solidFill>
+                <a:latin typeface="Aptos"/>
+                <a:ea typeface="Aptos"/>
+                <a:cs typeface="Aptos"/>
+              </a:defRPr>
+            </a:lvl7pPr>
+            <a:lvl8pPr algn="l">
+              <a:defRPr sz="1500" b="0">
+                <a:solidFill>
+                  <a:srgbClr val="8CA399"/>
+                </a:solidFill>
+                <a:latin typeface="Aptos"/>
+                <a:ea typeface="Aptos"/>
+                <a:cs typeface="Aptos"/>
+              </a:defRPr>
+            </a:lvl8pPr>
+            <a:lvl9pPr algn="l">
+              <a:defRPr sz="1500" b="0">
+                <a:solidFill>
+                  <a:srgbClr val="8CA399"/>
+                </a:solidFill>
+                <a:latin typeface="Aptos"/>
+                <a:ea typeface="Aptos"/>
+                <a:cs typeface="Aptos"/>
+              </a:defRPr>
+            </a:lvl9pPr>
+          </a:lstStyle>
+          <a:p xmlns:a="http://schemas.openxmlformats.org/drawingml/2006/main">
+            <a:pPr algn="l">
+              <a:defRPr sz="1500" b="0">
+                <a:solidFill>
+                  <a:srgbClr val="8CA399"/>
+                </a:solidFill>
+                <a:latin typeface="Aptos"/>
+                <a:ea typeface="Aptos"/>
+                <a:cs typeface="Aptos"/>
+              </a:defRPr>
+            </a:pPr>
+            <a:r>
+              <a:rPr sz="1500" b="0">
+                <a:solidFill>
+                  <a:srgbClr val="8CA399"/>
+                </a:solidFill>
+                <a:latin typeface="Aptos"/>
+                <a:ea typeface="Aptos"/>
+                <a:cs typeface="Aptos"/>
+              </a:rPr>
+              <a:t>Boloka keeps sign-in, planning logic and personal records in separate services.</a:t>
+            </a:r>
+          </a:p>
+        </p:txBody>
+      </p:sp>
+      <p:sp>
+        <p:nvSpPr>
+          <p:cNvPr id="5" name="architecture-stage-1-label">
+            <a:extLst xmlns:a="http://schemas.openxmlformats.org/drawingml/2006/main">
+              <a:ext uri="{FF2B5EF4-FFF2-40B4-BE49-F238E27FC236}">
+                <a16:creationId xmlns:a16="http://schemas.microsoft.com/office/drawing/2014/main" id="{F922AF77-629B-4F06-9573-43E92EC7677C}"/>
+              </a:ext>
+            </a:extLst>
+          </p:cNvPr>
+          <p:cNvSpPr>
+            <a:spLocks xmlns:a="http://schemas.openxmlformats.org/drawingml/2006/main" noGrp="1"/>
+          </p:cNvSpPr>
+          <p:nvPr/>
+        </p:nvSpPr>
+        <p:spPr>
+          <a:xfrm xmlns:a="http://schemas.openxmlformats.org/drawingml/2006/main">
+            <a:off x="685800" y="2705100"/>
+            <a:ext cx="2095500" cy="266700"/>
+          </a:xfrm>
+          <a:prstGeom xmlns:a="http://schemas.openxmlformats.org/drawingml/2006/main" prst="rect">
             <a:avLst/>
           </a:prstGeom>
           <a:noFill xmlns:a="http://schemas.openxmlformats.org/drawingml/2006/main"/>
-          <a:ln xmlns:a="http://schemas.openxmlformats.org/drawingml/2006/main" w="19050">
+          <a:ln xmlns:a="http://schemas.openxmlformats.org/drawingml/2006/main" w="0">
+            <a:noFill/>
+            <a:prstDash val="solid"/>
+          </a:ln>
+        </p:spPr>
+        <p:txBody>
+          <a:bodyPr xmlns:a="http://schemas.openxmlformats.org/drawingml/2006/main" wrap="square" anchor="t"/>
+          <a:lstStyle xmlns:a="http://schemas.openxmlformats.org/drawingml/2006/main">
+            <a:defPPr algn="l">
+              <a:defRPr sz="1125" b="1">
+                <a:solidFill>
+                  <a:srgbClr val="32D6A6"/>
+                </a:solidFill>
+                <a:latin typeface="Aptos Display"/>
+                <a:ea typeface="Aptos Display"/>
+                <a:cs typeface="Aptos Display"/>
+              </a:defRPr>
+            </a:defPPr>
+            <a:lvl1pPr algn="l">
+              <a:defRPr sz="1125" b="1">
+                <a:solidFill>
+                  <a:srgbClr val="32D6A6"/>
+                </a:solidFill>
+                <a:latin typeface="Aptos Display"/>
+                <a:ea typeface="Aptos Display"/>
+                <a:cs typeface="Aptos Display"/>
+              </a:defRPr>
+            </a:lvl1pPr>
+            <a:lvl2pPr algn="l">
+              <a:defRPr sz="1125" b="1">
+                <a:solidFill>
+                  <a:srgbClr val="32D6A6"/>
+                </a:solidFill>
+                <a:latin typeface="Aptos Display"/>
+                <a:ea typeface="Aptos Display"/>
+                <a:cs typeface="Aptos Display"/>
+              </a:defRPr>
+            </a:lvl2pPr>
+            <a:lvl3pPr algn="l">
+              <a:defRPr sz="1125" b="1">
+                <a:solidFill>
+                  <a:srgbClr val="32D6A6"/>
+                </a:solidFill>
+                <a:latin typeface="Aptos Display"/>
+                <a:ea typeface="Aptos Display"/>
+                <a:cs typeface="Aptos Display"/>
+              </a:defRPr>
+            </a:lvl3pPr>
+            <a:lvl4pPr algn="l">
+              <a:defRPr sz="1125" b="1">
+                <a:solidFill>
+                  <a:srgbClr val="32D6A6"/>
+                </a:solidFill>
+                <a:latin typeface="Aptos Display"/>
+                <a:ea typeface="Aptos Display"/>
+                <a:cs typeface="Aptos Display"/>
+              </a:defRPr>
+            </a:lvl4pPr>
+            <a:lvl5pPr algn="l">
+              <a:defRPr sz="1125" b="1">
+                <a:solidFill>
+                  <a:srgbClr val="32D6A6"/>
+                </a:solidFill>
+                <a:latin typeface="Aptos Display"/>
+                <a:ea typeface="Aptos Display"/>
+                <a:cs typeface="Aptos Display"/>
+              </a:defRPr>
+            </a:lvl5pPr>
+            <a:lvl6pPr algn="l">
+              <a:defRPr sz="1125" b="1">
+                <a:solidFill>
+                  <a:srgbClr val="32D6A6"/>
+                </a:solidFill>
+                <a:latin typeface="Aptos Display"/>
+                <a:ea typeface="Aptos Display"/>
+                <a:cs typeface="Aptos Display"/>
+              </a:defRPr>
+            </a:lvl6pPr>
+            <a:lvl7pPr algn="l">
+              <a:defRPr sz="1125" b="1">
+                <a:solidFill>
+                  <a:srgbClr val="32D6A6"/>
+                </a:solidFill>
+                <a:latin typeface="Aptos Display"/>
+                <a:ea typeface="Aptos Display"/>
+                <a:cs typeface="Aptos Display"/>
+              </a:defRPr>
+            </a:lvl7pPr>
+            <a:lvl8pPr algn="l">
+              <a:defRPr sz="1125" b="1">
+                <a:solidFill>
+                  <a:srgbClr val="32D6A6"/>
+                </a:solidFill>
+                <a:latin typeface="Aptos Display"/>
+                <a:ea typeface="Aptos Display"/>
+                <a:cs typeface="Aptos Display"/>
+              </a:defRPr>
+            </a:lvl8pPr>
+            <a:lvl9pPr algn="l">
+              <a:defRPr sz="1125" b="1">
+                <a:solidFill>
+                  <a:srgbClr val="32D6A6"/>
+                </a:solidFill>
+                <a:latin typeface="Aptos Display"/>
+                <a:ea typeface="Aptos Display"/>
+                <a:cs typeface="Aptos Display"/>
+              </a:defRPr>
+            </a:lvl9pPr>
+          </a:lstStyle>
+          <a:p xmlns:a="http://schemas.openxmlformats.org/drawingml/2006/main">
+            <a:pPr algn="l">
+              <a:defRPr sz="1125" b="1">
+                <a:solidFill>
+                  <a:srgbClr val="32D6A6"/>
+                </a:solidFill>
+                <a:latin typeface="Aptos Display"/>
+                <a:ea typeface="Aptos Display"/>
+                <a:cs typeface="Aptos Display"/>
+              </a:defRPr>
+            </a:pPr>
+            <a:r>
+              <a:rPr sz="1125" b="1">
+                <a:solidFill>
+                  <a:srgbClr val="32D6A6"/>
+                </a:solidFill>
+                <a:latin typeface="Aptos Display"/>
+                <a:ea typeface="Aptos Display"/>
+                <a:cs typeface="Aptos Display"/>
+              </a:rPr>
+              <a:t>FRONTEND</a:t>
+            </a:r>
+          </a:p>
+        </p:txBody>
+      </p:sp>
+      <p:sp>
+        <p:nvSpPr>
+          <p:cNvPr id="6" name="architecture-stage-1-body">
+            <a:extLst xmlns:a="http://schemas.openxmlformats.org/drawingml/2006/main">
+              <a:ext uri="{FF2B5EF4-FFF2-40B4-BE49-F238E27FC236}">
+                <a16:creationId xmlns:a16="http://schemas.microsoft.com/office/drawing/2014/main" id="{75FF0433-B6AF-4E08-B046-2AF7009818A6}"/>
+              </a:ext>
+            </a:extLst>
+          </p:cNvPr>
+          <p:cNvSpPr>
+            <a:spLocks xmlns:a="http://schemas.openxmlformats.org/drawingml/2006/main" noGrp="1"/>
+          </p:cNvSpPr>
+          <p:nvPr/>
+        </p:nvSpPr>
+        <p:spPr>
+          <a:xfrm xmlns:a="http://schemas.openxmlformats.org/drawingml/2006/main">
+            <a:off x="685800" y="3105150"/>
+            <a:ext cx="2238375" cy="742950"/>
+          </a:xfrm>
+          <a:prstGeom xmlns:a="http://schemas.openxmlformats.org/drawingml/2006/main" prst="rect">
+            <a:avLst/>
+          </a:prstGeom>
+          <a:noFill xmlns:a="http://schemas.openxmlformats.org/drawingml/2006/main"/>
+          <a:ln xmlns:a="http://schemas.openxmlformats.org/drawingml/2006/main" w="0">
+            <a:noFill/>
+            <a:prstDash val="solid"/>
+          </a:ln>
+        </p:spPr>
+        <p:txBody>
+          <a:bodyPr xmlns:a="http://schemas.openxmlformats.org/drawingml/2006/main" wrap="square" anchor="t"/>
+          <a:lstStyle xmlns:a="http://schemas.openxmlformats.org/drawingml/2006/main">
+            <a:defPPr algn="l">
+              <a:defRPr sz="1650" b="1">
+                <a:solidFill>
+                  <a:srgbClr val="F3F7F4"/>
+                </a:solidFill>
+                <a:latin typeface="Aptos Display"/>
+                <a:ea typeface="Aptos Display"/>
+                <a:cs typeface="Aptos Display"/>
+              </a:defRPr>
+            </a:defPPr>
+            <a:lvl1pPr algn="l">
+              <a:defRPr sz="1650" b="1">
+                <a:solidFill>
+                  <a:srgbClr val="F3F7F4"/>
+                </a:solidFill>
+                <a:latin typeface="Aptos Display"/>
+                <a:ea typeface="Aptos Display"/>
+                <a:cs typeface="Aptos Display"/>
+              </a:defRPr>
+            </a:lvl1pPr>
+            <a:lvl2pPr algn="l">
+              <a:defRPr sz="1650" b="1">
+                <a:solidFill>
+                  <a:srgbClr val="F3F7F4"/>
+                </a:solidFill>
+                <a:latin typeface="Aptos Display"/>
+                <a:ea typeface="Aptos Display"/>
+                <a:cs typeface="Aptos Display"/>
+              </a:defRPr>
+            </a:lvl2pPr>
+            <a:lvl3pPr algn="l">
+              <a:defRPr sz="1650" b="1">
+                <a:solidFill>
+                  <a:srgbClr val="F3F7F4"/>
+                </a:solidFill>
+                <a:latin typeface="Aptos Display"/>
+                <a:ea typeface="Aptos Display"/>
+                <a:cs typeface="Aptos Display"/>
+              </a:defRPr>
+            </a:lvl3pPr>
+            <a:lvl4pPr algn="l">
+              <a:defRPr sz="1650" b="1">
+                <a:solidFill>
+                  <a:srgbClr val="F3F7F4"/>
+                </a:solidFill>
+                <a:latin typeface="Aptos Display"/>
+                <a:ea typeface="Aptos Display"/>
+                <a:cs typeface="Aptos Display"/>
+              </a:defRPr>
+            </a:lvl4pPr>
+            <a:lvl5pPr algn="l">
+              <a:defRPr sz="1650" b="1">
+                <a:solidFill>
+                  <a:srgbClr val="F3F7F4"/>
+                </a:solidFill>
+                <a:latin typeface="Aptos Display"/>
+                <a:ea typeface="Aptos Display"/>
+                <a:cs typeface="Aptos Display"/>
+              </a:defRPr>
+            </a:lvl5pPr>
+            <a:lvl6pPr algn="l">
+              <a:defRPr sz="1650" b="1">
+                <a:solidFill>
+                  <a:srgbClr val="F3F7F4"/>
+                </a:solidFill>
+                <a:latin typeface="Aptos Display"/>
+                <a:ea typeface="Aptos Display"/>
+                <a:cs typeface="Aptos Display"/>
+              </a:defRPr>
+            </a:lvl6pPr>
+            <a:lvl7pPr algn="l">
+              <a:defRPr sz="1650" b="1">
+                <a:solidFill>
+                  <a:srgbClr val="F3F7F4"/>
+                </a:solidFill>
+                <a:latin typeface="Aptos Display"/>
+                <a:ea typeface="Aptos Display"/>
+                <a:cs typeface="Aptos Display"/>
+              </a:defRPr>
+            </a:lvl7pPr>
+            <a:lvl8pPr algn="l">
+              <a:defRPr sz="1650" b="1">
+                <a:solidFill>
+                  <a:srgbClr val="F3F7F4"/>
+                </a:solidFill>
+                <a:latin typeface="Aptos Display"/>
+                <a:ea typeface="Aptos Display"/>
+                <a:cs typeface="Aptos Display"/>
+              </a:defRPr>
+            </a:lvl8pPr>
+            <a:lvl9pPr algn="l">
+              <a:defRPr sz="1650" b="1">
+                <a:solidFill>
+                  <a:srgbClr val="F3F7F4"/>
+                </a:solidFill>
+                <a:latin typeface="Aptos Display"/>
+                <a:ea typeface="Aptos Display"/>
+                <a:cs typeface="Aptos Display"/>
+              </a:defRPr>
+            </a:lvl9pPr>
+          </a:lstStyle>
+          <a:p xmlns:a="http://schemas.openxmlformats.org/drawingml/2006/main">
+            <a:pPr algn="l">
+              <a:defRPr sz="1650" b="1">
+                <a:solidFill>
+                  <a:srgbClr val="F3F7F4"/>
+                </a:solidFill>
+                <a:latin typeface="Aptos Display"/>
+                <a:ea typeface="Aptos Display"/>
+                <a:cs typeface="Aptos Display"/>
+              </a:defRPr>
+            </a:pPr>
+            <a:r>
+              <a:rPr sz="1650" b="1">
+                <a:solidFill>
+                  <a:srgbClr val="F3F7F4"/>
+                </a:solidFill>
+                <a:latin typeface="Aptos Display"/>
+                <a:ea typeface="Aptos Display"/>
+                <a:cs typeface="Aptos Display"/>
+              </a:rPr>
+              <a:t>Vercel</a:t>
+            </a:r>
+          </a:p>
+          <a:p xmlns:a="http://schemas.openxmlformats.org/drawingml/2006/main">
+            <a:pPr algn="l">
+              <a:defRPr sz="1650" b="1">
+                <a:solidFill>
+                  <a:srgbClr val="F3F7F4"/>
+                </a:solidFill>
+                <a:latin typeface="Aptos Display"/>
+                <a:ea typeface="Aptos Display"/>
+                <a:cs typeface="Aptos Display"/>
+              </a:defRPr>
+            </a:pPr>
+            <a:r>
+              <a:rPr sz="1650" b="1">
+                <a:solidFill>
+                  <a:srgbClr val="F3F7F4"/>
+                </a:solidFill>
+                <a:latin typeface="Aptos Display"/>
+                <a:ea typeface="Aptos Display"/>
+                <a:cs typeface="Aptos Display"/>
+              </a:rPr>
+              <a:t>boloka.vercel.app</a:t>
+            </a:r>
+          </a:p>
+        </p:txBody>
+      </p:sp>
+      <p:sp>
+        <p:nvSpPr>
+          <p:cNvPr id="7" name="architecture-connector-1">
+            <a:extLst xmlns:a="http://schemas.openxmlformats.org/drawingml/2006/main">
+              <a:ext uri="{FF2B5EF4-FFF2-40B4-BE49-F238E27FC236}">
+                <a16:creationId xmlns:a16="http://schemas.microsoft.com/office/drawing/2014/main" id="{A8AAC1EB-425E-4957-B49B-81A154B7A0F4}"/>
+              </a:ext>
+            </a:extLst>
+          </p:cNvPr>
+          <p:cNvSpPr>
+            <a:spLocks xmlns:a="http://schemas.openxmlformats.org/drawingml/2006/main" noGrp="1"/>
+          </p:cNvSpPr>
+          <p:nvPr/>
+        </p:nvSpPr>
+        <p:spPr>
+          <a:xfrm xmlns:a="http://schemas.openxmlformats.org/drawingml/2006/main">
+            <a:off x="2952750" y="2800350"/>
+            <a:ext cx="428625" cy="19050"/>
+          </a:xfrm>
+          <a:prstGeom xmlns:a="http://schemas.openxmlformats.org/drawingml/2006/main" prst="rect">
+            <a:avLst/>
+          </a:prstGeom>
+          <a:solidFill xmlns:a="http://schemas.openxmlformats.org/drawingml/2006/main">
+            <a:srgbClr val="33463D"/>
+          </a:solidFill>
+          <a:ln xmlns:a="http://schemas.openxmlformats.org/drawingml/2006/main" w="0">
             <a:solidFill>
-              <a:srgbClr val="2A3D35"/>
-            </a:solidFill>
-            <a:prstDash val="solid"/>
-            <a:headEnd type="none"/>
-            <a:tailEnd type="none"/>
-          </a:ln>
-        </p:spPr>
-      </p:sp>
-      <p:sp>
-        <p:nvSpPr>
-          <p:cNvPr id="6" name="Shape 4">
-            <a:extLst xmlns:a="http://schemas.openxmlformats.org/drawingml/2006/main">
-              <a:ext uri="{FF2B5EF4-FFF2-40B4-BE49-F238E27FC236}">
-                <a16:creationId xmlns:a16="http://schemas.microsoft.com/office/drawing/2014/main" id="{8F8BCE60-BD3B-4D83-B797-86028A517086}"/>
-              </a:ext>
-            </a:extLst>
-          </p:cNvPr>
-          <p:cNvSpPr>
-            <a:spLocks xmlns:a="http://schemas.openxmlformats.org/drawingml/2006/main" noGrp="1"/>
-          </p:cNvSpPr>
-          <p:nvPr/>
-        </p:nvSpPr>
-        <p:spPr>
-          <a:xfrm xmlns:a="http://schemas.openxmlformats.org/drawingml/2006/main">
-            <a:off x="1005840" y="2816352"/>
-            <a:ext cx="310896" cy="310896"/>
-          </a:xfrm>
-          <a:prstGeom xmlns:a="http://schemas.openxmlformats.org/drawingml/2006/main" prst="ellipse">
-            <a:avLst/>
-          </a:prstGeom>
-          <a:solidFill xmlns:a="http://schemas.openxmlformats.org/drawingml/2006/main">
-            <a:srgbClr val="0C1512"/>
-          </a:solidFill>
-          <a:ln xmlns:a="http://schemas.openxmlformats.org/drawingml/2006/main" w="12700">
-            <a:solidFill>
-              <a:srgbClr val="32D6A6"/>
+              <a:srgbClr val="33463D"/>
             </a:solidFill>
             <a:prstDash val="solid"/>
           </a:ln>
@@ -5774,657 +6509,2240 @@
       </p:sp>
       <p:sp>
         <p:nvSpPr>
-          <p:cNvPr id="7" name="Text 5">
-            <a:extLst xmlns:a="http://schemas.openxmlformats.org/drawingml/2006/main">
-              <a:ext uri="{FF2B5EF4-FFF2-40B4-BE49-F238E27FC236}">
-                <a16:creationId xmlns:a16="http://schemas.microsoft.com/office/drawing/2014/main" id="{5A152790-755A-46B7-B086-BA85B44B84BD}"/>
-              </a:ext>
-            </a:extLst>
-          </p:cNvPr>
-          <p:cNvSpPr>
-            <a:spLocks xmlns:a="http://schemas.openxmlformats.org/drawingml/2006/main" noGrp="1"/>
-          </p:cNvSpPr>
-          <p:nvPr/>
-        </p:nvSpPr>
-        <p:spPr>
-          <a:xfrm xmlns:a="http://schemas.openxmlformats.org/drawingml/2006/main">
-            <a:off x="1005840" y="3429000"/>
-            <a:ext cx="2377440" cy="219456"/>
+          <p:cNvPr id="8" name="architecture-arrow-1">
+            <a:extLst xmlns:a="http://schemas.openxmlformats.org/drawingml/2006/main">
+              <a:ext uri="{FF2B5EF4-FFF2-40B4-BE49-F238E27FC236}">
+                <a16:creationId xmlns:a16="http://schemas.microsoft.com/office/drawing/2014/main" id="{77C8F698-568F-47C9-9141-3D83C27E0F7B}"/>
+              </a:ext>
+            </a:extLst>
+          </p:cNvPr>
+          <p:cNvSpPr>
+            <a:spLocks xmlns:a="http://schemas.openxmlformats.org/drawingml/2006/main" noGrp="1"/>
+          </p:cNvSpPr>
+          <p:nvPr/>
+        </p:nvSpPr>
+        <p:spPr>
+          <a:xfrm xmlns:a="http://schemas.openxmlformats.org/drawingml/2006/main">
+            <a:off x="3067050" y="2638425"/>
+            <a:ext cx="266700" cy="266700"/>
           </a:xfrm>
           <a:prstGeom xmlns:a="http://schemas.openxmlformats.org/drawingml/2006/main" prst="rect">
             <a:avLst/>
           </a:prstGeom>
           <a:noFill xmlns:a="http://schemas.openxmlformats.org/drawingml/2006/main"/>
-        </p:spPr>
-        <p:txBody>
-          <a:bodyPr xmlns:a="http://schemas.openxmlformats.org/drawingml/2006/main" wrap="square" lIns="0" tIns="0" rIns="0" bIns="0" anchor="ctr">
-            <a:normAutofit/>
-          </a:bodyPr>
-          <a:lstStyle xmlns:a="http://schemas.openxmlformats.org/drawingml/2006/main"/>
-          <a:p xmlns:a="http://schemas.openxmlformats.org/drawingml/2006/main">
-            <a:pPr marL="0" indent="0">
-              <a:buNone/>
-            </a:pPr>
-            <a:r>
-              <a:rPr sz="1000" b="1" spc="100">
-                <a:solidFill>
-                  <a:srgbClr val="8CA399"/>
-                </a:solidFill>
-                <a:latin typeface="Aptos Display"/>
-                <a:ea typeface="Aptos Display"/>
-                <a:cs typeface="Aptos Display"/>
-              </a:rPr>
-              <a:t>NOW</a:t>
-            </a:r>
-            <a:endParaRPr sz="1000"/>
-          </a:p>
-        </p:txBody>
-      </p:sp>
-      <p:sp>
-        <p:nvSpPr>
-          <p:cNvPr id="8" name="Text 6">
-            <a:extLst xmlns:a="http://schemas.openxmlformats.org/drawingml/2006/main">
-              <a:ext uri="{FF2B5EF4-FFF2-40B4-BE49-F238E27FC236}">
-                <a16:creationId xmlns:a16="http://schemas.microsoft.com/office/drawing/2014/main" id="{73B4DAAC-F69B-4EBD-833C-877EA49698BE}"/>
-              </a:ext>
-            </a:extLst>
-          </p:cNvPr>
-          <p:cNvSpPr>
-            <a:spLocks xmlns:a="http://schemas.openxmlformats.org/drawingml/2006/main" noGrp="1"/>
-          </p:cNvSpPr>
-          <p:nvPr/>
-        </p:nvSpPr>
-        <p:spPr>
-          <a:xfrm xmlns:a="http://schemas.openxmlformats.org/drawingml/2006/main">
-            <a:off x="1005840" y="3785616"/>
-            <a:ext cx="2743200" cy="402336"/>
+          <a:ln xmlns:a="http://schemas.openxmlformats.org/drawingml/2006/main" w="0">
+            <a:noFill/>
+            <a:prstDash val="solid"/>
+          </a:ln>
+        </p:spPr>
+        <p:txBody>
+          <a:bodyPr xmlns:a="http://schemas.openxmlformats.org/drawingml/2006/main" wrap="square" anchor="t"/>
+          <a:lstStyle xmlns:a="http://schemas.openxmlformats.org/drawingml/2006/main">
+            <a:defPPr algn="l">
+              <a:defRPr sz="1650" b="1">
+                <a:solidFill>
+                  <a:srgbClr val="32D6A6"/>
+                </a:solidFill>
+                <a:latin typeface="Aptos Display"/>
+                <a:ea typeface="Aptos Display"/>
+                <a:cs typeface="Aptos Display"/>
+              </a:defRPr>
+            </a:defPPr>
+            <a:lvl1pPr algn="l">
+              <a:defRPr sz="1650" b="1">
+                <a:solidFill>
+                  <a:srgbClr val="32D6A6"/>
+                </a:solidFill>
+                <a:latin typeface="Aptos Display"/>
+                <a:ea typeface="Aptos Display"/>
+                <a:cs typeface="Aptos Display"/>
+              </a:defRPr>
+            </a:lvl1pPr>
+            <a:lvl2pPr algn="l">
+              <a:defRPr sz="1650" b="1">
+                <a:solidFill>
+                  <a:srgbClr val="32D6A6"/>
+                </a:solidFill>
+                <a:latin typeface="Aptos Display"/>
+                <a:ea typeface="Aptos Display"/>
+                <a:cs typeface="Aptos Display"/>
+              </a:defRPr>
+            </a:lvl2pPr>
+            <a:lvl3pPr algn="l">
+              <a:defRPr sz="1650" b="1">
+                <a:solidFill>
+                  <a:srgbClr val="32D6A6"/>
+                </a:solidFill>
+                <a:latin typeface="Aptos Display"/>
+                <a:ea typeface="Aptos Display"/>
+                <a:cs typeface="Aptos Display"/>
+              </a:defRPr>
+            </a:lvl3pPr>
+            <a:lvl4pPr algn="l">
+              <a:defRPr sz="1650" b="1">
+                <a:solidFill>
+                  <a:srgbClr val="32D6A6"/>
+                </a:solidFill>
+                <a:latin typeface="Aptos Display"/>
+                <a:ea typeface="Aptos Display"/>
+                <a:cs typeface="Aptos Display"/>
+              </a:defRPr>
+            </a:lvl4pPr>
+            <a:lvl5pPr algn="l">
+              <a:defRPr sz="1650" b="1">
+                <a:solidFill>
+                  <a:srgbClr val="32D6A6"/>
+                </a:solidFill>
+                <a:latin typeface="Aptos Display"/>
+                <a:ea typeface="Aptos Display"/>
+                <a:cs typeface="Aptos Display"/>
+              </a:defRPr>
+            </a:lvl5pPr>
+            <a:lvl6pPr algn="l">
+              <a:defRPr sz="1650" b="1">
+                <a:solidFill>
+                  <a:srgbClr val="32D6A6"/>
+                </a:solidFill>
+                <a:latin typeface="Aptos Display"/>
+                <a:ea typeface="Aptos Display"/>
+                <a:cs typeface="Aptos Display"/>
+              </a:defRPr>
+            </a:lvl6pPr>
+            <a:lvl7pPr algn="l">
+              <a:defRPr sz="1650" b="1">
+                <a:solidFill>
+                  <a:srgbClr val="32D6A6"/>
+                </a:solidFill>
+                <a:latin typeface="Aptos Display"/>
+                <a:ea typeface="Aptos Display"/>
+                <a:cs typeface="Aptos Display"/>
+              </a:defRPr>
+            </a:lvl7pPr>
+            <a:lvl8pPr algn="l">
+              <a:defRPr sz="1650" b="1">
+                <a:solidFill>
+                  <a:srgbClr val="32D6A6"/>
+                </a:solidFill>
+                <a:latin typeface="Aptos Display"/>
+                <a:ea typeface="Aptos Display"/>
+                <a:cs typeface="Aptos Display"/>
+              </a:defRPr>
+            </a:lvl8pPr>
+            <a:lvl9pPr algn="l">
+              <a:defRPr sz="1650" b="1">
+                <a:solidFill>
+                  <a:srgbClr val="32D6A6"/>
+                </a:solidFill>
+                <a:latin typeface="Aptos Display"/>
+                <a:ea typeface="Aptos Display"/>
+                <a:cs typeface="Aptos Display"/>
+              </a:defRPr>
+            </a:lvl9pPr>
+          </a:lstStyle>
+          <a:p xmlns:a="http://schemas.openxmlformats.org/drawingml/2006/main">
+            <a:pPr algn="l">
+              <a:defRPr sz="1650" b="1">
+                <a:solidFill>
+                  <a:srgbClr val="32D6A6"/>
+                </a:solidFill>
+                <a:latin typeface="Aptos Display"/>
+                <a:ea typeface="Aptos Display"/>
+                <a:cs typeface="Aptos Display"/>
+              </a:defRPr>
+            </a:pPr>
+            <a:r>
+              <a:rPr sz="1650" b="1">
+                <a:solidFill>
+                  <a:srgbClr val="32D6A6"/>
+                </a:solidFill>
+                <a:latin typeface="Aptos Display"/>
+                <a:ea typeface="Aptos Display"/>
+                <a:cs typeface="Aptos Display"/>
+              </a:rPr>
+              <a:t>→</a:t>
+            </a:r>
+          </a:p>
+        </p:txBody>
+      </p:sp>
+      <p:sp>
+        <p:nvSpPr>
+          <p:cNvPr id="9" name="architecture-stage-2-label">
+            <a:extLst xmlns:a="http://schemas.openxmlformats.org/drawingml/2006/main">
+              <a:ext uri="{FF2B5EF4-FFF2-40B4-BE49-F238E27FC236}">
+                <a16:creationId xmlns:a16="http://schemas.microsoft.com/office/drawing/2014/main" id="{ADA67C6C-ACD7-4381-9CBF-382BD0B408E2}"/>
+              </a:ext>
+            </a:extLst>
+          </p:cNvPr>
+          <p:cNvSpPr>
+            <a:spLocks xmlns:a="http://schemas.openxmlformats.org/drawingml/2006/main" noGrp="1"/>
+          </p:cNvSpPr>
+          <p:nvPr/>
+        </p:nvSpPr>
+        <p:spPr>
+          <a:xfrm xmlns:a="http://schemas.openxmlformats.org/drawingml/2006/main">
+            <a:off x="3409950" y="2705100"/>
+            <a:ext cx="2095500" cy="266700"/>
           </a:xfrm>
           <a:prstGeom xmlns:a="http://schemas.openxmlformats.org/drawingml/2006/main" prst="rect">
             <a:avLst/>
           </a:prstGeom>
           <a:noFill xmlns:a="http://schemas.openxmlformats.org/drawingml/2006/main"/>
-        </p:spPr>
-        <p:txBody>
-          <a:bodyPr xmlns:a="http://schemas.openxmlformats.org/drawingml/2006/main" wrap="square" lIns="0" tIns="0" rIns="0" bIns="0" anchor="ctr">
-            <a:normAutofit/>
-          </a:bodyPr>
-          <a:lstStyle xmlns:a="http://schemas.openxmlformats.org/drawingml/2006/main"/>
-          <a:p xmlns:a="http://schemas.openxmlformats.org/drawingml/2006/main">
-            <a:pPr marL="0" indent="0">
-              <a:buNone/>
-            </a:pPr>
-            <a:r>
-              <a:rPr sz="2000" b="1">
-                <a:solidFill>
-                  <a:srgbClr val="F3F7F4"/>
-                </a:solidFill>
-                <a:latin typeface="Aptos Display"/>
-                <a:ea typeface="Aptos Display"/>
-                <a:cs typeface="Aptos Display"/>
-              </a:rPr>
-              <a:t>Prototype</a:t>
-            </a:r>
-            <a:endParaRPr sz="2000"/>
-          </a:p>
-        </p:txBody>
-      </p:sp>
-      <p:sp>
-        <p:nvSpPr>
-          <p:cNvPr id="9" name="Text 7">
-            <a:extLst xmlns:a="http://schemas.openxmlformats.org/drawingml/2006/main">
-              <a:ext uri="{FF2B5EF4-FFF2-40B4-BE49-F238E27FC236}">
-                <a16:creationId xmlns:a16="http://schemas.microsoft.com/office/drawing/2014/main" id="{23987C6C-86B2-4A89-8D54-CD4CB0A49ACF}"/>
-              </a:ext>
-            </a:extLst>
-          </p:cNvPr>
-          <p:cNvSpPr>
-            <a:spLocks xmlns:a="http://schemas.openxmlformats.org/drawingml/2006/main" noGrp="1"/>
-          </p:cNvSpPr>
-          <p:nvPr/>
-        </p:nvSpPr>
-        <p:spPr>
-          <a:xfrm xmlns:a="http://schemas.openxmlformats.org/drawingml/2006/main">
-            <a:off x="1005840" y="4407408"/>
-            <a:ext cx="2834640" cy="658368"/>
+          <a:ln xmlns:a="http://schemas.openxmlformats.org/drawingml/2006/main" w="0">
+            <a:noFill/>
+            <a:prstDash val="solid"/>
+          </a:ln>
+        </p:spPr>
+        <p:txBody>
+          <a:bodyPr xmlns:a="http://schemas.openxmlformats.org/drawingml/2006/main" wrap="square" anchor="t"/>
+          <a:lstStyle xmlns:a="http://schemas.openxmlformats.org/drawingml/2006/main">
+            <a:defPPr algn="l">
+              <a:defRPr sz="1125" b="1">
+                <a:solidFill>
+                  <a:srgbClr val="32D6A6"/>
+                </a:solidFill>
+                <a:latin typeface="Aptos Display"/>
+                <a:ea typeface="Aptos Display"/>
+                <a:cs typeface="Aptos Display"/>
+              </a:defRPr>
+            </a:defPPr>
+            <a:lvl1pPr algn="l">
+              <a:defRPr sz="1125" b="1">
+                <a:solidFill>
+                  <a:srgbClr val="32D6A6"/>
+                </a:solidFill>
+                <a:latin typeface="Aptos Display"/>
+                <a:ea typeface="Aptos Display"/>
+                <a:cs typeface="Aptos Display"/>
+              </a:defRPr>
+            </a:lvl1pPr>
+            <a:lvl2pPr algn="l">
+              <a:defRPr sz="1125" b="1">
+                <a:solidFill>
+                  <a:srgbClr val="32D6A6"/>
+                </a:solidFill>
+                <a:latin typeface="Aptos Display"/>
+                <a:ea typeface="Aptos Display"/>
+                <a:cs typeface="Aptos Display"/>
+              </a:defRPr>
+            </a:lvl2pPr>
+            <a:lvl3pPr algn="l">
+              <a:defRPr sz="1125" b="1">
+                <a:solidFill>
+                  <a:srgbClr val="32D6A6"/>
+                </a:solidFill>
+                <a:latin typeface="Aptos Display"/>
+                <a:ea typeface="Aptos Display"/>
+                <a:cs typeface="Aptos Display"/>
+              </a:defRPr>
+            </a:lvl3pPr>
+            <a:lvl4pPr algn="l">
+              <a:defRPr sz="1125" b="1">
+                <a:solidFill>
+                  <a:srgbClr val="32D6A6"/>
+                </a:solidFill>
+                <a:latin typeface="Aptos Display"/>
+                <a:ea typeface="Aptos Display"/>
+                <a:cs typeface="Aptos Display"/>
+              </a:defRPr>
+            </a:lvl4pPr>
+            <a:lvl5pPr algn="l">
+              <a:defRPr sz="1125" b="1">
+                <a:solidFill>
+                  <a:srgbClr val="32D6A6"/>
+                </a:solidFill>
+                <a:latin typeface="Aptos Display"/>
+                <a:ea typeface="Aptos Display"/>
+                <a:cs typeface="Aptos Display"/>
+              </a:defRPr>
+            </a:lvl5pPr>
+            <a:lvl6pPr algn="l">
+              <a:defRPr sz="1125" b="1">
+                <a:solidFill>
+                  <a:srgbClr val="32D6A6"/>
+                </a:solidFill>
+                <a:latin typeface="Aptos Display"/>
+                <a:ea typeface="Aptos Display"/>
+                <a:cs typeface="Aptos Display"/>
+              </a:defRPr>
+            </a:lvl6pPr>
+            <a:lvl7pPr algn="l">
+              <a:defRPr sz="1125" b="1">
+                <a:solidFill>
+                  <a:srgbClr val="32D6A6"/>
+                </a:solidFill>
+                <a:latin typeface="Aptos Display"/>
+                <a:ea typeface="Aptos Display"/>
+                <a:cs typeface="Aptos Display"/>
+              </a:defRPr>
+            </a:lvl7pPr>
+            <a:lvl8pPr algn="l">
+              <a:defRPr sz="1125" b="1">
+                <a:solidFill>
+                  <a:srgbClr val="32D6A6"/>
+                </a:solidFill>
+                <a:latin typeface="Aptos Display"/>
+                <a:ea typeface="Aptos Display"/>
+                <a:cs typeface="Aptos Display"/>
+              </a:defRPr>
+            </a:lvl8pPr>
+            <a:lvl9pPr algn="l">
+              <a:defRPr sz="1125" b="1">
+                <a:solidFill>
+                  <a:srgbClr val="32D6A6"/>
+                </a:solidFill>
+                <a:latin typeface="Aptos Display"/>
+                <a:ea typeface="Aptos Display"/>
+                <a:cs typeface="Aptos Display"/>
+              </a:defRPr>
+            </a:lvl9pPr>
+          </a:lstStyle>
+          <a:p xmlns:a="http://schemas.openxmlformats.org/drawingml/2006/main">
+            <a:pPr algn="l">
+              <a:defRPr sz="1125" b="1">
+                <a:solidFill>
+                  <a:srgbClr val="32D6A6"/>
+                </a:solidFill>
+                <a:latin typeface="Aptos Display"/>
+                <a:ea typeface="Aptos Display"/>
+                <a:cs typeface="Aptos Display"/>
+              </a:defRPr>
+            </a:pPr>
+            <a:r>
+              <a:rPr sz="1125" b="1">
+                <a:solidFill>
+                  <a:srgbClr val="32D6A6"/>
+                </a:solidFill>
+                <a:latin typeface="Aptos Display"/>
+                <a:ea typeface="Aptos Display"/>
+                <a:cs typeface="Aptos Display"/>
+              </a:rPr>
+              <a:t>SIGN-IN</a:t>
+            </a:r>
+          </a:p>
+        </p:txBody>
+      </p:sp>
+      <p:sp>
+        <p:nvSpPr>
+          <p:cNvPr id="10" name="architecture-stage-2-body">
+            <a:extLst xmlns:a="http://schemas.openxmlformats.org/drawingml/2006/main">
+              <a:ext uri="{FF2B5EF4-FFF2-40B4-BE49-F238E27FC236}">
+                <a16:creationId xmlns:a16="http://schemas.microsoft.com/office/drawing/2014/main" id="{8F6DE23B-3EAA-4534-BC78-68E5F0109D52}"/>
+              </a:ext>
+            </a:extLst>
+          </p:cNvPr>
+          <p:cNvSpPr>
+            <a:spLocks xmlns:a="http://schemas.openxmlformats.org/drawingml/2006/main" noGrp="1"/>
+          </p:cNvSpPr>
+          <p:nvPr/>
+        </p:nvSpPr>
+        <p:spPr>
+          <a:xfrm xmlns:a="http://schemas.openxmlformats.org/drawingml/2006/main">
+            <a:off x="3409950" y="3105150"/>
+            <a:ext cx="2238375" cy="742950"/>
           </a:xfrm>
           <a:prstGeom xmlns:a="http://schemas.openxmlformats.org/drawingml/2006/main" prst="rect">
             <a:avLst/>
           </a:prstGeom>
           <a:noFill xmlns:a="http://schemas.openxmlformats.org/drawingml/2006/main"/>
-        </p:spPr>
-        <p:txBody>
-          <a:bodyPr xmlns:a="http://schemas.openxmlformats.org/drawingml/2006/main" wrap="square" lIns="0" tIns="0" rIns="0" bIns="0" anchor="t">
-            <a:normAutofit/>
-          </a:bodyPr>
-          <a:lstStyle xmlns:a="http://schemas.openxmlformats.org/drawingml/2006/main"/>
-          <a:p xmlns:a="http://schemas.openxmlformats.org/drawingml/2006/main">
-            <a:pPr marL="0" indent="0">
-              <a:buNone/>
-            </a:pPr>
-            <a:r>
-              <a:rPr sz="1500">
-                <a:solidFill>
-                  <a:srgbClr val="8CA399"/>
+          <a:ln xmlns:a="http://schemas.openxmlformats.org/drawingml/2006/main" w="0">
+            <a:noFill/>
+            <a:prstDash val="solid"/>
+          </a:ln>
+        </p:spPr>
+        <p:txBody>
+          <a:bodyPr xmlns:a="http://schemas.openxmlformats.org/drawingml/2006/main" wrap="square" anchor="t"/>
+          <a:lstStyle xmlns:a="http://schemas.openxmlformats.org/drawingml/2006/main">
+            <a:defPPr algn="l">
+              <a:defRPr sz="1650" b="1">
+                <a:solidFill>
+                  <a:srgbClr val="F3F7F4"/>
+                </a:solidFill>
+                <a:latin typeface="Aptos Display"/>
+                <a:ea typeface="Aptos Display"/>
+                <a:cs typeface="Aptos Display"/>
+              </a:defRPr>
+            </a:defPPr>
+            <a:lvl1pPr algn="l">
+              <a:defRPr sz="1650" b="1">
+                <a:solidFill>
+                  <a:srgbClr val="F3F7F4"/>
+                </a:solidFill>
+                <a:latin typeface="Aptos Display"/>
+                <a:ea typeface="Aptos Display"/>
+                <a:cs typeface="Aptos Display"/>
+              </a:defRPr>
+            </a:lvl1pPr>
+            <a:lvl2pPr algn="l">
+              <a:defRPr sz="1650" b="1">
+                <a:solidFill>
+                  <a:srgbClr val="F3F7F4"/>
+                </a:solidFill>
+                <a:latin typeface="Aptos Display"/>
+                <a:ea typeface="Aptos Display"/>
+                <a:cs typeface="Aptos Display"/>
+              </a:defRPr>
+            </a:lvl2pPr>
+            <a:lvl3pPr algn="l">
+              <a:defRPr sz="1650" b="1">
+                <a:solidFill>
+                  <a:srgbClr val="F3F7F4"/>
+                </a:solidFill>
+                <a:latin typeface="Aptos Display"/>
+                <a:ea typeface="Aptos Display"/>
+                <a:cs typeface="Aptos Display"/>
+              </a:defRPr>
+            </a:lvl3pPr>
+            <a:lvl4pPr algn="l">
+              <a:defRPr sz="1650" b="1">
+                <a:solidFill>
+                  <a:srgbClr val="F3F7F4"/>
+                </a:solidFill>
+                <a:latin typeface="Aptos Display"/>
+                <a:ea typeface="Aptos Display"/>
+                <a:cs typeface="Aptos Display"/>
+              </a:defRPr>
+            </a:lvl4pPr>
+            <a:lvl5pPr algn="l">
+              <a:defRPr sz="1650" b="1">
+                <a:solidFill>
+                  <a:srgbClr val="F3F7F4"/>
+                </a:solidFill>
+                <a:latin typeface="Aptos Display"/>
+                <a:ea typeface="Aptos Display"/>
+                <a:cs typeface="Aptos Display"/>
+              </a:defRPr>
+            </a:lvl5pPr>
+            <a:lvl6pPr algn="l">
+              <a:defRPr sz="1650" b="1">
+                <a:solidFill>
+                  <a:srgbClr val="F3F7F4"/>
+                </a:solidFill>
+                <a:latin typeface="Aptos Display"/>
+                <a:ea typeface="Aptos Display"/>
+                <a:cs typeface="Aptos Display"/>
+              </a:defRPr>
+            </a:lvl6pPr>
+            <a:lvl7pPr algn="l">
+              <a:defRPr sz="1650" b="1">
+                <a:solidFill>
+                  <a:srgbClr val="F3F7F4"/>
+                </a:solidFill>
+                <a:latin typeface="Aptos Display"/>
+                <a:ea typeface="Aptos Display"/>
+                <a:cs typeface="Aptos Display"/>
+              </a:defRPr>
+            </a:lvl7pPr>
+            <a:lvl8pPr algn="l">
+              <a:defRPr sz="1650" b="1">
+                <a:solidFill>
+                  <a:srgbClr val="F3F7F4"/>
+                </a:solidFill>
+                <a:latin typeface="Aptos Display"/>
+                <a:ea typeface="Aptos Display"/>
+                <a:cs typeface="Aptos Display"/>
+              </a:defRPr>
+            </a:lvl8pPr>
+            <a:lvl9pPr algn="l">
+              <a:defRPr sz="1650" b="1">
+                <a:solidFill>
+                  <a:srgbClr val="F3F7F4"/>
+                </a:solidFill>
+                <a:latin typeface="Aptos Display"/>
+                <a:ea typeface="Aptos Display"/>
+                <a:cs typeface="Aptos Display"/>
+              </a:defRPr>
+            </a:lvl9pPr>
+          </a:lstStyle>
+          <a:p xmlns:a="http://schemas.openxmlformats.org/drawingml/2006/main">
+            <a:pPr algn="l">
+              <a:defRPr sz="1650" b="1">
+                <a:solidFill>
+                  <a:srgbClr val="F3F7F4"/>
+                </a:solidFill>
+                <a:latin typeface="Aptos Display"/>
+                <a:ea typeface="Aptos Display"/>
+                <a:cs typeface="Aptos Display"/>
+              </a:defRPr>
+            </a:pPr>
+            <a:r>
+              <a:rPr sz="1650" b="1">
+                <a:solidFill>
+                  <a:srgbClr val="F3F7F4"/>
+                </a:solidFill>
+                <a:latin typeface="Aptos Display"/>
+                <a:ea typeface="Aptos Display"/>
+                <a:cs typeface="Aptos Display"/>
+              </a:rPr>
+              <a:t>Supabase Auth</a:t>
+            </a:r>
+          </a:p>
+          <a:p xmlns:a="http://schemas.openxmlformats.org/drawingml/2006/main">
+            <a:pPr algn="l">
+              <a:defRPr sz="1650" b="1">
+                <a:solidFill>
+                  <a:srgbClr val="F3F7F4"/>
+                </a:solidFill>
+                <a:latin typeface="Aptos Display"/>
+                <a:ea typeface="Aptos Display"/>
+                <a:cs typeface="Aptos Display"/>
+              </a:defRPr>
+            </a:pPr>
+            <a:r>
+              <a:rPr sz="1650" b="1">
+                <a:solidFill>
+                  <a:srgbClr val="F3F7F4"/>
+                </a:solidFill>
+                <a:latin typeface="Aptos Display"/>
+                <a:ea typeface="Aptos Display"/>
+                <a:cs typeface="Aptos Display"/>
+              </a:rPr>
+              <a:t>Email and password</a:t>
+            </a:r>
+          </a:p>
+        </p:txBody>
+      </p:sp>
+      <p:sp>
+        <p:nvSpPr>
+          <p:cNvPr id="11" name="architecture-connector-2">
+            <a:extLst xmlns:a="http://schemas.openxmlformats.org/drawingml/2006/main">
+              <a:ext uri="{FF2B5EF4-FFF2-40B4-BE49-F238E27FC236}">
+                <a16:creationId xmlns:a16="http://schemas.microsoft.com/office/drawing/2014/main" id="{800EFC5F-FBC0-4FA1-A784-938255A28BC3}"/>
+              </a:ext>
+            </a:extLst>
+          </p:cNvPr>
+          <p:cNvSpPr>
+            <a:spLocks xmlns:a="http://schemas.openxmlformats.org/drawingml/2006/main" noGrp="1"/>
+          </p:cNvSpPr>
+          <p:nvPr/>
+        </p:nvSpPr>
+        <p:spPr>
+          <a:xfrm xmlns:a="http://schemas.openxmlformats.org/drawingml/2006/main">
+            <a:off x="5676900" y="2800350"/>
+            <a:ext cx="428625" cy="19050"/>
+          </a:xfrm>
+          <a:prstGeom xmlns:a="http://schemas.openxmlformats.org/drawingml/2006/main" prst="rect">
+            <a:avLst/>
+          </a:prstGeom>
+          <a:solidFill xmlns:a="http://schemas.openxmlformats.org/drawingml/2006/main">
+            <a:srgbClr val="33463D"/>
+          </a:solidFill>
+          <a:ln xmlns:a="http://schemas.openxmlformats.org/drawingml/2006/main" w="0">
+            <a:solidFill>
+              <a:srgbClr val="33463D"/>
+            </a:solidFill>
+            <a:prstDash val="solid"/>
+          </a:ln>
+        </p:spPr>
+      </p:sp>
+      <p:sp>
+        <p:nvSpPr>
+          <p:cNvPr id="12" name="architecture-arrow-2">
+            <a:extLst xmlns:a="http://schemas.openxmlformats.org/drawingml/2006/main">
+              <a:ext uri="{FF2B5EF4-FFF2-40B4-BE49-F238E27FC236}">
+                <a16:creationId xmlns:a16="http://schemas.microsoft.com/office/drawing/2014/main" id="{FA21655A-CB21-4BB1-BDA8-4B3C00580C81}"/>
+              </a:ext>
+            </a:extLst>
+          </p:cNvPr>
+          <p:cNvSpPr>
+            <a:spLocks xmlns:a="http://schemas.openxmlformats.org/drawingml/2006/main" noGrp="1"/>
+          </p:cNvSpPr>
+          <p:nvPr/>
+        </p:nvSpPr>
+        <p:spPr>
+          <a:xfrm xmlns:a="http://schemas.openxmlformats.org/drawingml/2006/main">
+            <a:off x="5791200" y="2638425"/>
+            <a:ext cx="266700" cy="266700"/>
+          </a:xfrm>
+          <a:prstGeom xmlns:a="http://schemas.openxmlformats.org/drawingml/2006/main" prst="rect">
+            <a:avLst/>
+          </a:prstGeom>
+          <a:noFill xmlns:a="http://schemas.openxmlformats.org/drawingml/2006/main"/>
+          <a:ln xmlns:a="http://schemas.openxmlformats.org/drawingml/2006/main" w="0">
+            <a:noFill/>
+            <a:prstDash val="solid"/>
+          </a:ln>
+        </p:spPr>
+        <p:txBody>
+          <a:bodyPr xmlns:a="http://schemas.openxmlformats.org/drawingml/2006/main" wrap="square" anchor="t"/>
+          <a:lstStyle xmlns:a="http://schemas.openxmlformats.org/drawingml/2006/main">
+            <a:defPPr algn="l">
+              <a:defRPr sz="1650" b="1">
+                <a:solidFill>
+                  <a:srgbClr val="32D6A6"/>
+                </a:solidFill>
+                <a:latin typeface="Aptos Display"/>
+                <a:ea typeface="Aptos Display"/>
+                <a:cs typeface="Aptos Display"/>
+              </a:defRPr>
+            </a:defPPr>
+            <a:lvl1pPr algn="l">
+              <a:defRPr sz="1650" b="1">
+                <a:solidFill>
+                  <a:srgbClr val="32D6A6"/>
+                </a:solidFill>
+                <a:latin typeface="Aptos Display"/>
+                <a:ea typeface="Aptos Display"/>
+                <a:cs typeface="Aptos Display"/>
+              </a:defRPr>
+            </a:lvl1pPr>
+            <a:lvl2pPr algn="l">
+              <a:defRPr sz="1650" b="1">
+                <a:solidFill>
+                  <a:srgbClr val="32D6A6"/>
+                </a:solidFill>
+                <a:latin typeface="Aptos Display"/>
+                <a:ea typeface="Aptos Display"/>
+                <a:cs typeface="Aptos Display"/>
+              </a:defRPr>
+            </a:lvl2pPr>
+            <a:lvl3pPr algn="l">
+              <a:defRPr sz="1650" b="1">
+                <a:solidFill>
+                  <a:srgbClr val="32D6A6"/>
+                </a:solidFill>
+                <a:latin typeface="Aptos Display"/>
+                <a:ea typeface="Aptos Display"/>
+                <a:cs typeface="Aptos Display"/>
+              </a:defRPr>
+            </a:lvl3pPr>
+            <a:lvl4pPr algn="l">
+              <a:defRPr sz="1650" b="1">
+                <a:solidFill>
+                  <a:srgbClr val="32D6A6"/>
+                </a:solidFill>
+                <a:latin typeface="Aptos Display"/>
+                <a:ea typeface="Aptos Display"/>
+                <a:cs typeface="Aptos Display"/>
+              </a:defRPr>
+            </a:lvl4pPr>
+            <a:lvl5pPr algn="l">
+              <a:defRPr sz="1650" b="1">
+                <a:solidFill>
+                  <a:srgbClr val="32D6A6"/>
+                </a:solidFill>
+                <a:latin typeface="Aptos Display"/>
+                <a:ea typeface="Aptos Display"/>
+                <a:cs typeface="Aptos Display"/>
+              </a:defRPr>
+            </a:lvl5pPr>
+            <a:lvl6pPr algn="l">
+              <a:defRPr sz="1650" b="1">
+                <a:solidFill>
+                  <a:srgbClr val="32D6A6"/>
+                </a:solidFill>
+                <a:latin typeface="Aptos Display"/>
+                <a:ea typeface="Aptos Display"/>
+                <a:cs typeface="Aptos Display"/>
+              </a:defRPr>
+            </a:lvl6pPr>
+            <a:lvl7pPr algn="l">
+              <a:defRPr sz="1650" b="1">
+                <a:solidFill>
+                  <a:srgbClr val="32D6A6"/>
+                </a:solidFill>
+                <a:latin typeface="Aptos Display"/>
+                <a:ea typeface="Aptos Display"/>
+                <a:cs typeface="Aptos Display"/>
+              </a:defRPr>
+            </a:lvl7pPr>
+            <a:lvl8pPr algn="l">
+              <a:defRPr sz="1650" b="1">
+                <a:solidFill>
+                  <a:srgbClr val="32D6A6"/>
+                </a:solidFill>
+                <a:latin typeface="Aptos Display"/>
+                <a:ea typeface="Aptos Display"/>
+                <a:cs typeface="Aptos Display"/>
+              </a:defRPr>
+            </a:lvl8pPr>
+            <a:lvl9pPr algn="l">
+              <a:defRPr sz="1650" b="1">
+                <a:solidFill>
+                  <a:srgbClr val="32D6A6"/>
+                </a:solidFill>
+                <a:latin typeface="Aptos Display"/>
+                <a:ea typeface="Aptos Display"/>
+                <a:cs typeface="Aptos Display"/>
+              </a:defRPr>
+            </a:lvl9pPr>
+          </a:lstStyle>
+          <a:p xmlns:a="http://schemas.openxmlformats.org/drawingml/2006/main">
+            <a:pPr algn="l">
+              <a:defRPr sz="1650" b="1">
+                <a:solidFill>
+                  <a:srgbClr val="32D6A6"/>
+                </a:solidFill>
+                <a:latin typeface="Aptos Display"/>
+                <a:ea typeface="Aptos Display"/>
+                <a:cs typeface="Aptos Display"/>
+              </a:defRPr>
+            </a:pPr>
+            <a:r>
+              <a:rPr sz="1650" b="1">
+                <a:solidFill>
+                  <a:srgbClr val="32D6A6"/>
+                </a:solidFill>
+                <a:latin typeface="Aptos Display"/>
+                <a:ea typeface="Aptos Display"/>
+                <a:cs typeface="Aptos Display"/>
+              </a:rPr>
+              <a:t>→</a:t>
+            </a:r>
+          </a:p>
+        </p:txBody>
+      </p:sp>
+      <p:sp>
+        <p:nvSpPr>
+          <p:cNvPr id="13" name="architecture-stage-3-label">
+            <a:extLst xmlns:a="http://schemas.openxmlformats.org/drawingml/2006/main">
+              <a:ext uri="{FF2B5EF4-FFF2-40B4-BE49-F238E27FC236}">
+                <a16:creationId xmlns:a16="http://schemas.microsoft.com/office/drawing/2014/main" id="{979E6F30-D282-4A11-B11F-910947C34C41}"/>
+              </a:ext>
+            </a:extLst>
+          </p:cNvPr>
+          <p:cNvSpPr>
+            <a:spLocks xmlns:a="http://schemas.openxmlformats.org/drawingml/2006/main" noGrp="1"/>
+          </p:cNvSpPr>
+          <p:nvPr/>
+        </p:nvSpPr>
+        <p:spPr>
+          <a:xfrm xmlns:a="http://schemas.openxmlformats.org/drawingml/2006/main">
+            <a:off x="6134100" y="2705100"/>
+            <a:ext cx="2095500" cy="266700"/>
+          </a:xfrm>
+          <a:prstGeom xmlns:a="http://schemas.openxmlformats.org/drawingml/2006/main" prst="rect">
+            <a:avLst/>
+          </a:prstGeom>
+          <a:noFill xmlns:a="http://schemas.openxmlformats.org/drawingml/2006/main"/>
+          <a:ln xmlns:a="http://schemas.openxmlformats.org/drawingml/2006/main" w="0">
+            <a:noFill/>
+            <a:prstDash val="solid"/>
+          </a:ln>
+        </p:spPr>
+        <p:txBody>
+          <a:bodyPr xmlns:a="http://schemas.openxmlformats.org/drawingml/2006/main" wrap="square" anchor="t"/>
+          <a:lstStyle xmlns:a="http://schemas.openxmlformats.org/drawingml/2006/main">
+            <a:defPPr algn="l">
+              <a:defRPr sz="1125" b="1">
+                <a:solidFill>
+                  <a:srgbClr val="F6C14B"/>
+                </a:solidFill>
+                <a:latin typeface="Aptos Display"/>
+                <a:ea typeface="Aptos Display"/>
+                <a:cs typeface="Aptos Display"/>
+              </a:defRPr>
+            </a:defPPr>
+            <a:lvl1pPr algn="l">
+              <a:defRPr sz="1125" b="1">
+                <a:solidFill>
+                  <a:srgbClr val="F6C14B"/>
+                </a:solidFill>
+                <a:latin typeface="Aptos Display"/>
+                <a:ea typeface="Aptos Display"/>
+                <a:cs typeface="Aptos Display"/>
+              </a:defRPr>
+            </a:lvl1pPr>
+            <a:lvl2pPr algn="l">
+              <a:defRPr sz="1125" b="1">
+                <a:solidFill>
+                  <a:srgbClr val="F6C14B"/>
+                </a:solidFill>
+                <a:latin typeface="Aptos Display"/>
+                <a:ea typeface="Aptos Display"/>
+                <a:cs typeface="Aptos Display"/>
+              </a:defRPr>
+            </a:lvl2pPr>
+            <a:lvl3pPr algn="l">
+              <a:defRPr sz="1125" b="1">
+                <a:solidFill>
+                  <a:srgbClr val="F6C14B"/>
+                </a:solidFill>
+                <a:latin typeface="Aptos Display"/>
+                <a:ea typeface="Aptos Display"/>
+                <a:cs typeface="Aptos Display"/>
+              </a:defRPr>
+            </a:lvl3pPr>
+            <a:lvl4pPr algn="l">
+              <a:defRPr sz="1125" b="1">
+                <a:solidFill>
+                  <a:srgbClr val="F6C14B"/>
+                </a:solidFill>
+                <a:latin typeface="Aptos Display"/>
+                <a:ea typeface="Aptos Display"/>
+                <a:cs typeface="Aptos Display"/>
+              </a:defRPr>
+            </a:lvl4pPr>
+            <a:lvl5pPr algn="l">
+              <a:defRPr sz="1125" b="1">
+                <a:solidFill>
+                  <a:srgbClr val="F6C14B"/>
+                </a:solidFill>
+                <a:latin typeface="Aptos Display"/>
+                <a:ea typeface="Aptos Display"/>
+                <a:cs typeface="Aptos Display"/>
+              </a:defRPr>
+            </a:lvl5pPr>
+            <a:lvl6pPr algn="l">
+              <a:defRPr sz="1125" b="1">
+                <a:solidFill>
+                  <a:srgbClr val="F6C14B"/>
+                </a:solidFill>
+                <a:latin typeface="Aptos Display"/>
+                <a:ea typeface="Aptos Display"/>
+                <a:cs typeface="Aptos Display"/>
+              </a:defRPr>
+            </a:lvl6pPr>
+            <a:lvl7pPr algn="l">
+              <a:defRPr sz="1125" b="1">
+                <a:solidFill>
+                  <a:srgbClr val="F6C14B"/>
+                </a:solidFill>
+                <a:latin typeface="Aptos Display"/>
+                <a:ea typeface="Aptos Display"/>
+                <a:cs typeface="Aptos Display"/>
+              </a:defRPr>
+            </a:lvl7pPr>
+            <a:lvl8pPr algn="l">
+              <a:defRPr sz="1125" b="1">
+                <a:solidFill>
+                  <a:srgbClr val="F6C14B"/>
+                </a:solidFill>
+                <a:latin typeface="Aptos Display"/>
+                <a:ea typeface="Aptos Display"/>
+                <a:cs typeface="Aptos Display"/>
+              </a:defRPr>
+            </a:lvl8pPr>
+            <a:lvl9pPr algn="l">
+              <a:defRPr sz="1125" b="1">
+                <a:solidFill>
+                  <a:srgbClr val="F6C14B"/>
+                </a:solidFill>
+                <a:latin typeface="Aptos Display"/>
+                <a:ea typeface="Aptos Display"/>
+                <a:cs typeface="Aptos Display"/>
+              </a:defRPr>
+            </a:lvl9pPr>
+          </a:lstStyle>
+          <a:p xmlns:a="http://schemas.openxmlformats.org/drawingml/2006/main">
+            <a:pPr algn="l">
+              <a:defRPr sz="1125" b="1">
+                <a:solidFill>
+                  <a:srgbClr val="F6C14B"/>
+                </a:solidFill>
+                <a:latin typeface="Aptos Display"/>
+                <a:ea typeface="Aptos Display"/>
+                <a:cs typeface="Aptos Display"/>
+              </a:defRPr>
+            </a:pPr>
+            <a:r>
+              <a:rPr sz="1125" b="1">
+                <a:solidFill>
+                  <a:srgbClr val="F6C14B"/>
+                </a:solidFill>
+                <a:latin typeface="Aptos Display"/>
+                <a:ea typeface="Aptos Display"/>
+                <a:cs typeface="Aptos Display"/>
+              </a:rPr>
+              <a:t>API</a:t>
+            </a:r>
+          </a:p>
+        </p:txBody>
+      </p:sp>
+      <p:sp>
+        <p:nvSpPr>
+          <p:cNvPr id="14" name="architecture-stage-3-body">
+            <a:extLst xmlns:a="http://schemas.openxmlformats.org/drawingml/2006/main">
+              <a:ext uri="{FF2B5EF4-FFF2-40B4-BE49-F238E27FC236}">
+                <a16:creationId xmlns:a16="http://schemas.microsoft.com/office/drawing/2014/main" id="{C79C9DBB-2361-4B8C-92E4-4E5CFD5B36F4}"/>
+              </a:ext>
+            </a:extLst>
+          </p:cNvPr>
+          <p:cNvSpPr>
+            <a:spLocks xmlns:a="http://schemas.openxmlformats.org/drawingml/2006/main" noGrp="1"/>
+          </p:cNvSpPr>
+          <p:nvPr/>
+        </p:nvSpPr>
+        <p:spPr>
+          <a:xfrm xmlns:a="http://schemas.openxmlformats.org/drawingml/2006/main">
+            <a:off x="6134100" y="3105150"/>
+            <a:ext cx="2238375" cy="742950"/>
+          </a:xfrm>
+          <a:prstGeom xmlns:a="http://schemas.openxmlformats.org/drawingml/2006/main" prst="rect">
+            <a:avLst/>
+          </a:prstGeom>
+          <a:noFill xmlns:a="http://schemas.openxmlformats.org/drawingml/2006/main"/>
+          <a:ln xmlns:a="http://schemas.openxmlformats.org/drawingml/2006/main" w="0">
+            <a:noFill/>
+            <a:prstDash val="solid"/>
+          </a:ln>
+        </p:spPr>
+        <p:txBody>
+          <a:bodyPr xmlns:a="http://schemas.openxmlformats.org/drawingml/2006/main" wrap="square" anchor="t"/>
+          <a:lstStyle xmlns:a="http://schemas.openxmlformats.org/drawingml/2006/main">
+            <a:defPPr algn="l">
+              <a:defRPr sz="1650" b="1">
+                <a:solidFill>
+                  <a:srgbClr val="F3F7F4"/>
+                </a:solidFill>
+                <a:latin typeface="Aptos Display"/>
+                <a:ea typeface="Aptos Display"/>
+                <a:cs typeface="Aptos Display"/>
+              </a:defRPr>
+            </a:defPPr>
+            <a:lvl1pPr algn="l">
+              <a:defRPr sz="1650" b="1">
+                <a:solidFill>
+                  <a:srgbClr val="F3F7F4"/>
+                </a:solidFill>
+                <a:latin typeface="Aptos Display"/>
+                <a:ea typeface="Aptos Display"/>
+                <a:cs typeface="Aptos Display"/>
+              </a:defRPr>
+            </a:lvl1pPr>
+            <a:lvl2pPr algn="l">
+              <a:defRPr sz="1650" b="1">
+                <a:solidFill>
+                  <a:srgbClr val="F3F7F4"/>
+                </a:solidFill>
+                <a:latin typeface="Aptos Display"/>
+                <a:ea typeface="Aptos Display"/>
+                <a:cs typeface="Aptos Display"/>
+              </a:defRPr>
+            </a:lvl2pPr>
+            <a:lvl3pPr algn="l">
+              <a:defRPr sz="1650" b="1">
+                <a:solidFill>
+                  <a:srgbClr val="F3F7F4"/>
+                </a:solidFill>
+                <a:latin typeface="Aptos Display"/>
+                <a:ea typeface="Aptos Display"/>
+                <a:cs typeface="Aptos Display"/>
+              </a:defRPr>
+            </a:lvl3pPr>
+            <a:lvl4pPr algn="l">
+              <a:defRPr sz="1650" b="1">
+                <a:solidFill>
+                  <a:srgbClr val="F3F7F4"/>
+                </a:solidFill>
+                <a:latin typeface="Aptos Display"/>
+                <a:ea typeface="Aptos Display"/>
+                <a:cs typeface="Aptos Display"/>
+              </a:defRPr>
+            </a:lvl4pPr>
+            <a:lvl5pPr algn="l">
+              <a:defRPr sz="1650" b="1">
+                <a:solidFill>
+                  <a:srgbClr val="F3F7F4"/>
+                </a:solidFill>
+                <a:latin typeface="Aptos Display"/>
+                <a:ea typeface="Aptos Display"/>
+                <a:cs typeface="Aptos Display"/>
+              </a:defRPr>
+            </a:lvl5pPr>
+            <a:lvl6pPr algn="l">
+              <a:defRPr sz="1650" b="1">
+                <a:solidFill>
+                  <a:srgbClr val="F3F7F4"/>
+                </a:solidFill>
+                <a:latin typeface="Aptos Display"/>
+                <a:ea typeface="Aptos Display"/>
+                <a:cs typeface="Aptos Display"/>
+              </a:defRPr>
+            </a:lvl6pPr>
+            <a:lvl7pPr algn="l">
+              <a:defRPr sz="1650" b="1">
+                <a:solidFill>
+                  <a:srgbClr val="F3F7F4"/>
+                </a:solidFill>
+                <a:latin typeface="Aptos Display"/>
+                <a:ea typeface="Aptos Display"/>
+                <a:cs typeface="Aptos Display"/>
+              </a:defRPr>
+            </a:lvl7pPr>
+            <a:lvl8pPr algn="l">
+              <a:defRPr sz="1650" b="1">
+                <a:solidFill>
+                  <a:srgbClr val="F3F7F4"/>
+                </a:solidFill>
+                <a:latin typeface="Aptos Display"/>
+                <a:ea typeface="Aptos Display"/>
+                <a:cs typeface="Aptos Display"/>
+              </a:defRPr>
+            </a:lvl8pPr>
+            <a:lvl9pPr algn="l">
+              <a:defRPr sz="1650" b="1">
+                <a:solidFill>
+                  <a:srgbClr val="F3F7F4"/>
+                </a:solidFill>
+                <a:latin typeface="Aptos Display"/>
+                <a:ea typeface="Aptos Display"/>
+                <a:cs typeface="Aptos Display"/>
+              </a:defRPr>
+            </a:lvl9pPr>
+          </a:lstStyle>
+          <a:p xmlns:a="http://schemas.openxmlformats.org/drawingml/2006/main">
+            <a:pPr algn="l">
+              <a:defRPr sz="1650" b="1">
+                <a:solidFill>
+                  <a:srgbClr val="F3F7F4"/>
+                </a:solidFill>
+                <a:latin typeface="Aptos Display"/>
+                <a:ea typeface="Aptos Display"/>
+                <a:cs typeface="Aptos Display"/>
+              </a:defRPr>
+            </a:pPr>
+            <a:r>
+              <a:rPr sz="1650" b="1">
+                <a:solidFill>
+                  <a:srgbClr val="F3F7F4"/>
+                </a:solidFill>
+                <a:latin typeface="Aptos Display"/>
+                <a:ea typeface="Aptos Display"/>
+                <a:cs typeface="Aptos Display"/>
+              </a:rPr>
+              <a:t>FastAPI / Render</a:t>
+            </a:r>
+          </a:p>
+          <a:p xmlns:a="http://schemas.openxmlformats.org/drawingml/2006/main">
+            <a:pPr algn="l">
+              <a:defRPr sz="1650" b="1">
+                <a:solidFill>
+                  <a:srgbClr val="F3F7F4"/>
+                </a:solidFill>
+                <a:latin typeface="Aptos Display"/>
+                <a:ea typeface="Aptos Display"/>
+                <a:cs typeface="Aptos Display"/>
+              </a:defRPr>
+            </a:pPr>
+            <a:r>
+              <a:rPr sz="1650" b="1">
+                <a:solidFill>
+                  <a:srgbClr val="F3F7F4"/>
+                </a:solidFill>
+                <a:latin typeface="Aptos Display"/>
+                <a:ea typeface="Aptos Display"/>
+                <a:cs typeface="Aptos Display"/>
+              </a:rPr>
+              <a:t>Verifies the user JWT</a:t>
+            </a:r>
+          </a:p>
+        </p:txBody>
+      </p:sp>
+      <p:sp>
+        <p:nvSpPr>
+          <p:cNvPr id="15" name="architecture-connector-3">
+            <a:extLst xmlns:a="http://schemas.openxmlformats.org/drawingml/2006/main">
+              <a:ext uri="{FF2B5EF4-FFF2-40B4-BE49-F238E27FC236}">
+                <a16:creationId xmlns:a16="http://schemas.microsoft.com/office/drawing/2014/main" id="{61FA1533-E7CC-40FA-8F0C-2C70AFB830ED}"/>
+              </a:ext>
+            </a:extLst>
+          </p:cNvPr>
+          <p:cNvSpPr>
+            <a:spLocks xmlns:a="http://schemas.openxmlformats.org/drawingml/2006/main" noGrp="1"/>
+          </p:cNvSpPr>
+          <p:nvPr/>
+        </p:nvSpPr>
+        <p:spPr>
+          <a:xfrm xmlns:a="http://schemas.openxmlformats.org/drawingml/2006/main">
+            <a:off x="8401050" y="2800350"/>
+            <a:ext cx="428625" cy="19050"/>
+          </a:xfrm>
+          <a:prstGeom xmlns:a="http://schemas.openxmlformats.org/drawingml/2006/main" prst="rect">
+            <a:avLst/>
+          </a:prstGeom>
+          <a:solidFill xmlns:a="http://schemas.openxmlformats.org/drawingml/2006/main">
+            <a:srgbClr val="33463D"/>
+          </a:solidFill>
+          <a:ln xmlns:a="http://schemas.openxmlformats.org/drawingml/2006/main" w="0">
+            <a:solidFill>
+              <a:srgbClr val="33463D"/>
+            </a:solidFill>
+            <a:prstDash val="solid"/>
+          </a:ln>
+        </p:spPr>
+      </p:sp>
+      <p:sp>
+        <p:nvSpPr>
+          <p:cNvPr id="16" name="architecture-arrow-3">
+            <a:extLst xmlns:a="http://schemas.openxmlformats.org/drawingml/2006/main">
+              <a:ext uri="{FF2B5EF4-FFF2-40B4-BE49-F238E27FC236}">
+                <a16:creationId xmlns:a16="http://schemas.microsoft.com/office/drawing/2014/main" id="{E1EAE7E9-0D9B-4211-81C9-04847F7C8BE3}"/>
+              </a:ext>
+            </a:extLst>
+          </p:cNvPr>
+          <p:cNvSpPr>
+            <a:spLocks xmlns:a="http://schemas.openxmlformats.org/drawingml/2006/main" noGrp="1"/>
+          </p:cNvSpPr>
+          <p:nvPr/>
+        </p:nvSpPr>
+        <p:spPr>
+          <a:xfrm xmlns:a="http://schemas.openxmlformats.org/drawingml/2006/main">
+            <a:off x="8515350" y="2638425"/>
+            <a:ext cx="266700" cy="266700"/>
+          </a:xfrm>
+          <a:prstGeom xmlns:a="http://schemas.openxmlformats.org/drawingml/2006/main" prst="rect">
+            <a:avLst/>
+          </a:prstGeom>
+          <a:noFill xmlns:a="http://schemas.openxmlformats.org/drawingml/2006/main"/>
+          <a:ln xmlns:a="http://schemas.openxmlformats.org/drawingml/2006/main" w="0">
+            <a:noFill/>
+            <a:prstDash val="solid"/>
+          </a:ln>
+        </p:spPr>
+        <p:txBody>
+          <a:bodyPr xmlns:a="http://schemas.openxmlformats.org/drawingml/2006/main" wrap="square" anchor="t"/>
+          <a:lstStyle xmlns:a="http://schemas.openxmlformats.org/drawingml/2006/main">
+            <a:defPPr algn="l">
+              <a:defRPr sz="1650" b="1">
+                <a:solidFill>
+                  <a:srgbClr val="32D6A6"/>
+                </a:solidFill>
+                <a:latin typeface="Aptos Display"/>
+                <a:ea typeface="Aptos Display"/>
+                <a:cs typeface="Aptos Display"/>
+              </a:defRPr>
+            </a:defPPr>
+            <a:lvl1pPr algn="l">
+              <a:defRPr sz="1650" b="1">
+                <a:solidFill>
+                  <a:srgbClr val="32D6A6"/>
+                </a:solidFill>
+                <a:latin typeface="Aptos Display"/>
+                <a:ea typeface="Aptos Display"/>
+                <a:cs typeface="Aptos Display"/>
+              </a:defRPr>
+            </a:lvl1pPr>
+            <a:lvl2pPr algn="l">
+              <a:defRPr sz="1650" b="1">
+                <a:solidFill>
+                  <a:srgbClr val="32D6A6"/>
+                </a:solidFill>
+                <a:latin typeface="Aptos Display"/>
+                <a:ea typeface="Aptos Display"/>
+                <a:cs typeface="Aptos Display"/>
+              </a:defRPr>
+            </a:lvl2pPr>
+            <a:lvl3pPr algn="l">
+              <a:defRPr sz="1650" b="1">
+                <a:solidFill>
+                  <a:srgbClr val="32D6A6"/>
+                </a:solidFill>
+                <a:latin typeface="Aptos Display"/>
+                <a:ea typeface="Aptos Display"/>
+                <a:cs typeface="Aptos Display"/>
+              </a:defRPr>
+            </a:lvl3pPr>
+            <a:lvl4pPr algn="l">
+              <a:defRPr sz="1650" b="1">
+                <a:solidFill>
+                  <a:srgbClr val="32D6A6"/>
+                </a:solidFill>
+                <a:latin typeface="Aptos Display"/>
+                <a:ea typeface="Aptos Display"/>
+                <a:cs typeface="Aptos Display"/>
+              </a:defRPr>
+            </a:lvl4pPr>
+            <a:lvl5pPr algn="l">
+              <a:defRPr sz="1650" b="1">
+                <a:solidFill>
+                  <a:srgbClr val="32D6A6"/>
+                </a:solidFill>
+                <a:latin typeface="Aptos Display"/>
+                <a:ea typeface="Aptos Display"/>
+                <a:cs typeface="Aptos Display"/>
+              </a:defRPr>
+            </a:lvl5pPr>
+            <a:lvl6pPr algn="l">
+              <a:defRPr sz="1650" b="1">
+                <a:solidFill>
+                  <a:srgbClr val="32D6A6"/>
+                </a:solidFill>
+                <a:latin typeface="Aptos Display"/>
+                <a:ea typeface="Aptos Display"/>
+                <a:cs typeface="Aptos Display"/>
+              </a:defRPr>
+            </a:lvl6pPr>
+            <a:lvl7pPr algn="l">
+              <a:defRPr sz="1650" b="1">
+                <a:solidFill>
+                  <a:srgbClr val="32D6A6"/>
+                </a:solidFill>
+                <a:latin typeface="Aptos Display"/>
+                <a:ea typeface="Aptos Display"/>
+                <a:cs typeface="Aptos Display"/>
+              </a:defRPr>
+            </a:lvl7pPr>
+            <a:lvl8pPr algn="l">
+              <a:defRPr sz="1650" b="1">
+                <a:solidFill>
+                  <a:srgbClr val="32D6A6"/>
+                </a:solidFill>
+                <a:latin typeface="Aptos Display"/>
+                <a:ea typeface="Aptos Display"/>
+                <a:cs typeface="Aptos Display"/>
+              </a:defRPr>
+            </a:lvl8pPr>
+            <a:lvl9pPr algn="l">
+              <a:defRPr sz="1650" b="1">
+                <a:solidFill>
+                  <a:srgbClr val="32D6A6"/>
+                </a:solidFill>
+                <a:latin typeface="Aptos Display"/>
+                <a:ea typeface="Aptos Display"/>
+                <a:cs typeface="Aptos Display"/>
+              </a:defRPr>
+            </a:lvl9pPr>
+          </a:lstStyle>
+          <a:p xmlns:a="http://schemas.openxmlformats.org/drawingml/2006/main">
+            <a:pPr algn="l">
+              <a:defRPr sz="1650" b="1">
+                <a:solidFill>
+                  <a:srgbClr val="32D6A6"/>
+                </a:solidFill>
+                <a:latin typeface="Aptos Display"/>
+                <a:ea typeface="Aptos Display"/>
+                <a:cs typeface="Aptos Display"/>
+              </a:defRPr>
+            </a:pPr>
+            <a:r>
+              <a:rPr sz="1650" b="1">
+                <a:solidFill>
+                  <a:srgbClr val="32D6A6"/>
+                </a:solidFill>
+                <a:latin typeface="Aptos Display"/>
+                <a:ea typeface="Aptos Display"/>
+                <a:cs typeface="Aptos Display"/>
+              </a:rPr>
+              <a:t>→</a:t>
+            </a:r>
+          </a:p>
+        </p:txBody>
+      </p:sp>
+      <p:sp>
+        <p:nvSpPr>
+          <p:cNvPr id="17" name="architecture-stage-4-label">
+            <a:extLst xmlns:a="http://schemas.openxmlformats.org/drawingml/2006/main">
+              <a:ext uri="{FF2B5EF4-FFF2-40B4-BE49-F238E27FC236}">
+                <a16:creationId xmlns:a16="http://schemas.microsoft.com/office/drawing/2014/main" id="{4B2B0F41-5414-4286-BA91-12C1CB5A2608}"/>
+              </a:ext>
+            </a:extLst>
+          </p:cNvPr>
+          <p:cNvSpPr>
+            <a:spLocks xmlns:a="http://schemas.openxmlformats.org/drawingml/2006/main" noGrp="1"/>
+          </p:cNvSpPr>
+          <p:nvPr/>
+        </p:nvSpPr>
+        <p:spPr>
+          <a:xfrm xmlns:a="http://schemas.openxmlformats.org/drawingml/2006/main">
+            <a:off x="8858250" y="2705100"/>
+            <a:ext cx="2095500" cy="266700"/>
+          </a:xfrm>
+          <a:prstGeom xmlns:a="http://schemas.openxmlformats.org/drawingml/2006/main" prst="rect">
+            <a:avLst/>
+          </a:prstGeom>
+          <a:noFill xmlns:a="http://schemas.openxmlformats.org/drawingml/2006/main"/>
+          <a:ln xmlns:a="http://schemas.openxmlformats.org/drawingml/2006/main" w="0">
+            <a:noFill/>
+            <a:prstDash val="solid"/>
+          </a:ln>
+        </p:spPr>
+        <p:txBody>
+          <a:bodyPr xmlns:a="http://schemas.openxmlformats.org/drawingml/2006/main" wrap="square" anchor="t"/>
+          <a:lstStyle xmlns:a="http://schemas.openxmlformats.org/drawingml/2006/main">
+            <a:defPPr algn="l">
+              <a:defRPr sz="1125" b="1">
+                <a:solidFill>
+                  <a:srgbClr val="32D6A6"/>
+                </a:solidFill>
+                <a:latin typeface="Aptos Display"/>
+                <a:ea typeface="Aptos Display"/>
+                <a:cs typeface="Aptos Display"/>
+              </a:defRPr>
+            </a:defPPr>
+            <a:lvl1pPr algn="l">
+              <a:defRPr sz="1125" b="1">
+                <a:solidFill>
+                  <a:srgbClr val="32D6A6"/>
+                </a:solidFill>
+                <a:latin typeface="Aptos Display"/>
+                <a:ea typeface="Aptos Display"/>
+                <a:cs typeface="Aptos Display"/>
+              </a:defRPr>
+            </a:lvl1pPr>
+            <a:lvl2pPr algn="l">
+              <a:defRPr sz="1125" b="1">
+                <a:solidFill>
+                  <a:srgbClr val="32D6A6"/>
+                </a:solidFill>
+                <a:latin typeface="Aptos Display"/>
+                <a:ea typeface="Aptos Display"/>
+                <a:cs typeface="Aptos Display"/>
+              </a:defRPr>
+            </a:lvl2pPr>
+            <a:lvl3pPr algn="l">
+              <a:defRPr sz="1125" b="1">
+                <a:solidFill>
+                  <a:srgbClr val="32D6A6"/>
+                </a:solidFill>
+                <a:latin typeface="Aptos Display"/>
+                <a:ea typeface="Aptos Display"/>
+                <a:cs typeface="Aptos Display"/>
+              </a:defRPr>
+            </a:lvl3pPr>
+            <a:lvl4pPr algn="l">
+              <a:defRPr sz="1125" b="1">
+                <a:solidFill>
+                  <a:srgbClr val="32D6A6"/>
+                </a:solidFill>
+                <a:latin typeface="Aptos Display"/>
+                <a:ea typeface="Aptos Display"/>
+                <a:cs typeface="Aptos Display"/>
+              </a:defRPr>
+            </a:lvl4pPr>
+            <a:lvl5pPr algn="l">
+              <a:defRPr sz="1125" b="1">
+                <a:solidFill>
+                  <a:srgbClr val="32D6A6"/>
+                </a:solidFill>
+                <a:latin typeface="Aptos Display"/>
+                <a:ea typeface="Aptos Display"/>
+                <a:cs typeface="Aptos Display"/>
+              </a:defRPr>
+            </a:lvl5pPr>
+            <a:lvl6pPr algn="l">
+              <a:defRPr sz="1125" b="1">
+                <a:solidFill>
+                  <a:srgbClr val="32D6A6"/>
+                </a:solidFill>
+                <a:latin typeface="Aptos Display"/>
+                <a:ea typeface="Aptos Display"/>
+                <a:cs typeface="Aptos Display"/>
+              </a:defRPr>
+            </a:lvl6pPr>
+            <a:lvl7pPr algn="l">
+              <a:defRPr sz="1125" b="1">
+                <a:solidFill>
+                  <a:srgbClr val="32D6A6"/>
+                </a:solidFill>
+                <a:latin typeface="Aptos Display"/>
+                <a:ea typeface="Aptos Display"/>
+                <a:cs typeface="Aptos Display"/>
+              </a:defRPr>
+            </a:lvl7pPr>
+            <a:lvl8pPr algn="l">
+              <a:defRPr sz="1125" b="1">
+                <a:solidFill>
+                  <a:srgbClr val="32D6A6"/>
+                </a:solidFill>
+                <a:latin typeface="Aptos Display"/>
+                <a:ea typeface="Aptos Display"/>
+                <a:cs typeface="Aptos Display"/>
+              </a:defRPr>
+            </a:lvl8pPr>
+            <a:lvl9pPr algn="l">
+              <a:defRPr sz="1125" b="1">
+                <a:solidFill>
+                  <a:srgbClr val="32D6A6"/>
+                </a:solidFill>
+                <a:latin typeface="Aptos Display"/>
+                <a:ea typeface="Aptos Display"/>
+                <a:cs typeface="Aptos Display"/>
+              </a:defRPr>
+            </a:lvl9pPr>
+          </a:lstStyle>
+          <a:p xmlns:a="http://schemas.openxmlformats.org/drawingml/2006/main">
+            <a:pPr algn="l">
+              <a:defRPr sz="1125" b="1">
+                <a:solidFill>
+                  <a:srgbClr val="32D6A6"/>
+                </a:solidFill>
+                <a:latin typeface="Aptos Display"/>
+                <a:ea typeface="Aptos Display"/>
+                <a:cs typeface="Aptos Display"/>
+              </a:defRPr>
+            </a:pPr>
+            <a:r>
+              <a:rPr sz="1125" b="1">
+                <a:solidFill>
+                  <a:srgbClr val="32D6A6"/>
+                </a:solidFill>
+                <a:latin typeface="Aptos Display"/>
+                <a:ea typeface="Aptos Display"/>
+                <a:cs typeface="Aptos Display"/>
+              </a:rPr>
+              <a:t>RECORDS</a:t>
+            </a:r>
+          </a:p>
+        </p:txBody>
+      </p:sp>
+      <p:sp>
+        <p:nvSpPr>
+          <p:cNvPr id="18" name="architecture-stage-4-body">
+            <a:extLst xmlns:a="http://schemas.openxmlformats.org/drawingml/2006/main">
+              <a:ext uri="{FF2B5EF4-FFF2-40B4-BE49-F238E27FC236}">
+                <a16:creationId xmlns:a16="http://schemas.microsoft.com/office/drawing/2014/main" id="{D80E1EEB-01DB-4EFE-93A2-16D2326B3B00}"/>
+              </a:ext>
+            </a:extLst>
+          </p:cNvPr>
+          <p:cNvSpPr>
+            <a:spLocks xmlns:a="http://schemas.openxmlformats.org/drawingml/2006/main" noGrp="1"/>
+          </p:cNvSpPr>
+          <p:nvPr/>
+        </p:nvSpPr>
+        <p:spPr>
+          <a:xfrm xmlns:a="http://schemas.openxmlformats.org/drawingml/2006/main">
+            <a:off x="8858250" y="3105150"/>
+            <a:ext cx="2238375" cy="742950"/>
+          </a:xfrm>
+          <a:prstGeom xmlns:a="http://schemas.openxmlformats.org/drawingml/2006/main" prst="rect">
+            <a:avLst/>
+          </a:prstGeom>
+          <a:noFill xmlns:a="http://schemas.openxmlformats.org/drawingml/2006/main"/>
+          <a:ln xmlns:a="http://schemas.openxmlformats.org/drawingml/2006/main" w="0">
+            <a:noFill/>
+            <a:prstDash val="solid"/>
+          </a:ln>
+        </p:spPr>
+        <p:txBody>
+          <a:bodyPr xmlns:a="http://schemas.openxmlformats.org/drawingml/2006/main" wrap="square" anchor="t"/>
+          <a:lstStyle xmlns:a="http://schemas.openxmlformats.org/drawingml/2006/main">
+            <a:defPPr algn="l">
+              <a:defRPr sz="1650" b="1">
+                <a:solidFill>
+                  <a:srgbClr val="F3F7F4"/>
+                </a:solidFill>
+                <a:latin typeface="Aptos Display"/>
+                <a:ea typeface="Aptos Display"/>
+                <a:cs typeface="Aptos Display"/>
+              </a:defRPr>
+            </a:defPPr>
+            <a:lvl1pPr algn="l">
+              <a:defRPr sz="1650" b="1">
+                <a:solidFill>
+                  <a:srgbClr val="F3F7F4"/>
+                </a:solidFill>
+                <a:latin typeface="Aptos Display"/>
+                <a:ea typeface="Aptos Display"/>
+                <a:cs typeface="Aptos Display"/>
+              </a:defRPr>
+            </a:lvl1pPr>
+            <a:lvl2pPr algn="l">
+              <a:defRPr sz="1650" b="1">
+                <a:solidFill>
+                  <a:srgbClr val="F3F7F4"/>
+                </a:solidFill>
+                <a:latin typeface="Aptos Display"/>
+                <a:ea typeface="Aptos Display"/>
+                <a:cs typeface="Aptos Display"/>
+              </a:defRPr>
+            </a:lvl2pPr>
+            <a:lvl3pPr algn="l">
+              <a:defRPr sz="1650" b="1">
+                <a:solidFill>
+                  <a:srgbClr val="F3F7F4"/>
+                </a:solidFill>
+                <a:latin typeface="Aptos Display"/>
+                <a:ea typeface="Aptos Display"/>
+                <a:cs typeface="Aptos Display"/>
+              </a:defRPr>
+            </a:lvl3pPr>
+            <a:lvl4pPr algn="l">
+              <a:defRPr sz="1650" b="1">
+                <a:solidFill>
+                  <a:srgbClr val="F3F7F4"/>
+                </a:solidFill>
+                <a:latin typeface="Aptos Display"/>
+                <a:ea typeface="Aptos Display"/>
+                <a:cs typeface="Aptos Display"/>
+              </a:defRPr>
+            </a:lvl4pPr>
+            <a:lvl5pPr algn="l">
+              <a:defRPr sz="1650" b="1">
+                <a:solidFill>
+                  <a:srgbClr val="F3F7F4"/>
+                </a:solidFill>
+                <a:latin typeface="Aptos Display"/>
+                <a:ea typeface="Aptos Display"/>
+                <a:cs typeface="Aptos Display"/>
+              </a:defRPr>
+            </a:lvl5pPr>
+            <a:lvl6pPr algn="l">
+              <a:defRPr sz="1650" b="1">
+                <a:solidFill>
+                  <a:srgbClr val="F3F7F4"/>
+                </a:solidFill>
+                <a:latin typeface="Aptos Display"/>
+                <a:ea typeface="Aptos Display"/>
+                <a:cs typeface="Aptos Display"/>
+              </a:defRPr>
+            </a:lvl6pPr>
+            <a:lvl7pPr algn="l">
+              <a:defRPr sz="1650" b="1">
+                <a:solidFill>
+                  <a:srgbClr val="F3F7F4"/>
+                </a:solidFill>
+                <a:latin typeface="Aptos Display"/>
+                <a:ea typeface="Aptos Display"/>
+                <a:cs typeface="Aptos Display"/>
+              </a:defRPr>
+            </a:lvl7pPr>
+            <a:lvl8pPr algn="l">
+              <a:defRPr sz="1650" b="1">
+                <a:solidFill>
+                  <a:srgbClr val="F3F7F4"/>
+                </a:solidFill>
+                <a:latin typeface="Aptos Display"/>
+                <a:ea typeface="Aptos Display"/>
+                <a:cs typeface="Aptos Display"/>
+              </a:defRPr>
+            </a:lvl8pPr>
+            <a:lvl9pPr algn="l">
+              <a:defRPr sz="1650" b="1">
+                <a:solidFill>
+                  <a:srgbClr val="F3F7F4"/>
+                </a:solidFill>
+                <a:latin typeface="Aptos Display"/>
+                <a:ea typeface="Aptos Display"/>
+                <a:cs typeface="Aptos Display"/>
+              </a:defRPr>
+            </a:lvl9pPr>
+          </a:lstStyle>
+          <a:p xmlns:a="http://schemas.openxmlformats.org/drawingml/2006/main">
+            <a:pPr algn="l">
+              <a:defRPr sz="1650" b="1">
+                <a:solidFill>
+                  <a:srgbClr val="F3F7F4"/>
+                </a:solidFill>
+                <a:latin typeface="Aptos Display"/>
+                <a:ea typeface="Aptos Display"/>
+                <a:cs typeface="Aptos Display"/>
+              </a:defRPr>
+            </a:pPr>
+            <a:r>
+              <a:rPr sz="1650" b="1">
+                <a:solidFill>
+                  <a:srgbClr val="F3F7F4"/>
+                </a:solidFill>
+                <a:latin typeface="Aptos Display"/>
+                <a:ea typeface="Aptos Display"/>
+                <a:cs typeface="Aptos Display"/>
+              </a:rPr>
+              <a:t>Supabase Postgres</a:t>
+            </a:r>
+          </a:p>
+          <a:p xmlns:a="http://schemas.openxmlformats.org/drawingml/2006/main">
+            <a:pPr algn="l">
+              <a:defRPr sz="1650" b="1">
+                <a:solidFill>
+                  <a:srgbClr val="F3F7F4"/>
+                </a:solidFill>
+                <a:latin typeface="Aptos Display"/>
+                <a:ea typeface="Aptos Display"/>
+                <a:cs typeface="Aptos Display"/>
+              </a:defRPr>
+            </a:pPr>
+            <a:r>
+              <a:rPr sz="1650" b="1">
+                <a:solidFill>
+                  <a:srgbClr val="F3F7F4"/>
+                </a:solidFill>
+                <a:latin typeface="Aptos Display"/>
+                <a:ea typeface="Aptos Display"/>
+                <a:cs typeface="Aptos Display"/>
+              </a:rPr>
+              <a:t>Row-level security by user</a:t>
+            </a:r>
+          </a:p>
+        </p:txBody>
+      </p:sp>
+      <p:sp>
+        <p:nvSpPr>
+          <p:cNvPr id="19" name="judge-access-divider">
+            <a:extLst xmlns:a="http://schemas.openxmlformats.org/drawingml/2006/main">
+              <a:ext uri="{FF2B5EF4-FFF2-40B4-BE49-F238E27FC236}">
+                <a16:creationId xmlns:a16="http://schemas.microsoft.com/office/drawing/2014/main" id="{8BF47746-F0A2-4A01-8851-CF4CC717B459}"/>
+              </a:ext>
+            </a:extLst>
+          </p:cNvPr>
+          <p:cNvSpPr>
+            <a:spLocks xmlns:a="http://schemas.openxmlformats.org/drawingml/2006/main" noGrp="1"/>
+          </p:cNvSpPr>
+          <p:nvPr/>
+        </p:nvSpPr>
+        <p:spPr>
+          <a:xfrm xmlns:a="http://schemas.openxmlformats.org/drawingml/2006/main">
+            <a:off x="685800" y="4343400"/>
+            <a:ext cx="10363200" cy="19050"/>
+          </a:xfrm>
+          <a:prstGeom xmlns:a="http://schemas.openxmlformats.org/drawingml/2006/main" prst="rect">
+            <a:avLst/>
+          </a:prstGeom>
+          <a:solidFill xmlns:a="http://schemas.openxmlformats.org/drawingml/2006/main">
+            <a:srgbClr val="33463D"/>
+          </a:solidFill>
+          <a:ln xmlns:a="http://schemas.openxmlformats.org/drawingml/2006/main" w="0">
+            <a:solidFill>
+              <a:srgbClr val="33463D"/>
+            </a:solidFill>
+            <a:prstDash val="solid"/>
+          </a:ln>
+        </p:spPr>
+      </p:sp>
+      <p:sp>
+        <p:nvSpPr>
+          <p:cNvPr id="20" name="judge-access-label">
+            <a:extLst xmlns:a="http://schemas.openxmlformats.org/drawingml/2006/main">
+              <a:ext uri="{FF2B5EF4-FFF2-40B4-BE49-F238E27FC236}">
+                <a16:creationId xmlns:a16="http://schemas.microsoft.com/office/drawing/2014/main" id="{E96A1945-F77C-417C-B472-CB538C622806}"/>
+              </a:ext>
+            </a:extLst>
+          </p:cNvPr>
+          <p:cNvSpPr>
+            <a:spLocks xmlns:a="http://schemas.openxmlformats.org/drawingml/2006/main" noGrp="1"/>
+          </p:cNvSpPr>
+          <p:nvPr/>
+        </p:nvSpPr>
+        <p:spPr>
+          <a:xfrm xmlns:a="http://schemas.openxmlformats.org/drawingml/2006/main">
+            <a:off x="685800" y="4648200"/>
+            <a:ext cx="2286000" cy="257175"/>
+          </a:xfrm>
+          <a:prstGeom xmlns:a="http://schemas.openxmlformats.org/drawingml/2006/main" prst="rect">
+            <a:avLst/>
+          </a:prstGeom>
+          <a:noFill xmlns:a="http://schemas.openxmlformats.org/drawingml/2006/main"/>
+          <a:ln xmlns:a="http://schemas.openxmlformats.org/drawingml/2006/main" w="0">
+            <a:noFill/>
+            <a:prstDash val="solid"/>
+          </a:ln>
+        </p:spPr>
+        <p:txBody>
+          <a:bodyPr xmlns:a="http://schemas.openxmlformats.org/drawingml/2006/main" wrap="square" anchor="t"/>
+          <a:lstStyle xmlns:a="http://schemas.openxmlformats.org/drawingml/2006/main">
+            <a:defPPr algn="l">
+              <a:defRPr sz="1125" b="1">
+                <a:solidFill>
+                  <a:srgbClr val="32D6A6"/>
+                </a:solidFill>
+                <a:latin typeface="Aptos Display"/>
+                <a:ea typeface="Aptos Display"/>
+                <a:cs typeface="Aptos Display"/>
+              </a:defRPr>
+            </a:defPPr>
+            <a:lvl1pPr algn="l">
+              <a:defRPr sz="1125" b="1">
+                <a:solidFill>
+                  <a:srgbClr val="32D6A6"/>
+                </a:solidFill>
+                <a:latin typeface="Aptos Display"/>
+                <a:ea typeface="Aptos Display"/>
+                <a:cs typeface="Aptos Display"/>
+              </a:defRPr>
+            </a:lvl1pPr>
+            <a:lvl2pPr algn="l">
+              <a:defRPr sz="1125" b="1">
+                <a:solidFill>
+                  <a:srgbClr val="32D6A6"/>
+                </a:solidFill>
+                <a:latin typeface="Aptos Display"/>
+                <a:ea typeface="Aptos Display"/>
+                <a:cs typeface="Aptos Display"/>
+              </a:defRPr>
+            </a:lvl2pPr>
+            <a:lvl3pPr algn="l">
+              <a:defRPr sz="1125" b="1">
+                <a:solidFill>
+                  <a:srgbClr val="32D6A6"/>
+                </a:solidFill>
+                <a:latin typeface="Aptos Display"/>
+                <a:ea typeface="Aptos Display"/>
+                <a:cs typeface="Aptos Display"/>
+              </a:defRPr>
+            </a:lvl3pPr>
+            <a:lvl4pPr algn="l">
+              <a:defRPr sz="1125" b="1">
+                <a:solidFill>
+                  <a:srgbClr val="32D6A6"/>
+                </a:solidFill>
+                <a:latin typeface="Aptos Display"/>
+                <a:ea typeface="Aptos Display"/>
+                <a:cs typeface="Aptos Display"/>
+              </a:defRPr>
+            </a:lvl4pPr>
+            <a:lvl5pPr algn="l">
+              <a:defRPr sz="1125" b="1">
+                <a:solidFill>
+                  <a:srgbClr val="32D6A6"/>
+                </a:solidFill>
+                <a:latin typeface="Aptos Display"/>
+                <a:ea typeface="Aptos Display"/>
+                <a:cs typeface="Aptos Display"/>
+              </a:defRPr>
+            </a:lvl5pPr>
+            <a:lvl6pPr algn="l">
+              <a:defRPr sz="1125" b="1">
+                <a:solidFill>
+                  <a:srgbClr val="32D6A6"/>
+                </a:solidFill>
+                <a:latin typeface="Aptos Display"/>
+                <a:ea typeface="Aptos Display"/>
+                <a:cs typeface="Aptos Display"/>
+              </a:defRPr>
+            </a:lvl6pPr>
+            <a:lvl7pPr algn="l">
+              <a:defRPr sz="1125" b="1">
+                <a:solidFill>
+                  <a:srgbClr val="32D6A6"/>
+                </a:solidFill>
+                <a:latin typeface="Aptos Display"/>
+                <a:ea typeface="Aptos Display"/>
+                <a:cs typeface="Aptos Display"/>
+              </a:defRPr>
+            </a:lvl7pPr>
+            <a:lvl8pPr algn="l">
+              <a:defRPr sz="1125" b="1">
+                <a:solidFill>
+                  <a:srgbClr val="32D6A6"/>
+                </a:solidFill>
+                <a:latin typeface="Aptos Display"/>
+                <a:ea typeface="Aptos Display"/>
+                <a:cs typeface="Aptos Display"/>
+              </a:defRPr>
+            </a:lvl8pPr>
+            <a:lvl9pPr algn="l">
+              <a:defRPr sz="1125" b="1">
+                <a:solidFill>
+                  <a:srgbClr val="32D6A6"/>
+                </a:solidFill>
+                <a:latin typeface="Aptos Display"/>
+                <a:ea typeface="Aptos Display"/>
+                <a:cs typeface="Aptos Display"/>
+              </a:defRPr>
+            </a:lvl9pPr>
+          </a:lstStyle>
+          <a:p xmlns:a="http://schemas.openxmlformats.org/drawingml/2006/main">
+            <a:pPr algn="l">
+              <a:defRPr sz="1125" b="1">
+                <a:solidFill>
+                  <a:srgbClr val="32D6A6"/>
+                </a:solidFill>
+                <a:latin typeface="Aptos Display"/>
+                <a:ea typeface="Aptos Display"/>
+                <a:cs typeface="Aptos Display"/>
+              </a:defRPr>
+            </a:pPr>
+            <a:r>
+              <a:rPr sz="1125" b="1">
+                <a:solidFill>
+                  <a:srgbClr val="32D6A6"/>
+                </a:solidFill>
+                <a:latin typeface="Aptos Display"/>
+                <a:ea typeface="Aptos Display"/>
+                <a:cs typeface="Aptos Display"/>
+              </a:rPr>
+              <a:t>JUDGE ACCESS</a:t>
+            </a:r>
+          </a:p>
+        </p:txBody>
+      </p:sp>
+      <p:sp>
+        <p:nvSpPr>
+          <p:cNvPr id="21" name="judge-access-copy">
+            <a:extLst xmlns:a="http://schemas.openxmlformats.org/drawingml/2006/main">
+              <a:ext uri="{FF2B5EF4-FFF2-40B4-BE49-F238E27FC236}">
+                <a16:creationId xmlns:a16="http://schemas.microsoft.com/office/drawing/2014/main" id="{FCF0245C-A842-4680-8A15-47D22C7AFF9B}"/>
+              </a:ext>
+            </a:extLst>
+          </p:cNvPr>
+          <p:cNvSpPr>
+            <a:spLocks xmlns:a="http://schemas.openxmlformats.org/drawingml/2006/main" noGrp="1"/>
+          </p:cNvSpPr>
+          <p:nvPr/>
+        </p:nvSpPr>
+        <p:spPr>
+          <a:xfrm xmlns:a="http://schemas.openxmlformats.org/drawingml/2006/main">
+            <a:off x="685800" y="5048250"/>
+            <a:ext cx="10001250" cy="742950"/>
+          </a:xfrm>
+          <a:prstGeom xmlns:a="http://schemas.openxmlformats.org/drawingml/2006/main" prst="rect">
+            <a:avLst/>
+          </a:prstGeom>
+          <a:noFill xmlns:a="http://schemas.openxmlformats.org/drawingml/2006/main"/>
+          <a:ln xmlns:a="http://schemas.openxmlformats.org/drawingml/2006/main" w="0">
+            <a:noFill/>
+            <a:prstDash val="solid"/>
+          </a:ln>
+        </p:spPr>
+        <p:txBody>
+          <a:bodyPr xmlns:a="http://schemas.openxmlformats.org/drawingml/2006/main" wrap="square" anchor="t"/>
+          <a:lstStyle xmlns:a="http://schemas.openxmlformats.org/drawingml/2006/main">
+            <a:defPPr algn="l">
+              <a:defRPr sz="1650" b="0">
+                <a:solidFill>
+                  <a:srgbClr val="F3F7F4"/>
                 </a:solidFill>
                 <a:latin typeface="Aptos"/>
                 <a:ea typeface="Aptos"/>
                 <a:cs typeface="Aptos"/>
-              </a:rPr>
-              <a:t>Synthetic demo</a:t>
-            </a:r>
-            <a:endParaRPr sz="1500"/>
-          </a:p>
-          <a:p xmlns:a="http://schemas.openxmlformats.org/drawingml/2006/main">
-            <a:pPr marL="0" indent="0">
-              <a:buNone/>
-            </a:pPr>
-            <a:r>
-              <a:rPr sz="1500">
-                <a:solidFill>
-                  <a:srgbClr val="8CA399"/>
+              </a:defRPr>
+            </a:defPPr>
+            <a:lvl1pPr algn="l">
+              <a:defRPr sz="1650" b="0">
+                <a:solidFill>
+                  <a:srgbClr val="F3F7F4"/>
                 </a:solidFill>
                 <a:latin typeface="Aptos"/>
                 <a:ea typeface="Aptos"/>
                 <a:cs typeface="Aptos"/>
-              </a:rPr>
-              <a:t>Core forecast flow</a:t>
-            </a:r>
-            <a:endParaRPr sz="1500"/>
-          </a:p>
-        </p:txBody>
-      </p:sp>
-      <p:sp>
-        <p:nvSpPr>
-          <p:cNvPr id="10" name="Shape 8">
-            <a:extLst xmlns:a="http://schemas.openxmlformats.org/drawingml/2006/main">
-              <a:ext uri="{FF2B5EF4-FFF2-40B4-BE49-F238E27FC236}">
-                <a16:creationId xmlns:a16="http://schemas.microsoft.com/office/drawing/2014/main" id="{8BE3D7C6-FD54-4F9A-8272-F6C57C8F9E8B}"/>
-              </a:ext>
-            </a:extLst>
-          </p:cNvPr>
-          <p:cNvSpPr>
-            <a:spLocks xmlns:a="http://schemas.openxmlformats.org/drawingml/2006/main" noGrp="1"/>
-          </p:cNvSpPr>
-          <p:nvPr/>
-        </p:nvSpPr>
-        <p:spPr>
-          <a:xfrm xmlns:a="http://schemas.openxmlformats.org/drawingml/2006/main">
-            <a:off x="4389120" y="2816352"/>
-            <a:ext cx="310896" cy="310896"/>
-          </a:xfrm>
-          <a:prstGeom xmlns:a="http://schemas.openxmlformats.org/drawingml/2006/main" prst="ellipse">
-            <a:avLst/>
-          </a:prstGeom>
-          <a:solidFill xmlns:a="http://schemas.openxmlformats.org/drawingml/2006/main">
-            <a:srgbClr val="0C1512"/>
-          </a:solidFill>
-          <a:ln xmlns:a="http://schemas.openxmlformats.org/drawingml/2006/main" w="12700">
-            <a:solidFill>
-              <a:srgbClr val="F6C14B"/>
-            </a:solidFill>
-            <a:prstDash val="solid"/>
-          </a:ln>
-        </p:spPr>
-      </p:sp>
-      <p:sp>
-        <p:nvSpPr>
-          <p:cNvPr id="11" name="Text 9">
-            <a:extLst xmlns:a="http://schemas.openxmlformats.org/drawingml/2006/main">
-              <a:ext uri="{FF2B5EF4-FFF2-40B4-BE49-F238E27FC236}">
-                <a16:creationId xmlns:a16="http://schemas.microsoft.com/office/drawing/2014/main" id="{A154B31F-73FD-4810-BFD6-5968BE58AE4A}"/>
-              </a:ext>
-            </a:extLst>
-          </p:cNvPr>
-          <p:cNvSpPr>
-            <a:spLocks xmlns:a="http://schemas.openxmlformats.org/drawingml/2006/main" noGrp="1"/>
-          </p:cNvSpPr>
-          <p:nvPr/>
-        </p:nvSpPr>
-        <p:spPr>
-          <a:xfrm xmlns:a="http://schemas.openxmlformats.org/drawingml/2006/main">
-            <a:off x="4389120" y="3429000"/>
-            <a:ext cx="2377440" cy="219456"/>
-          </a:xfrm>
-          <a:prstGeom xmlns:a="http://schemas.openxmlformats.org/drawingml/2006/main" prst="rect">
-            <a:avLst/>
-          </a:prstGeom>
-          <a:noFill xmlns:a="http://schemas.openxmlformats.org/drawingml/2006/main"/>
-        </p:spPr>
-        <p:txBody>
-          <a:bodyPr xmlns:a="http://schemas.openxmlformats.org/drawingml/2006/main" wrap="square" lIns="0" tIns="0" rIns="0" bIns="0" anchor="ctr">
-            <a:normAutofit/>
-          </a:bodyPr>
-          <a:lstStyle xmlns:a="http://schemas.openxmlformats.org/drawingml/2006/main"/>
-          <a:p xmlns:a="http://schemas.openxmlformats.org/drawingml/2006/main">
-            <a:pPr marL="0" indent="0">
-              <a:buNone/>
-            </a:pPr>
-            <a:r>
-              <a:rPr sz="1000" b="1" spc="100">
-                <a:solidFill>
-                  <a:srgbClr val="8CA399"/>
-                </a:solidFill>
-                <a:latin typeface="Aptos Display"/>
-                <a:ea typeface="Aptos Display"/>
-                <a:cs typeface="Aptos Display"/>
-              </a:rPr>
-              <a:t>NEXT</a:t>
-            </a:r>
-            <a:endParaRPr sz="1000"/>
-          </a:p>
-        </p:txBody>
-      </p:sp>
-      <p:sp>
-        <p:nvSpPr>
-          <p:cNvPr id="12" name="Text 10">
-            <a:extLst xmlns:a="http://schemas.openxmlformats.org/drawingml/2006/main">
-              <a:ext uri="{FF2B5EF4-FFF2-40B4-BE49-F238E27FC236}">
-                <a16:creationId xmlns:a16="http://schemas.microsoft.com/office/drawing/2014/main" id="{C50DE0D1-B63E-4FB5-8B1B-621B86E3F072}"/>
-              </a:ext>
-            </a:extLst>
-          </p:cNvPr>
-          <p:cNvSpPr>
-            <a:spLocks xmlns:a="http://schemas.openxmlformats.org/drawingml/2006/main" noGrp="1"/>
-          </p:cNvSpPr>
-          <p:nvPr/>
-        </p:nvSpPr>
-        <p:spPr>
-          <a:xfrm xmlns:a="http://schemas.openxmlformats.org/drawingml/2006/main">
-            <a:off x="4389120" y="3785616"/>
-            <a:ext cx="2743200" cy="402336"/>
-          </a:xfrm>
-          <a:prstGeom xmlns:a="http://schemas.openxmlformats.org/drawingml/2006/main" prst="rect">
-            <a:avLst/>
-          </a:prstGeom>
-          <a:noFill xmlns:a="http://schemas.openxmlformats.org/drawingml/2006/main"/>
-        </p:spPr>
-        <p:txBody>
-          <a:bodyPr xmlns:a="http://schemas.openxmlformats.org/drawingml/2006/main" wrap="square" lIns="0" tIns="0" rIns="0" bIns="0" anchor="ctr">
-            <a:normAutofit/>
-          </a:bodyPr>
-          <a:lstStyle xmlns:a="http://schemas.openxmlformats.org/drawingml/2006/main"/>
-          <a:p xmlns:a="http://schemas.openxmlformats.org/drawingml/2006/main">
-            <a:pPr marL="0" indent="0">
-              <a:buNone/>
-            </a:pPr>
-            <a:r>
-              <a:rPr sz="2000" b="1">
-                <a:solidFill>
-                  <a:srgbClr val="F3F7F4"/>
-                </a:solidFill>
-                <a:latin typeface="Aptos Display"/>
-                <a:ea typeface="Aptos Display"/>
-                <a:cs typeface="Aptos Display"/>
-              </a:rPr>
-              <a:t>Small pilot</a:t>
-            </a:r>
-            <a:endParaRPr sz="2000"/>
-          </a:p>
-        </p:txBody>
-      </p:sp>
-      <p:sp>
-        <p:nvSpPr>
-          <p:cNvPr id="13" name="Text 11">
-            <a:extLst xmlns:a="http://schemas.openxmlformats.org/drawingml/2006/main">
-              <a:ext uri="{FF2B5EF4-FFF2-40B4-BE49-F238E27FC236}">
-                <a16:creationId xmlns:a16="http://schemas.microsoft.com/office/drawing/2014/main" id="{EEFB1A5B-ABF4-4235-A9B5-2550EB3CC37C}"/>
-              </a:ext>
-            </a:extLst>
-          </p:cNvPr>
-          <p:cNvSpPr>
-            <a:spLocks xmlns:a="http://schemas.openxmlformats.org/drawingml/2006/main" noGrp="1"/>
-          </p:cNvSpPr>
-          <p:nvPr/>
-        </p:nvSpPr>
-        <p:spPr>
-          <a:xfrm xmlns:a="http://schemas.openxmlformats.org/drawingml/2006/main">
-            <a:off x="4389120" y="4407408"/>
-            <a:ext cx="2834640" cy="658368"/>
-          </a:xfrm>
-          <a:prstGeom xmlns:a="http://schemas.openxmlformats.org/drawingml/2006/main" prst="rect">
-            <a:avLst/>
-          </a:prstGeom>
-          <a:noFill xmlns:a="http://schemas.openxmlformats.org/drawingml/2006/main"/>
-        </p:spPr>
-        <p:txBody>
-          <a:bodyPr xmlns:a="http://schemas.openxmlformats.org/drawingml/2006/main" wrap="square" lIns="0" tIns="0" rIns="0" bIns="0" anchor="t">
-            <a:normAutofit/>
-          </a:bodyPr>
-          <a:lstStyle xmlns:a="http://schemas.openxmlformats.org/drawingml/2006/main"/>
-          <a:p xmlns:a="http://schemas.openxmlformats.org/drawingml/2006/main">
-            <a:pPr marL="0" indent="0">
-              <a:buNone/>
-            </a:pPr>
-            <a:r>
-              <a:rPr sz="1500">
-                <a:solidFill>
-                  <a:srgbClr val="8CA399"/>
+              </a:defRPr>
+            </a:lvl1pPr>
+            <a:lvl2pPr algn="l">
+              <a:defRPr sz="1650" b="0">
+                <a:solidFill>
+                  <a:srgbClr val="F3F7F4"/>
                 </a:solidFill>
                 <a:latin typeface="Aptos"/>
                 <a:ea typeface="Aptos"/>
                 <a:cs typeface="Aptos"/>
-              </a:rPr>
-              <a:t>10–20 consenting users</a:t>
-            </a:r>
-            <a:endParaRPr sz="1500"/>
-          </a:p>
-          <a:p xmlns:a="http://schemas.openxmlformats.org/drawingml/2006/main">
-            <a:pPr marL="0" indent="0">
-              <a:buNone/>
-            </a:pPr>
-            <a:r>
-              <a:rPr sz="1500">
-                <a:solidFill>
-                  <a:srgbClr val="8CA399"/>
+              </a:defRPr>
+            </a:lvl2pPr>
+            <a:lvl3pPr algn="l">
+              <a:defRPr sz="1650" b="0">
+                <a:solidFill>
+                  <a:srgbClr val="F3F7F4"/>
                 </a:solidFill>
                 <a:latin typeface="Aptos"/>
                 <a:ea typeface="Aptos"/>
                 <a:cs typeface="Aptos"/>
-              </a:rPr>
-              <a:t>4 weeks, one partner</a:t>
-            </a:r>
-            <a:endParaRPr sz="1500"/>
-          </a:p>
-        </p:txBody>
-      </p:sp>
-      <p:sp>
-        <p:nvSpPr>
-          <p:cNvPr id="14" name="Shape 12">
-            <a:extLst xmlns:a="http://schemas.openxmlformats.org/drawingml/2006/main">
-              <a:ext uri="{FF2B5EF4-FFF2-40B4-BE49-F238E27FC236}">
-                <a16:creationId xmlns:a16="http://schemas.microsoft.com/office/drawing/2014/main" id="{8001F04B-7EC0-48D5-92FB-8567E054D158}"/>
-              </a:ext>
-            </a:extLst>
-          </p:cNvPr>
-          <p:cNvSpPr>
-            <a:spLocks xmlns:a="http://schemas.openxmlformats.org/drawingml/2006/main" noGrp="1"/>
-          </p:cNvSpPr>
-          <p:nvPr/>
-        </p:nvSpPr>
-        <p:spPr>
-          <a:xfrm xmlns:a="http://schemas.openxmlformats.org/drawingml/2006/main">
-            <a:off x="7818120" y="2816352"/>
-            <a:ext cx="310896" cy="310896"/>
-          </a:xfrm>
-          <a:prstGeom xmlns:a="http://schemas.openxmlformats.org/drawingml/2006/main" prst="ellipse">
-            <a:avLst/>
-          </a:prstGeom>
-          <a:solidFill xmlns:a="http://schemas.openxmlformats.org/drawingml/2006/main">
-            <a:srgbClr val="0C1512"/>
-          </a:solidFill>
-          <a:ln xmlns:a="http://schemas.openxmlformats.org/drawingml/2006/main" w="12700">
-            <a:solidFill>
-              <a:srgbClr val="32D6A6"/>
-            </a:solidFill>
-            <a:prstDash val="solid"/>
-          </a:ln>
-        </p:spPr>
-      </p:sp>
-      <p:sp>
-        <p:nvSpPr>
-          <p:cNvPr id="15" name="Text 13">
-            <a:extLst xmlns:a="http://schemas.openxmlformats.org/drawingml/2006/main">
-              <a:ext uri="{FF2B5EF4-FFF2-40B4-BE49-F238E27FC236}">
-                <a16:creationId xmlns:a16="http://schemas.microsoft.com/office/drawing/2014/main" id="{E8B916D4-3BE1-4E97-ACA7-D97BC0BF756E}"/>
-              </a:ext>
-            </a:extLst>
-          </p:cNvPr>
-          <p:cNvSpPr>
-            <a:spLocks xmlns:a="http://schemas.openxmlformats.org/drawingml/2006/main" noGrp="1"/>
-          </p:cNvSpPr>
-          <p:nvPr/>
-        </p:nvSpPr>
-        <p:spPr>
-          <a:xfrm xmlns:a="http://schemas.openxmlformats.org/drawingml/2006/main">
-            <a:off x="7818120" y="3429000"/>
-            <a:ext cx="2377440" cy="219456"/>
-          </a:xfrm>
-          <a:prstGeom xmlns:a="http://schemas.openxmlformats.org/drawingml/2006/main" prst="rect">
-            <a:avLst/>
-          </a:prstGeom>
-          <a:noFill xmlns:a="http://schemas.openxmlformats.org/drawingml/2006/main"/>
-        </p:spPr>
-        <p:txBody>
-          <a:bodyPr xmlns:a="http://schemas.openxmlformats.org/drawingml/2006/main" wrap="square" lIns="0" tIns="0" rIns="0" bIns="0" anchor="ctr">
-            <a:normAutofit/>
-          </a:bodyPr>
-          <a:lstStyle xmlns:a="http://schemas.openxmlformats.org/drawingml/2006/main"/>
-          <a:p xmlns:a="http://schemas.openxmlformats.org/drawingml/2006/main">
-            <a:pPr marL="0" indent="0">
-              <a:buNone/>
-            </a:pPr>
-            <a:r>
-              <a:rPr sz="1000" b="1" spc="100">
-                <a:solidFill>
-                  <a:srgbClr val="8CA399"/>
-                </a:solidFill>
-                <a:latin typeface="Aptos Display"/>
-                <a:ea typeface="Aptos Display"/>
-                <a:cs typeface="Aptos Display"/>
-              </a:rPr>
-              <a:t>IF IT WORKS</a:t>
-            </a:r>
-            <a:endParaRPr sz="1000"/>
-          </a:p>
-        </p:txBody>
-      </p:sp>
-      <p:sp>
-        <p:nvSpPr>
-          <p:cNvPr id="16" name="Text 14">
-            <a:extLst xmlns:a="http://schemas.openxmlformats.org/drawingml/2006/main">
-              <a:ext uri="{FF2B5EF4-FFF2-40B4-BE49-F238E27FC236}">
-                <a16:creationId xmlns:a16="http://schemas.microsoft.com/office/drawing/2014/main" id="{7B951402-1F7B-4F54-96C9-58695DA0C5A3}"/>
-              </a:ext>
-            </a:extLst>
-          </p:cNvPr>
-          <p:cNvSpPr>
-            <a:spLocks xmlns:a="http://schemas.openxmlformats.org/drawingml/2006/main" noGrp="1"/>
-          </p:cNvSpPr>
-          <p:nvPr/>
-        </p:nvSpPr>
-        <p:spPr>
-          <a:xfrm xmlns:a="http://schemas.openxmlformats.org/drawingml/2006/main">
-            <a:off x="7818120" y="3785616"/>
-            <a:ext cx="2743200" cy="402336"/>
-          </a:xfrm>
-          <a:prstGeom xmlns:a="http://schemas.openxmlformats.org/drawingml/2006/main" prst="rect">
-            <a:avLst/>
-          </a:prstGeom>
-          <a:noFill xmlns:a="http://schemas.openxmlformats.org/drawingml/2006/main"/>
-        </p:spPr>
-        <p:txBody>
-          <a:bodyPr xmlns:a="http://schemas.openxmlformats.org/drawingml/2006/main" wrap="square" lIns="0" tIns="0" rIns="0" bIns="0" anchor="ctr">
-            <a:normAutofit/>
-          </a:bodyPr>
-          <a:lstStyle xmlns:a="http://schemas.openxmlformats.org/drawingml/2006/main"/>
-          <a:p xmlns:a="http://schemas.openxmlformats.org/drawingml/2006/main">
-            <a:pPr marL="0" indent="0">
-              <a:buNone/>
-            </a:pPr>
-            <a:r>
-              <a:rPr sz="2000" b="1">
-                <a:solidFill>
-                  <a:srgbClr val="F3F7F4"/>
-                </a:solidFill>
-                <a:latin typeface="Aptos Display"/>
-                <a:ea typeface="Aptos Display"/>
-                <a:cs typeface="Aptos Display"/>
-              </a:rPr>
-              <a:t>Partnerships</a:t>
-            </a:r>
-            <a:endParaRPr sz="2000"/>
-          </a:p>
-        </p:txBody>
-      </p:sp>
-      <p:sp>
-        <p:nvSpPr>
-          <p:cNvPr id="17" name="Text 15">
-            <a:extLst xmlns:a="http://schemas.openxmlformats.org/drawingml/2006/main">
-              <a:ext uri="{FF2B5EF4-FFF2-40B4-BE49-F238E27FC236}">
-                <a16:creationId xmlns:a16="http://schemas.microsoft.com/office/drawing/2014/main" id="{2DCBE953-6A86-459F-9542-B51A4CD8E16F}"/>
-              </a:ext>
-            </a:extLst>
-          </p:cNvPr>
-          <p:cNvSpPr>
-            <a:spLocks xmlns:a="http://schemas.openxmlformats.org/drawingml/2006/main" noGrp="1"/>
-          </p:cNvSpPr>
-          <p:nvPr/>
-        </p:nvSpPr>
-        <p:spPr>
-          <a:xfrm xmlns:a="http://schemas.openxmlformats.org/drawingml/2006/main">
-            <a:off x="7818120" y="4407408"/>
-            <a:ext cx="2834640" cy="658368"/>
-          </a:xfrm>
-          <a:prstGeom xmlns:a="http://schemas.openxmlformats.org/drawingml/2006/main" prst="rect">
-            <a:avLst/>
-          </a:prstGeom>
-          <a:noFill xmlns:a="http://schemas.openxmlformats.org/drawingml/2006/main"/>
-        </p:spPr>
-        <p:txBody>
-          <a:bodyPr xmlns:a="http://schemas.openxmlformats.org/drawingml/2006/main" wrap="square" lIns="0" tIns="0" rIns="0" bIns="0" anchor="t">
-            <a:normAutofit/>
-          </a:bodyPr>
-          <a:lstStyle xmlns:a="http://schemas.openxmlformats.org/drawingml/2006/main"/>
-          <a:p xmlns:a="http://schemas.openxmlformats.org/drawingml/2006/main">
-            <a:pPr marL="0" indent="0">
-              <a:buNone/>
-            </a:pPr>
-            <a:r>
-              <a:rPr sz="1500">
-                <a:solidFill>
-                  <a:srgbClr val="8CA399"/>
+              </a:defRPr>
+            </a:lvl3pPr>
+            <a:lvl4pPr algn="l">
+              <a:defRPr sz="1650" b="0">
+                <a:solidFill>
+                  <a:srgbClr val="F3F7F4"/>
                 </a:solidFill>
                 <a:latin typeface="Aptos"/>
                 <a:ea typeface="Aptos"/>
                 <a:cs typeface="Aptos"/>
-              </a:rPr>
-              <a:t>Worker groups</a:t>
-            </a:r>
-            <a:endParaRPr sz="1500"/>
-          </a:p>
-          <a:p xmlns:a="http://schemas.openxmlformats.org/drawingml/2006/main">
-            <a:pPr marL="0" indent="0">
-              <a:buNone/>
-            </a:pPr>
-            <a:r>
-              <a:rPr sz="1500">
-                <a:solidFill>
-                  <a:srgbClr val="8CA399"/>
+              </a:defRPr>
+            </a:lvl4pPr>
+            <a:lvl5pPr algn="l">
+              <a:defRPr sz="1650" b="0">
+                <a:solidFill>
+                  <a:srgbClr val="F3F7F4"/>
                 </a:solidFill>
                 <a:latin typeface="Aptos"/>
                 <a:ea typeface="Aptos"/>
                 <a:cs typeface="Aptos"/>
-              </a:rPr>
-              <a:t>Platforms or educators</a:t>
-            </a:r>
-            <a:endParaRPr sz="1500"/>
-          </a:p>
-        </p:txBody>
-      </p:sp>
-      <p:sp>
-        <p:nvSpPr>
-          <p:cNvPr id="18" name="Text 16">
-            <a:extLst xmlns:a="http://schemas.openxmlformats.org/drawingml/2006/main">
-              <a:ext uri="{FF2B5EF4-FFF2-40B4-BE49-F238E27FC236}">
-                <a16:creationId xmlns:a16="http://schemas.microsoft.com/office/drawing/2014/main" id="{878467C2-D6FF-499F-A4C6-2192492230B1}"/>
-              </a:ext>
-            </a:extLst>
-          </p:cNvPr>
-          <p:cNvSpPr>
-            <a:spLocks xmlns:a="http://schemas.openxmlformats.org/drawingml/2006/main" noGrp="1"/>
-          </p:cNvSpPr>
-          <p:nvPr/>
-        </p:nvSpPr>
-        <p:spPr>
-          <a:xfrm xmlns:a="http://schemas.openxmlformats.org/drawingml/2006/main">
-            <a:off x="1005840" y="5669280"/>
-            <a:ext cx="10241280" cy="365760"/>
-          </a:xfrm>
-          <a:prstGeom xmlns:a="http://schemas.openxmlformats.org/drawingml/2006/main" prst="rect">
-            <a:avLst/>
-          </a:prstGeom>
-          <a:noFill xmlns:a="http://schemas.openxmlformats.org/drawingml/2006/main"/>
-        </p:spPr>
-        <p:txBody>
-          <a:bodyPr xmlns:a="http://schemas.openxmlformats.org/drawingml/2006/main" wrap="square" lIns="0" tIns="0" rIns="0" bIns="0" anchor="ctr">
-            <a:normAutofit/>
-          </a:bodyPr>
-          <a:lstStyle xmlns:a="http://schemas.openxmlformats.org/drawingml/2006/main"/>
-          <a:p xmlns:a="http://schemas.openxmlformats.org/drawingml/2006/main">
-            <a:pPr marL="0" indent="0">
-              <a:buNone/>
-            </a:pPr>
-            <a:r>
-              <a:rPr sz="1300">
+              </a:defRPr>
+            </a:lvl5pPr>
+            <a:lvl6pPr algn="l">
+              <a:defRPr sz="1650" b="0">
                 <a:solidFill>
                   <a:srgbClr val="F3F7F4"/>
                 </a:solidFill>
                 <a:latin typeface="Aptos"/>
                 <a:ea typeface="Aptos"/>
                 <a:cs typeface="Aptos"/>
-              </a:rPr>
-              <a:t>Business model hypothesis: free individual planning; later, opt-in partner support. No personal data sales.</a:t>
-            </a:r>
-            <a:endParaRPr sz="1300"/>
-          </a:p>
-        </p:txBody>
-      </p:sp>
-      <p:sp>
-        <p:nvSpPr>
-          <p:cNvPr id="25" name="Slide Number Placeholder 0">
-            <a:extLst xmlns:a="http://schemas.openxmlformats.org/drawingml/2006/main">
-              <a:ext uri="{FF2B5EF4-FFF2-40B4-BE49-F238E27FC236}">
-                <a16:creationId xmlns:a16="http://schemas.microsoft.com/office/drawing/2014/main" id="{CD8576D8-B20D-4DA5-BAC7-CC0B75519DF5}"/>
-              </a:ext>
-            </a:extLst>
-          </p:cNvPr>
-          <p:cNvSpPr>
-            <a:spLocks xmlns:a="http://schemas.openxmlformats.org/drawingml/2006/main" noGrp="1"/>
-          </p:cNvSpPr>
-          <p:nvPr>
-            <p:ph type="sldNum" idx="4294967295"/>
-          </p:nvPr>
-        </p:nvSpPr>
-        <p:spPr>
-          <a:xfrm xmlns:a="http://schemas.openxmlformats.org/drawingml/2006/main">
-            <a:off x="11292840" y="6473952"/>
-            <a:ext cx="800000" cy="300000"/>
-          </a:xfrm>
-          <a:prstGeom xmlns:a="http://schemas.openxmlformats.org/drawingml/2006/main" prst="rect">
-            <a:avLst/>
-          </a:prstGeom>
-        </p:spPr>
-        <p:txBody>
-          <a:bodyPr xmlns:a="http://schemas.openxmlformats.org/drawingml/2006/main"/>
-          <a:lstStyle xmlns:a="http://schemas.openxmlformats.org/drawingml/2006/main">
-            <a:lvl1pPr>
-              <a:buNone/>
-              <a:defRPr sz="900">
-                <a:solidFill>
-                  <a:srgbClr val="8CA399"/>
+              </a:defRPr>
+            </a:lvl6pPr>
+            <a:lvl7pPr algn="l">
+              <a:defRPr sz="1650" b="0">
+                <a:solidFill>
+                  <a:srgbClr val="F3F7F4"/>
                 </a:solidFill>
                 <a:latin typeface="Aptos"/>
                 <a:ea typeface="Aptos"/>
                 <a:cs typeface="Aptos"/>
               </a:defRPr>
+            </a:lvl7pPr>
+            <a:lvl8pPr algn="l">
+              <a:defRPr sz="1650" b="0">
+                <a:solidFill>
+                  <a:srgbClr val="F3F7F4"/>
+                </a:solidFill>
+                <a:latin typeface="Aptos"/>
+                <a:ea typeface="Aptos"/>
+                <a:cs typeface="Aptos"/>
+              </a:defRPr>
+            </a:lvl8pPr>
+            <a:lvl9pPr algn="l">
+              <a:defRPr sz="1650" b="0">
+                <a:solidFill>
+                  <a:srgbClr val="F3F7F4"/>
+                </a:solidFill>
+                <a:latin typeface="Aptos"/>
+                <a:ea typeface="Aptos"/>
+                <a:cs typeface="Aptos"/>
+              </a:defRPr>
+            </a:lvl9pPr>
+          </a:lstStyle>
+          <a:p xmlns:a="http://schemas.openxmlformats.org/drawingml/2006/main">
+            <a:pPr algn="l">
+              <a:defRPr sz="1650" b="0">
+                <a:solidFill>
+                  <a:srgbClr val="F3F7F4"/>
+                </a:solidFill>
+                <a:latin typeface="Aptos"/>
+                <a:ea typeface="Aptos"/>
+                <a:cs typeface="Aptos"/>
+              </a:defRPr>
+            </a:pPr>
+            <a:r>
+              <a:rPr sz="1650" b="0">
+                <a:solidFill>
+                  <a:srgbClr val="F3F7F4"/>
+                </a:solidFill>
+                <a:latin typeface="Aptos"/>
+                <a:ea typeface="Aptos"/>
+                <a:cs typeface="Aptos"/>
+              </a:rPr>
+              <a:t>Use the team’s seeded demo account, shared through Sonke’s private field.</a:t>
+            </a:r>
+          </a:p>
+          <a:p xmlns:a="http://schemas.openxmlformats.org/drawingml/2006/main">
+            <a:pPr algn="l">
+              <a:defRPr sz="1650" b="0">
+                <a:solidFill>
+                  <a:srgbClr val="F3F7F4"/>
+                </a:solidFill>
+                <a:latin typeface="Aptos"/>
+                <a:ea typeface="Aptos"/>
+                <a:cs typeface="Aptos"/>
+              </a:defRPr>
+            </a:pPr>
+            <a:r>
+              <a:rPr sz="1650" b="0">
+                <a:solidFill>
+                  <a:srgbClr val="F3F7F4"/>
+                </a:solidFill>
+                <a:latin typeface="Aptos"/>
+                <a:ea typeface="Aptos"/>
+                <a:cs typeface="Aptos"/>
+              </a:rPr>
+              <a:t>Confirm live sign-in and seeded records before the judging session.</a:t>
+            </a:r>
+          </a:p>
+        </p:txBody>
+      </p:sp>
+      <p:sp>
+        <p:nvSpPr>
+          <p:cNvPr id="22" name="judge-access-disclosure">
+            <a:extLst xmlns:a="http://schemas.openxmlformats.org/drawingml/2006/main">
+              <a:ext uri="{FF2B5EF4-FFF2-40B4-BE49-F238E27FC236}">
+                <a16:creationId xmlns:a16="http://schemas.microsoft.com/office/drawing/2014/main" id="{BA995F99-6289-4435-BFF1-6BD36ABED9FB}"/>
+              </a:ext>
+            </a:extLst>
+          </p:cNvPr>
+          <p:cNvSpPr>
+            <a:spLocks xmlns:a="http://schemas.openxmlformats.org/drawingml/2006/main" noGrp="1"/>
+          </p:cNvSpPr>
+          <p:nvPr/>
+        </p:nvSpPr>
+        <p:spPr>
+          <a:xfrm xmlns:a="http://schemas.openxmlformats.org/drawingml/2006/main">
+            <a:off x="685800" y="6096000"/>
+            <a:ext cx="9525000" cy="285750"/>
+          </a:xfrm>
+          <a:prstGeom xmlns:a="http://schemas.openxmlformats.org/drawingml/2006/main" prst="rect">
+            <a:avLst/>
+          </a:prstGeom>
+          <a:noFill xmlns:a="http://schemas.openxmlformats.org/drawingml/2006/main"/>
+          <a:ln xmlns:a="http://schemas.openxmlformats.org/drawingml/2006/main" w="0">
+            <a:noFill/>
+            <a:prstDash val="solid"/>
+          </a:ln>
+        </p:spPr>
+        <p:txBody>
+          <a:bodyPr xmlns:a="http://schemas.openxmlformats.org/drawingml/2006/main" wrap="square" anchor="t"/>
+          <a:lstStyle xmlns:a="http://schemas.openxmlformats.org/drawingml/2006/main">
+            <a:defPPr algn="l">
+              <a:defRPr sz="1125" b="0">
+                <a:solidFill>
+                  <a:srgbClr val="8CA399"/>
+                </a:solidFill>
+                <a:latin typeface="Aptos"/>
+                <a:ea typeface="Aptos"/>
+                <a:cs typeface="Aptos"/>
+              </a:defRPr>
+            </a:defPPr>
+            <a:lvl1pPr algn="l">
+              <a:defRPr sz="1125" b="0">
+                <a:solidFill>
+                  <a:srgbClr val="8CA399"/>
+                </a:solidFill>
+                <a:latin typeface="Aptos"/>
+                <a:ea typeface="Aptos"/>
+                <a:cs typeface="Aptos"/>
+              </a:defRPr>
             </a:lvl1pPr>
+            <a:lvl2pPr algn="l">
+              <a:defRPr sz="1125" b="0">
+                <a:solidFill>
+                  <a:srgbClr val="8CA399"/>
+                </a:solidFill>
+                <a:latin typeface="Aptos"/>
+                <a:ea typeface="Aptos"/>
+                <a:cs typeface="Aptos"/>
+              </a:defRPr>
+            </a:lvl2pPr>
+            <a:lvl3pPr algn="l">
+              <a:defRPr sz="1125" b="0">
+                <a:solidFill>
+                  <a:srgbClr val="8CA399"/>
+                </a:solidFill>
+                <a:latin typeface="Aptos"/>
+                <a:ea typeface="Aptos"/>
+                <a:cs typeface="Aptos"/>
+              </a:defRPr>
+            </a:lvl3pPr>
+            <a:lvl4pPr algn="l">
+              <a:defRPr sz="1125" b="0">
+                <a:solidFill>
+                  <a:srgbClr val="8CA399"/>
+                </a:solidFill>
+                <a:latin typeface="Aptos"/>
+                <a:ea typeface="Aptos"/>
+                <a:cs typeface="Aptos"/>
+              </a:defRPr>
+            </a:lvl4pPr>
+            <a:lvl5pPr algn="l">
+              <a:defRPr sz="1125" b="0">
+                <a:solidFill>
+                  <a:srgbClr val="8CA399"/>
+                </a:solidFill>
+                <a:latin typeface="Aptos"/>
+                <a:ea typeface="Aptos"/>
+                <a:cs typeface="Aptos"/>
+              </a:defRPr>
+            </a:lvl5pPr>
+            <a:lvl6pPr algn="l">
+              <a:defRPr sz="1125" b="0">
+                <a:solidFill>
+                  <a:srgbClr val="8CA399"/>
+                </a:solidFill>
+                <a:latin typeface="Aptos"/>
+                <a:ea typeface="Aptos"/>
+                <a:cs typeface="Aptos"/>
+              </a:defRPr>
+            </a:lvl6pPr>
+            <a:lvl7pPr algn="l">
+              <a:defRPr sz="1125" b="0">
+                <a:solidFill>
+                  <a:srgbClr val="8CA399"/>
+                </a:solidFill>
+                <a:latin typeface="Aptos"/>
+                <a:ea typeface="Aptos"/>
+                <a:cs typeface="Aptos"/>
+              </a:defRPr>
+            </a:lvl7pPr>
+            <a:lvl8pPr algn="l">
+              <a:defRPr sz="1125" b="0">
+                <a:solidFill>
+                  <a:srgbClr val="8CA399"/>
+                </a:solidFill>
+                <a:latin typeface="Aptos"/>
+                <a:ea typeface="Aptos"/>
+                <a:cs typeface="Aptos"/>
+              </a:defRPr>
+            </a:lvl8pPr>
+            <a:lvl9pPr algn="l">
+              <a:defRPr sz="1125" b="0">
+                <a:solidFill>
+                  <a:srgbClr val="8CA399"/>
+                </a:solidFill>
+                <a:latin typeface="Aptos"/>
+                <a:ea typeface="Aptos"/>
+                <a:cs typeface="Aptos"/>
+              </a:defRPr>
+            </a:lvl9pPr>
           </a:lstStyle>
           <a:p xmlns:a="http://schemas.openxmlformats.org/drawingml/2006/main">
             <a:pPr algn="l">
-              <a:buNone/>
-            </a:pPr>
-            <a:fld id="{F7021451-1387-4CA6-816F-3879F97B5CBC}" type="slidenum">
-              <a:rPr b="0"/>
+              <a:defRPr sz="1125" b="0">
+                <a:solidFill>
+                  <a:srgbClr val="8CA399"/>
+                </a:solidFill>
+                <a:latin typeface="Aptos"/>
+                <a:ea typeface="Aptos"/>
+                <a:cs typeface="Aptos"/>
+              </a:defRPr>
+            </a:pPr>
+            <a:r>
+              <a:rPr sz="1125" b="0">
+                <a:solidFill>
+                  <a:srgbClr val="8CA399"/>
+                </a:solidFill>
+                <a:latin typeface="Aptos"/>
+                <a:ea typeface="Aptos"/>
+                <a:cs typeface="Aptos"/>
+              </a:rPr>
+              <a:t>Never place demo credentials in this deck or a public repository.</a:t>
+            </a:r>
+          </a:p>
+        </p:txBody>
+      </p:sp>
+      <p:sp>
+        <p:nvSpPr>
+          <p:cNvPr id="23" name="architecture-slide-number">
+            <a:extLst xmlns:a="http://schemas.openxmlformats.org/drawingml/2006/main">
+              <a:ext uri="{FF2B5EF4-FFF2-40B4-BE49-F238E27FC236}">
+                <a16:creationId xmlns:a16="http://schemas.microsoft.com/office/drawing/2014/main" id="{70B91D2B-18F1-4BF8-8012-33BCF95CB000}"/>
+              </a:ext>
+            </a:extLst>
+          </p:cNvPr>
+          <p:cNvSpPr>
+            <a:spLocks xmlns:a="http://schemas.openxmlformats.org/drawingml/2006/main" noGrp="1"/>
+          </p:cNvSpPr>
+          <p:nvPr/>
+        </p:nvSpPr>
+        <p:spPr>
+          <a:xfrm xmlns:a="http://schemas.openxmlformats.org/drawingml/2006/main">
+            <a:off x="11296650" y="6477000"/>
+            <a:ext cx="428625" cy="228600"/>
+          </a:xfrm>
+          <a:prstGeom xmlns:a="http://schemas.openxmlformats.org/drawingml/2006/main" prst="rect">
+            <a:avLst/>
+          </a:prstGeom>
+          <a:noFill xmlns:a="http://schemas.openxmlformats.org/drawingml/2006/main"/>
+          <a:ln xmlns:a="http://schemas.openxmlformats.org/drawingml/2006/main" w="0">
+            <a:noFill/>
+            <a:prstDash val="solid"/>
+          </a:ln>
+        </p:spPr>
+        <p:txBody>
+          <a:bodyPr xmlns:a="http://schemas.openxmlformats.org/drawingml/2006/main" wrap="square" anchor="t"/>
+          <a:lstStyle xmlns:a="http://schemas.openxmlformats.org/drawingml/2006/main">
+            <a:defPPr algn="l">
+              <a:defRPr sz="900" b="0">
+                <a:solidFill>
+                  <a:srgbClr val="8CA399"/>
+                </a:solidFill>
+                <a:latin typeface="Aptos"/>
+                <a:ea typeface="Aptos"/>
+                <a:cs typeface="Aptos"/>
+              </a:defRPr>
+            </a:defPPr>
+            <a:lvl1pPr algn="l">
+              <a:defRPr sz="900" b="0">
+                <a:solidFill>
+                  <a:srgbClr val="8CA399"/>
+                </a:solidFill>
+                <a:latin typeface="Aptos"/>
+                <a:ea typeface="Aptos"/>
+                <a:cs typeface="Aptos"/>
+              </a:defRPr>
+            </a:lvl1pPr>
+            <a:lvl2pPr algn="l">
+              <a:defRPr sz="900" b="0">
+                <a:solidFill>
+                  <a:srgbClr val="8CA399"/>
+                </a:solidFill>
+                <a:latin typeface="Aptos"/>
+                <a:ea typeface="Aptos"/>
+                <a:cs typeface="Aptos"/>
+              </a:defRPr>
+            </a:lvl2pPr>
+            <a:lvl3pPr algn="l">
+              <a:defRPr sz="900" b="0">
+                <a:solidFill>
+                  <a:srgbClr val="8CA399"/>
+                </a:solidFill>
+                <a:latin typeface="Aptos"/>
+                <a:ea typeface="Aptos"/>
+                <a:cs typeface="Aptos"/>
+              </a:defRPr>
+            </a:lvl3pPr>
+            <a:lvl4pPr algn="l">
+              <a:defRPr sz="900" b="0">
+                <a:solidFill>
+                  <a:srgbClr val="8CA399"/>
+                </a:solidFill>
+                <a:latin typeface="Aptos"/>
+                <a:ea typeface="Aptos"/>
+                <a:cs typeface="Aptos"/>
+              </a:defRPr>
+            </a:lvl4pPr>
+            <a:lvl5pPr algn="l">
+              <a:defRPr sz="900" b="0">
+                <a:solidFill>
+                  <a:srgbClr val="8CA399"/>
+                </a:solidFill>
+                <a:latin typeface="Aptos"/>
+                <a:ea typeface="Aptos"/>
+                <a:cs typeface="Aptos"/>
+              </a:defRPr>
+            </a:lvl5pPr>
+            <a:lvl6pPr algn="l">
+              <a:defRPr sz="900" b="0">
+                <a:solidFill>
+                  <a:srgbClr val="8CA399"/>
+                </a:solidFill>
+                <a:latin typeface="Aptos"/>
+                <a:ea typeface="Aptos"/>
+                <a:cs typeface="Aptos"/>
+              </a:defRPr>
+            </a:lvl6pPr>
+            <a:lvl7pPr algn="l">
+              <a:defRPr sz="900" b="0">
+                <a:solidFill>
+                  <a:srgbClr val="8CA399"/>
+                </a:solidFill>
+                <a:latin typeface="Aptos"/>
+                <a:ea typeface="Aptos"/>
+                <a:cs typeface="Aptos"/>
+              </a:defRPr>
+            </a:lvl7pPr>
+            <a:lvl8pPr algn="l">
+              <a:defRPr sz="900" b="0">
+                <a:solidFill>
+                  <a:srgbClr val="8CA399"/>
+                </a:solidFill>
+                <a:latin typeface="Aptos"/>
+                <a:ea typeface="Aptos"/>
+                <a:cs typeface="Aptos"/>
+              </a:defRPr>
+            </a:lvl8pPr>
+            <a:lvl9pPr algn="l">
+              <a:defRPr sz="900" b="0">
+                <a:solidFill>
+                  <a:srgbClr val="8CA399"/>
+                </a:solidFill>
+                <a:latin typeface="Aptos"/>
+                <a:ea typeface="Aptos"/>
+                <a:cs typeface="Aptos"/>
+              </a:defRPr>
+            </a:lvl9pPr>
+          </a:lstStyle>
+          <a:p xmlns:a="http://schemas.openxmlformats.org/drawingml/2006/main">
+            <a:pPr algn="l">
+              <a:defRPr sz="900" b="0">
+                <a:solidFill>
+                  <a:srgbClr val="8CA399"/>
+                </a:solidFill>
+                <a:latin typeface="Aptos"/>
+                <a:ea typeface="Aptos"/>
+                <a:cs typeface="Aptos"/>
+              </a:defRPr>
+            </a:pPr>
+            <a:r>
+              <a:rPr sz="900" b="0">
+                <a:solidFill>
+                  <a:srgbClr val="8CA399"/>
+                </a:solidFill>
+                <a:latin typeface="Aptos"/>
+                <a:ea typeface="Aptos"/>
+                <a:cs typeface="Aptos"/>
+              </a:rPr>
               <a:t>7</a:t>
-            </a:fld>
-            <a:endParaRPr/>
+            </a:r>
           </a:p>
         </p:txBody>
       </p:sp>
     </p:spTree>
     <p:extLst>
       <p:ext uri="{BB962C8B-B14F-4D97-AF65-F5344CB8AC3E}">
-        <p14:creationId xmlns:p14="http://schemas.microsoft.com/office/powerpoint/2010/main" val="2012460123"/>
+        <p14:creationId xmlns:p14="http://schemas.microsoft.com/office/powerpoint/2010/main" val="1104972616"/>
       </p:ext>
     </p:extLst>
   </p:cSld>
@@ -6448,7 +8766,7 @@
           <p:cNvPr id="2" name="Text 0">
             <a:extLst xmlns:a="http://schemas.openxmlformats.org/drawingml/2006/main">
               <a:ext uri="{FF2B5EF4-FFF2-40B4-BE49-F238E27FC236}">
-                <a16:creationId xmlns:a16="http://schemas.microsoft.com/office/drawing/2014/main" id="{8248621A-7503-4A6F-8FB0-D55B6E41A0C7}"/>
+                <a16:creationId xmlns:a16="http://schemas.microsoft.com/office/drawing/2014/main" id="{76878712-9A9C-4C3B-9EA1-9D755AB8C593}"/>
               </a:ext>
             </a:extLst>
           </p:cNvPr>
@@ -6461,6 +8779,216 @@
           <a:xfrm xmlns:a="http://schemas.openxmlformats.org/drawingml/2006/main">
             <a:off x="658368" y="475488"/>
             <a:ext cx="9875520" cy="237744"/>
+          </a:xfrm>
+          <a:prstGeom xmlns:a="http://schemas.openxmlformats.org/drawingml/2006/main" prst="rect">
+            <a:avLst/>
+          </a:prstGeom>
+          <a:noFill xmlns:a="http://schemas.openxmlformats.org/drawingml/2006/main"/>
+        </p:spPr>
+        <p:txBody>
+          <a:bodyPr xmlns:a="http://schemas.openxmlformats.org/drawingml/2006/main" wrap="square" lIns="0" tIns="0" rIns="0" bIns="0" anchor="ctr">
+            <a:normAutofit fontScale="100000"/>
+          </a:bodyPr>
+          <a:lstStyle xmlns:a="http://schemas.openxmlformats.org/drawingml/2006/main"/>
+          <a:p xmlns:a="http://schemas.openxmlformats.org/drawingml/2006/main">
+            <a:pPr marL="0" indent="0">
+              <a:buNone/>
+            </a:pPr>
+            <a:r>
+              <a:rPr sz="1100" b="1" spc="130">
+                <a:solidFill>
+                  <a:srgbClr val="32D6A6"/>
+                </a:solidFill>
+                <a:latin typeface="Aptos Display"/>
+                <a:ea typeface="Aptos Display"/>
+                <a:cs typeface="Aptos Display"/>
+              </a:rPr>
+              <a:t>07 / PATH TO ADOPTION</a:t>
+            </a:r>
+            <a:endParaRPr sz="1100"/>
+          </a:p>
+        </p:txBody>
+      </p:sp>
+      <p:sp>
+        <p:nvSpPr>
+          <p:cNvPr id="3" name="Text 1">
+            <a:extLst xmlns:a="http://schemas.openxmlformats.org/drawingml/2006/main">
+              <a:ext uri="{FF2B5EF4-FFF2-40B4-BE49-F238E27FC236}">
+                <a16:creationId xmlns:a16="http://schemas.microsoft.com/office/drawing/2014/main" id="{51B12F3D-567B-4C70-AAD1-BBA1872288EB}"/>
+              </a:ext>
+            </a:extLst>
+          </p:cNvPr>
+          <p:cNvSpPr>
+            <a:spLocks xmlns:a="http://schemas.openxmlformats.org/drawingml/2006/main" noGrp="1"/>
+          </p:cNvSpPr>
+          <p:nvPr/>
+        </p:nvSpPr>
+        <p:spPr>
+          <a:xfrm xmlns:a="http://schemas.openxmlformats.org/drawingml/2006/main">
+            <a:off x="658368" y="896112"/>
+            <a:ext cx="10789920" cy="749808"/>
+          </a:xfrm>
+          <a:prstGeom xmlns:a="http://schemas.openxmlformats.org/drawingml/2006/main" prst="rect">
+            <a:avLst/>
+          </a:prstGeom>
+          <a:noFill xmlns:a="http://schemas.openxmlformats.org/drawingml/2006/main"/>
+        </p:spPr>
+        <p:txBody>
+          <a:bodyPr xmlns:a="http://schemas.openxmlformats.org/drawingml/2006/main" wrap="square" lIns="0" tIns="0" rIns="0" bIns="0" anchor="t">
+            <a:normAutofit/>
+          </a:bodyPr>
+          <a:lstStyle xmlns:a="http://schemas.openxmlformats.org/drawingml/2006/main"/>
+          <a:p xmlns:a="http://schemas.openxmlformats.org/drawingml/2006/main">
+            <a:pPr marL="0" indent="0">
+              <a:buNone/>
+            </a:pPr>
+            <a:r>
+              <a:rPr sz="3000" b="1">
+                <a:solidFill>
+                  <a:srgbClr val="F3F7F4"/>
+                </a:solidFill>
+                <a:latin typeface="Aptos Display"/>
+                <a:ea typeface="Aptos Display"/>
+                <a:cs typeface="Aptos Display"/>
+              </a:rPr>
+              <a:t>Start with a habit. Earn the right to scale.</a:t>
+            </a:r>
+            <a:endParaRPr sz="3000"/>
+          </a:p>
+        </p:txBody>
+      </p:sp>
+      <p:sp>
+        <p:nvSpPr>
+          <p:cNvPr id="4" name="Text 2">
+            <a:extLst xmlns:a="http://schemas.openxmlformats.org/drawingml/2006/main">
+              <a:ext uri="{FF2B5EF4-FFF2-40B4-BE49-F238E27FC236}">
+                <a16:creationId xmlns:a16="http://schemas.microsoft.com/office/drawing/2014/main" id="{A68DF88C-A3B8-435A-8754-682ECD94174F}"/>
+              </a:ext>
+            </a:extLst>
+          </p:cNvPr>
+          <p:cNvSpPr>
+            <a:spLocks xmlns:a="http://schemas.openxmlformats.org/drawingml/2006/main" noGrp="1"/>
+          </p:cNvSpPr>
+          <p:nvPr/>
+        </p:nvSpPr>
+        <p:spPr>
+          <a:xfrm xmlns:a="http://schemas.openxmlformats.org/drawingml/2006/main">
+            <a:off x="676656" y="1737360"/>
+            <a:ext cx="10424160" cy="475488"/>
+          </a:xfrm>
+          <a:prstGeom xmlns:a="http://schemas.openxmlformats.org/drawingml/2006/main" prst="rect">
+            <a:avLst/>
+          </a:prstGeom>
+          <a:noFill xmlns:a="http://schemas.openxmlformats.org/drawingml/2006/main"/>
+        </p:spPr>
+        <p:txBody>
+          <a:bodyPr xmlns:a="http://schemas.openxmlformats.org/drawingml/2006/main" wrap="square" lIns="0" tIns="0" rIns="0" bIns="0" anchor="t">
+            <a:normAutofit/>
+          </a:bodyPr>
+          <a:lstStyle xmlns:a="http://schemas.openxmlformats.org/drawingml/2006/main"/>
+          <a:p xmlns:a="http://schemas.openxmlformats.org/drawingml/2006/main">
+            <a:pPr marL="0" indent="0">
+              <a:buNone/>
+            </a:pPr>
+            <a:r>
+              <a:rPr sz="1500">
+                <a:solidFill>
+                  <a:srgbClr val="8CA399"/>
+                </a:solidFill>
+                <a:latin typeface="Aptos"/>
+                <a:ea typeface="Aptos"/>
+                <a:cs typeface="Aptos"/>
+              </a:rPr>
+              <a:t>Avoid adding features until the weekly cash-flow action helps people return and act.</a:t>
+            </a:r>
+            <a:endParaRPr sz="1500"/>
+          </a:p>
+        </p:txBody>
+      </p:sp>
+      <p:sp>
+        <p:nvSpPr>
+          <p:cNvPr id="5" name="Shape 3">
+            <a:extLst xmlns:a="http://schemas.openxmlformats.org/drawingml/2006/main">
+              <a:ext uri="{FF2B5EF4-FFF2-40B4-BE49-F238E27FC236}">
+                <a16:creationId xmlns:a16="http://schemas.microsoft.com/office/drawing/2014/main" id="{A1A72E0A-3A29-4BE5-9471-F4225427444A}"/>
+              </a:ext>
+            </a:extLst>
+          </p:cNvPr>
+          <p:cNvSpPr>
+            <a:spLocks xmlns:a="http://schemas.openxmlformats.org/drawingml/2006/main" noGrp="1"/>
+          </p:cNvSpPr>
+          <p:nvPr/>
+        </p:nvSpPr>
+        <p:spPr>
+          <a:xfrm xmlns:a="http://schemas.openxmlformats.org/drawingml/2006/main">
+            <a:off x="960120" y="2971800"/>
+            <a:ext cx="9738360" cy="0"/>
+          </a:xfrm>
+          <a:prstGeom xmlns:a="http://schemas.openxmlformats.org/drawingml/2006/main" prst="line">
+            <a:avLst/>
+          </a:prstGeom>
+          <a:noFill xmlns:a="http://schemas.openxmlformats.org/drawingml/2006/main"/>
+          <a:ln xmlns:a="http://schemas.openxmlformats.org/drawingml/2006/main" w="19050">
+            <a:solidFill>
+              <a:srgbClr val="2A3D35"/>
+            </a:solidFill>
+            <a:prstDash val="solid"/>
+            <a:headEnd type="none"/>
+            <a:tailEnd type="none"/>
+          </a:ln>
+        </p:spPr>
+      </p:sp>
+      <p:sp>
+        <p:nvSpPr>
+          <p:cNvPr id="6" name="Shape 4">
+            <a:extLst xmlns:a="http://schemas.openxmlformats.org/drawingml/2006/main">
+              <a:ext uri="{FF2B5EF4-FFF2-40B4-BE49-F238E27FC236}">
+                <a16:creationId xmlns:a16="http://schemas.microsoft.com/office/drawing/2014/main" id="{8F8BCE60-BD3B-4D83-B797-86028A517086}"/>
+              </a:ext>
+            </a:extLst>
+          </p:cNvPr>
+          <p:cNvSpPr>
+            <a:spLocks xmlns:a="http://schemas.openxmlformats.org/drawingml/2006/main" noGrp="1"/>
+          </p:cNvSpPr>
+          <p:nvPr/>
+        </p:nvSpPr>
+        <p:spPr>
+          <a:xfrm xmlns:a="http://schemas.openxmlformats.org/drawingml/2006/main">
+            <a:off x="1005840" y="2816352"/>
+            <a:ext cx="310896" cy="310896"/>
+          </a:xfrm>
+          <a:prstGeom xmlns:a="http://schemas.openxmlformats.org/drawingml/2006/main" prst="ellipse">
+            <a:avLst/>
+          </a:prstGeom>
+          <a:solidFill xmlns:a="http://schemas.openxmlformats.org/drawingml/2006/main">
+            <a:srgbClr val="0C1512"/>
+          </a:solidFill>
+          <a:ln xmlns:a="http://schemas.openxmlformats.org/drawingml/2006/main" w="12700">
+            <a:solidFill>
+              <a:srgbClr val="32D6A6"/>
+            </a:solidFill>
+            <a:prstDash val="solid"/>
+          </a:ln>
+        </p:spPr>
+      </p:sp>
+      <p:sp>
+        <p:nvSpPr>
+          <p:cNvPr id="7" name="Text 5">
+            <a:extLst xmlns:a="http://schemas.openxmlformats.org/drawingml/2006/main">
+              <a:ext uri="{FF2B5EF4-FFF2-40B4-BE49-F238E27FC236}">
+                <a16:creationId xmlns:a16="http://schemas.microsoft.com/office/drawing/2014/main" id="{5A152790-755A-46B7-B086-BA85B44B84BD}"/>
+              </a:ext>
+            </a:extLst>
+          </p:cNvPr>
+          <p:cNvSpPr>
+            <a:spLocks xmlns:a="http://schemas.openxmlformats.org/drawingml/2006/main" noGrp="1"/>
+          </p:cNvSpPr>
+          <p:nvPr/>
+        </p:nvSpPr>
+        <p:spPr>
+          <a:xfrm xmlns:a="http://schemas.openxmlformats.org/drawingml/2006/main">
+            <a:off x="1005840" y="3429000"/>
+            <a:ext cx="2377440" cy="219456"/>
           </a:xfrm>
           <a:prstGeom xmlns:a="http://schemas.openxmlformats.org/drawingml/2006/main" prst="rect">
             <a:avLst/>
@@ -6477,38 +9005,86 @@
               <a:buNone/>
             </a:pPr>
             <a:r>
-              <a:rPr sz="1100" b="1" spc="130">
-                <a:solidFill>
-                  <a:srgbClr val="32D6A6"/>
-                </a:solidFill>
-                <a:latin typeface="Aptos Display"/>
-                <a:ea typeface="Aptos Display"/>
-                <a:cs typeface="Aptos Display"/>
-              </a:rPr>
-              <a:t>07 / THE ASK</a:t>
-            </a:r>
-            <a:endParaRPr sz="1100"/>
-          </a:p>
-        </p:txBody>
-      </p:sp>
-      <p:sp>
-        <p:nvSpPr>
-          <p:cNvPr id="3" name="Text 1">
-            <a:extLst xmlns:a="http://schemas.openxmlformats.org/drawingml/2006/main">
-              <a:ext uri="{FF2B5EF4-FFF2-40B4-BE49-F238E27FC236}">
-                <a16:creationId xmlns:a16="http://schemas.microsoft.com/office/drawing/2014/main" id="{22556AD4-835B-4643-952C-0703FBB2EEC6}"/>
-              </a:ext>
-            </a:extLst>
-          </p:cNvPr>
-          <p:cNvSpPr>
-            <a:spLocks xmlns:a="http://schemas.openxmlformats.org/drawingml/2006/main" noGrp="1"/>
-          </p:cNvSpPr>
-          <p:nvPr/>
-        </p:nvSpPr>
-        <p:spPr>
-          <a:xfrm xmlns:a="http://schemas.openxmlformats.org/drawingml/2006/main">
-            <a:off x="658368" y="896112"/>
-            <a:ext cx="10789920" cy="749808"/>
+              <a:rPr sz="1000" b="1" spc="100">
+                <a:solidFill>
+                  <a:srgbClr val="8CA399"/>
+                </a:solidFill>
+                <a:latin typeface="Aptos Display"/>
+                <a:ea typeface="Aptos Display"/>
+                <a:cs typeface="Aptos Display"/>
+              </a:rPr>
+              <a:t>NOW</a:t>
+            </a:r>
+            <a:endParaRPr sz="1000"/>
+          </a:p>
+        </p:txBody>
+      </p:sp>
+      <p:sp>
+        <p:nvSpPr>
+          <p:cNvPr id="8" name="Text 6">
+            <a:extLst xmlns:a="http://schemas.openxmlformats.org/drawingml/2006/main">
+              <a:ext uri="{FF2B5EF4-FFF2-40B4-BE49-F238E27FC236}">
+                <a16:creationId xmlns:a16="http://schemas.microsoft.com/office/drawing/2014/main" id="{73B4DAAC-F69B-4EBD-833C-877EA49698BE}"/>
+              </a:ext>
+            </a:extLst>
+          </p:cNvPr>
+          <p:cNvSpPr>
+            <a:spLocks xmlns:a="http://schemas.openxmlformats.org/drawingml/2006/main" noGrp="1"/>
+          </p:cNvSpPr>
+          <p:nvPr/>
+        </p:nvSpPr>
+        <p:spPr>
+          <a:xfrm xmlns:a="http://schemas.openxmlformats.org/drawingml/2006/main">
+            <a:off x="1005840" y="3785616"/>
+            <a:ext cx="2743200" cy="402336"/>
+          </a:xfrm>
+          <a:prstGeom xmlns:a="http://schemas.openxmlformats.org/drawingml/2006/main" prst="rect">
+            <a:avLst/>
+          </a:prstGeom>
+          <a:noFill xmlns:a="http://schemas.openxmlformats.org/drawingml/2006/main"/>
+        </p:spPr>
+        <p:txBody>
+          <a:bodyPr xmlns:a="http://schemas.openxmlformats.org/drawingml/2006/main" wrap="square" lIns="0" tIns="0" rIns="0" bIns="0" anchor="ctr">
+            <a:normAutofit/>
+          </a:bodyPr>
+          <a:lstStyle xmlns:a="http://schemas.openxmlformats.org/drawingml/2006/main"/>
+          <a:p xmlns:a="http://schemas.openxmlformats.org/drawingml/2006/main">
+            <a:pPr marL="0" indent="0">
+              <a:buNone/>
+            </a:pPr>
+            <a:r>
+              <a:rPr sz="2000" b="1">
+                <a:solidFill>
+                  <a:srgbClr val="F3F7F4"/>
+                </a:solidFill>
+                <a:latin typeface="Aptos Display"/>
+                <a:ea typeface="Aptos Display"/>
+                <a:cs typeface="Aptos Display"/>
+              </a:rPr>
+              <a:t>Prototype</a:t>
+            </a:r>
+            <a:endParaRPr sz="2000"/>
+          </a:p>
+        </p:txBody>
+      </p:sp>
+      <p:sp>
+        <p:nvSpPr>
+          <p:cNvPr id="9" name="Text 7">
+            <a:extLst xmlns:a="http://schemas.openxmlformats.org/drawingml/2006/main">
+              <a:ext uri="{FF2B5EF4-FFF2-40B4-BE49-F238E27FC236}">
+                <a16:creationId xmlns:a16="http://schemas.microsoft.com/office/drawing/2014/main" id="{23987C6C-86B2-4A89-8D54-CD4CB0A49ACF}"/>
+              </a:ext>
+            </a:extLst>
+          </p:cNvPr>
+          <p:cNvSpPr>
+            <a:spLocks xmlns:a="http://schemas.openxmlformats.org/drawingml/2006/main" noGrp="1"/>
+          </p:cNvSpPr>
+          <p:nvPr/>
+        </p:nvSpPr>
+        <p:spPr>
+          <a:xfrm xmlns:a="http://schemas.openxmlformats.org/drawingml/2006/main">
+            <a:off x="1005840" y="4407408"/>
+            <a:ext cx="2834640" cy="658368"/>
           </a:xfrm>
           <a:prstGeom xmlns:a="http://schemas.openxmlformats.org/drawingml/2006/main" prst="rect">
             <a:avLst/>
@@ -6525,38 +9101,184 @@
               <a:buNone/>
             </a:pPr>
             <a:r>
-              <a:rPr sz="3000" b="1">
-                <a:solidFill>
-                  <a:srgbClr val="F3F7F4"/>
-                </a:solidFill>
-                <a:latin typeface="Aptos Display"/>
-                <a:ea typeface="Aptos Display"/>
-                <a:cs typeface="Aptos Display"/>
-              </a:rPr>
-              <a:t>Help us test whether the warning changes a week.</a:t>
-            </a:r>
-            <a:endParaRPr sz="3000"/>
-          </a:p>
-        </p:txBody>
-      </p:sp>
-      <p:sp>
-        <p:nvSpPr>
-          <p:cNvPr id="4" name="Text 2">
-            <a:extLst xmlns:a="http://schemas.openxmlformats.org/drawingml/2006/main">
-              <a:ext uri="{FF2B5EF4-FFF2-40B4-BE49-F238E27FC236}">
-                <a16:creationId xmlns:a16="http://schemas.microsoft.com/office/drawing/2014/main" id="{5C65158D-D6C6-4841-A592-B7ED08F58EA5}"/>
-              </a:ext>
-            </a:extLst>
-          </p:cNvPr>
-          <p:cNvSpPr>
-            <a:spLocks xmlns:a="http://schemas.openxmlformats.org/drawingml/2006/main" noGrp="1"/>
-          </p:cNvSpPr>
-          <p:nvPr/>
-        </p:nvSpPr>
-        <p:spPr>
-          <a:xfrm xmlns:a="http://schemas.openxmlformats.org/drawingml/2006/main">
-            <a:off x="676656" y="1737360"/>
-            <a:ext cx="10424160" cy="475488"/>
+              <a:rPr sz="1500">
+                <a:solidFill>
+                  <a:srgbClr val="8CA399"/>
+                </a:solidFill>
+                <a:latin typeface="Aptos"/>
+                <a:ea typeface="Aptos"/>
+                <a:cs typeface="Aptos"/>
+              </a:rPr>
+              <a:t>Synthetic demo</a:t>
+            </a:r>
+            <a:endParaRPr sz="1500"/>
+          </a:p>
+          <a:p xmlns:a="http://schemas.openxmlformats.org/drawingml/2006/main">
+            <a:pPr marL="0" indent="0">
+              <a:buNone/>
+            </a:pPr>
+            <a:r>
+              <a:rPr sz="1500">
+                <a:solidFill>
+                  <a:srgbClr val="8CA399"/>
+                </a:solidFill>
+                <a:latin typeface="Aptos"/>
+                <a:ea typeface="Aptos"/>
+                <a:cs typeface="Aptos"/>
+              </a:rPr>
+              <a:t>Core forecast flow</a:t>
+            </a:r>
+            <a:endParaRPr sz="1500"/>
+          </a:p>
+        </p:txBody>
+      </p:sp>
+      <p:sp>
+        <p:nvSpPr>
+          <p:cNvPr id="10" name="Shape 8">
+            <a:extLst xmlns:a="http://schemas.openxmlformats.org/drawingml/2006/main">
+              <a:ext uri="{FF2B5EF4-FFF2-40B4-BE49-F238E27FC236}">
+                <a16:creationId xmlns:a16="http://schemas.microsoft.com/office/drawing/2014/main" id="{8BE3D7C6-FD54-4F9A-8272-F6C57C8F9E8B}"/>
+              </a:ext>
+            </a:extLst>
+          </p:cNvPr>
+          <p:cNvSpPr>
+            <a:spLocks xmlns:a="http://schemas.openxmlformats.org/drawingml/2006/main" noGrp="1"/>
+          </p:cNvSpPr>
+          <p:nvPr/>
+        </p:nvSpPr>
+        <p:spPr>
+          <a:xfrm xmlns:a="http://schemas.openxmlformats.org/drawingml/2006/main">
+            <a:off x="4389120" y="2816352"/>
+            <a:ext cx="310896" cy="310896"/>
+          </a:xfrm>
+          <a:prstGeom xmlns:a="http://schemas.openxmlformats.org/drawingml/2006/main" prst="ellipse">
+            <a:avLst/>
+          </a:prstGeom>
+          <a:solidFill xmlns:a="http://schemas.openxmlformats.org/drawingml/2006/main">
+            <a:srgbClr val="0C1512"/>
+          </a:solidFill>
+          <a:ln xmlns:a="http://schemas.openxmlformats.org/drawingml/2006/main" w="12700">
+            <a:solidFill>
+              <a:srgbClr val="F6C14B"/>
+            </a:solidFill>
+            <a:prstDash val="solid"/>
+          </a:ln>
+        </p:spPr>
+      </p:sp>
+      <p:sp>
+        <p:nvSpPr>
+          <p:cNvPr id="11" name="Text 9">
+            <a:extLst xmlns:a="http://schemas.openxmlformats.org/drawingml/2006/main">
+              <a:ext uri="{FF2B5EF4-FFF2-40B4-BE49-F238E27FC236}">
+                <a16:creationId xmlns:a16="http://schemas.microsoft.com/office/drawing/2014/main" id="{A154B31F-73FD-4810-BFD6-5968BE58AE4A}"/>
+              </a:ext>
+            </a:extLst>
+          </p:cNvPr>
+          <p:cNvSpPr>
+            <a:spLocks xmlns:a="http://schemas.openxmlformats.org/drawingml/2006/main" noGrp="1"/>
+          </p:cNvSpPr>
+          <p:nvPr/>
+        </p:nvSpPr>
+        <p:spPr>
+          <a:xfrm xmlns:a="http://schemas.openxmlformats.org/drawingml/2006/main">
+            <a:off x="4389120" y="3429000"/>
+            <a:ext cx="2377440" cy="219456"/>
+          </a:xfrm>
+          <a:prstGeom xmlns:a="http://schemas.openxmlformats.org/drawingml/2006/main" prst="rect">
+            <a:avLst/>
+          </a:prstGeom>
+          <a:noFill xmlns:a="http://schemas.openxmlformats.org/drawingml/2006/main"/>
+        </p:spPr>
+        <p:txBody>
+          <a:bodyPr xmlns:a="http://schemas.openxmlformats.org/drawingml/2006/main" wrap="square" lIns="0" tIns="0" rIns="0" bIns="0" anchor="ctr">
+            <a:normAutofit/>
+          </a:bodyPr>
+          <a:lstStyle xmlns:a="http://schemas.openxmlformats.org/drawingml/2006/main"/>
+          <a:p xmlns:a="http://schemas.openxmlformats.org/drawingml/2006/main">
+            <a:pPr marL="0" indent="0">
+              <a:buNone/>
+            </a:pPr>
+            <a:r>
+              <a:rPr sz="1000" b="1" spc="100">
+                <a:solidFill>
+                  <a:srgbClr val="8CA399"/>
+                </a:solidFill>
+                <a:latin typeface="Aptos Display"/>
+                <a:ea typeface="Aptos Display"/>
+                <a:cs typeface="Aptos Display"/>
+              </a:rPr>
+              <a:t>NEXT</a:t>
+            </a:r>
+            <a:endParaRPr sz="1000"/>
+          </a:p>
+        </p:txBody>
+      </p:sp>
+      <p:sp>
+        <p:nvSpPr>
+          <p:cNvPr id="12" name="Text 10">
+            <a:extLst xmlns:a="http://schemas.openxmlformats.org/drawingml/2006/main">
+              <a:ext uri="{FF2B5EF4-FFF2-40B4-BE49-F238E27FC236}">
+                <a16:creationId xmlns:a16="http://schemas.microsoft.com/office/drawing/2014/main" id="{C50DE0D1-B63E-4FB5-8B1B-621B86E3F072}"/>
+              </a:ext>
+            </a:extLst>
+          </p:cNvPr>
+          <p:cNvSpPr>
+            <a:spLocks xmlns:a="http://schemas.openxmlformats.org/drawingml/2006/main" noGrp="1"/>
+          </p:cNvSpPr>
+          <p:nvPr/>
+        </p:nvSpPr>
+        <p:spPr>
+          <a:xfrm xmlns:a="http://schemas.openxmlformats.org/drawingml/2006/main">
+            <a:off x="4389120" y="3785616"/>
+            <a:ext cx="2743200" cy="402336"/>
+          </a:xfrm>
+          <a:prstGeom xmlns:a="http://schemas.openxmlformats.org/drawingml/2006/main" prst="rect">
+            <a:avLst/>
+          </a:prstGeom>
+          <a:noFill xmlns:a="http://schemas.openxmlformats.org/drawingml/2006/main"/>
+        </p:spPr>
+        <p:txBody>
+          <a:bodyPr xmlns:a="http://schemas.openxmlformats.org/drawingml/2006/main" wrap="square" lIns="0" tIns="0" rIns="0" bIns="0" anchor="ctr">
+            <a:normAutofit/>
+          </a:bodyPr>
+          <a:lstStyle xmlns:a="http://schemas.openxmlformats.org/drawingml/2006/main"/>
+          <a:p xmlns:a="http://schemas.openxmlformats.org/drawingml/2006/main">
+            <a:pPr marL="0" indent="0">
+              <a:buNone/>
+            </a:pPr>
+            <a:r>
+              <a:rPr sz="2000" b="1">
+                <a:solidFill>
+                  <a:srgbClr val="F3F7F4"/>
+                </a:solidFill>
+                <a:latin typeface="Aptos Display"/>
+                <a:ea typeface="Aptos Display"/>
+                <a:cs typeface="Aptos Display"/>
+              </a:rPr>
+              <a:t>Small pilot</a:t>
+            </a:r>
+            <a:endParaRPr sz="2000"/>
+          </a:p>
+        </p:txBody>
+      </p:sp>
+      <p:sp>
+        <p:nvSpPr>
+          <p:cNvPr id="13" name="Text 11">
+            <a:extLst xmlns:a="http://schemas.openxmlformats.org/drawingml/2006/main">
+              <a:ext uri="{FF2B5EF4-FFF2-40B4-BE49-F238E27FC236}">
+                <a16:creationId xmlns:a16="http://schemas.microsoft.com/office/drawing/2014/main" id="{EEFB1A5B-ABF4-4235-A9B5-2550EB3CC37C}"/>
+              </a:ext>
+            </a:extLst>
+          </p:cNvPr>
+          <p:cNvSpPr>
+            <a:spLocks xmlns:a="http://schemas.openxmlformats.org/drawingml/2006/main" noGrp="1"/>
+          </p:cNvSpPr>
+          <p:nvPr/>
+        </p:nvSpPr>
+        <p:spPr>
+          <a:xfrm xmlns:a="http://schemas.openxmlformats.org/drawingml/2006/main">
+            <a:off x="4389120" y="4407408"/>
+            <a:ext cx="2834640" cy="658368"/>
           </a:xfrm>
           <a:prstGeom xmlns:a="http://schemas.openxmlformats.org/drawingml/2006/main" prst="rect">
             <a:avLst/>
@@ -6581,30 +9303,80 @@
                 <a:ea typeface="Aptos"/>
                 <a:cs typeface="Aptos"/>
               </a:rPr>
-              <a:t>We need evidence of usefulness, not another feature list.</a:t>
+              <a:t>10–20 consenting users</a:t>
             </a:r>
             <a:endParaRPr sz="1500"/>
           </a:p>
-        </p:txBody>
-      </p:sp>
-      <p:sp>
-        <p:nvSpPr>
-          <p:cNvPr id="5" name="Text 3">
-            <a:extLst xmlns:a="http://schemas.openxmlformats.org/drawingml/2006/main">
-              <a:ext uri="{FF2B5EF4-FFF2-40B4-BE49-F238E27FC236}">
-                <a16:creationId xmlns:a16="http://schemas.microsoft.com/office/drawing/2014/main" id="{C97C4E52-930D-417B-989D-FEAF84CA47A8}"/>
-              </a:ext>
-            </a:extLst>
-          </p:cNvPr>
-          <p:cNvSpPr>
-            <a:spLocks xmlns:a="http://schemas.openxmlformats.org/drawingml/2006/main" noGrp="1"/>
-          </p:cNvSpPr>
-          <p:nvPr/>
-        </p:nvSpPr>
-        <p:spPr>
-          <a:xfrm xmlns:a="http://schemas.openxmlformats.org/drawingml/2006/main">
-            <a:off x="822960" y="2788920"/>
-            <a:ext cx="2926080" cy="685800"/>
+          <a:p xmlns:a="http://schemas.openxmlformats.org/drawingml/2006/main">
+            <a:pPr marL="0" indent="0">
+              <a:buNone/>
+            </a:pPr>
+            <a:r>
+              <a:rPr sz="1500">
+                <a:solidFill>
+                  <a:srgbClr val="8CA399"/>
+                </a:solidFill>
+                <a:latin typeface="Aptos"/>
+                <a:ea typeface="Aptos"/>
+                <a:cs typeface="Aptos"/>
+              </a:rPr>
+              <a:t>4 weeks, one partner</a:t>
+            </a:r>
+            <a:endParaRPr sz="1500"/>
+          </a:p>
+        </p:txBody>
+      </p:sp>
+      <p:sp>
+        <p:nvSpPr>
+          <p:cNvPr id="14" name="Shape 12">
+            <a:extLst xmlns:a="http://schemas.openxmlformats.org/drawingml/2006/main">
+              <a:ext uri="{FF2B5EF4-FFF2-40B4-BE49-F238E27FC236}">
+                <a16:creationId xmlns:a16="http://schemas.microsoft.com/office/drawing/2014/main" id="{8001F04B-7EC0-48D5-92FB-8567E054D158}"/>
+              </a:ext>
+            </a:extLst>
+          </p:cNvPr>
+          <p:cNvSpPr>
+            <a:spLocks xmlns:a="http://schemas.openxmlformats.org/drawingml/2006/main" noGrp="1"/>
+          </p:cNvSpPr>
+          <p:nvPr/>
+        </p:nvSpPr>
+        <p:spPr>
+          <a:xfrm xmlns:a="http://schemas.openxmlformats.org/drawingml/2006/main">
+            <a:off x="7818120" y="2816352"/>
+            <a:ext cx="310896" cy="310896"/>
+          </a:xfrm>
+          <a:prstGeom xmlns:a="http://schemas.openxmlformats.org/drawingml/2006/main" prst="ellipse">
+            <a:avLst/>
+          </a:prstGeom>
+          <a:solidFill xmlns:a="http://schemas.openxmlformats.org/drawingml/2006/main">
+            <a:srgbClr val="0C1512"/>
+          </a:solidFill>
+          <a:ln xmlns:a="http://schemas.openxmlformats.org/drawingml/2006/main" w="12700">
+            <a:solidFill>
+              <a:srgbClr val="32D6A6"/>
+            </a:solidFill>
+            <a:prstDash val="solid"/>
+          </a:ln>
+        </p:spPr>
+      </p:sp>
+      <p:sp>
+        <p:nvSpPr>
+          <p:cNvPr id="15" name="Text 13">
+            <a:extLst xmlns:a="http://schemas.openxmlformats.org/drawingml/2006/main">
+              <a:ext uri="{FF2B5EF4-FFF2-40B4-BE49-F238E27FC236}">
+                <a16:creationId xmlns:a16="http://schemas.microsoft.com/office/drawing/2014/main" id="{E8B916D4-3BE1-4E97-ACA7-D97BC0BF756E}"/>
+              </a:ext>
+            </a:extLst>
+          </p:cNvPr>
+          <p:cNvSpPr>
+            <a:spLocks xmlns:a="http://schemas.openxmlformats.org/drawingml/2006/main" noGrp="1"/>
+          </p:cNvSpPr>
+          <p:nvPr/>
+        </p:nvSpPr>
+        <p:spPr>
+          <a:xfrm xmlns:a="http://schemas.openxmlformats.org/drawingml/2006/main">
+            <a:off x="7818120" y="3429000"/>
+            <a:ext cx="2377440" cy="219456"/>
           </a:xfrm>
           <a:prstGeom xmlns:a="http://schemas.openxmlformats.org/drawingml/2006/main" prst="rect">
             <a:avLst/>
@@ -6621,38 +9393,38 @@
               <a:buNone/>
             </a:pPr>
             <a:r>
-              <a:rPr sz="3600" b="1">
-                <a:solidFill>
-                  <a:srgbClr val="F6C14B"/>
-                </a:solidFill>
-                <a:latin typeface="Aptos Display"/>
-                <a:ea typeface="Aptos Display"/>
-                <a:cs typeface="Aptos Display"/>
-              </a:rPr>
-              <a:t>10–20</a:t>
-            </a:r>
-            <a:endParaRPr sz="3600"/>
-          </a:p>
-        </p:txBody>
-      </p:sp>
-      <p:sp>
-        <p:nvSpPr>
-          <p:cNvPr id="6" name="Text 4">
-            <a:extLst xmlns:a="http://schemas.openxmlformats.org/drawingml/2006/main">
-              <a:ext uri="{FF2B5EF4-FFF2-40B4-BE49-F238E27FC236}">
-                <a16:creationId xmlns:a16="http://schemas.microsoft.com/office/drawing/2014/main" id="{EE16F40B-9AEF-4B13-AF61-09B6E470FAB0}"/>
-              </a:ext>
-            </a:extLst>
-          </p:cNvPr>
-          <p:cNvSpPr>
-            <a:spLocks xmlns:a="http://schemas.openxmlformats.org/drawingml/2006/main" noGrp="1"/>
-          </p:cNvSpPr>
-          <p:nvPr/>
-        </p:nvSpPr>
-        <p:spPr>
-          <a:xfrm xmlns:a="http://schemas.openxmlformats.org/drawingml/2006/main">
-            <a:off x="868680" y="3584448"/>
-            <a:ext cx="3657600" cy="329184"/>
+              <a:rPr sz="1000" b="1" spc="100">
+                <a:solidFill>
+                  <a:srgbClr val="8CA399"/>
+                </a:solidFill>
+                <a:latin typeface="Aptos Display"/>
+                <a:ea typeface="Aptos Display"/>
+                <a:cs typeface="Aptos Display"/>
+              </a:rPr>
+              <a:t>IF IT WORKS</a:t>
+            </a:r>
+            <a:endParaRPr sz="1000"/>
+          </a:p>
+        </p:txBody>
+      </p:sp>
+      <p:sp>
+        <p:nvSpPr>
+          <p:cNvPr id="16" name="Text 14">
+            <a:extLst xmlns:a="http://schemas.openxmlformats.org/drawingml/2006/main">
+              <a:ext uri="{FF2B5EF4-FFF2-40B4-BE49-F238E27FC236}">
+                <a16:creationId xmlns:a16="http://schemas.microsoft.com/office/drawing/2014/main" id="{7B951402-1F7B-4F54-96C9-58695DA0C5A3}"/>
+              </a:ext>
+            </a:extLst>
+          </p:cNvPr>
+          <p:cNvSpPr>
+            <a:spLocks xmlns:a="http://schemas.openxmlformats.org/drawingml/2006/main" noGrp="1"/>
+          </p:cNvSpPr>
+          <p:nvPr/>
+        </p:nvSpPr>
+        <p:spPr>
+          <a:xfrm xmlns:a="http://schemas.openxmlformats.org/drawingml/2006/main">
+            <a:off x="7818120" y="3785616"/>
+            <a:ext cx="2743200" cy="402336"/>
           </a:xfrm>
           <a:prstGeom xmlns:a="http://schemas.openxmlformats.org/drawingml/2006/main" prst="rect">
             <a:avLst/>
@@ -6669,38 +9441,103 @@
               <a:buNone/>
             </a:pPr>
             <a:r>
-              <a:rPr sz="1600">
-                <a:solidFill>
-                  <a:srgbClr val="F3F7F4"/>
+              <a:rPr sz="2000" b="1">
+                <a:solidFill>
+                  <a:srgbClr val="F3F7F4"/>
+                </a:solidFill>
+                <a:latin typeface="Aptos Display"/>
+                <a:ea typeface="Aptos Display"/>
+                <a:cs typeface="Aptos Display"/>
+              </a:rPr>
+              <a:t>Partnerships</a:t>
+            </a:r>
+            <a:endParaRPr sz="2000"/>
+          </a:p>
+        </p:txBody>
+      </p:sp>
+      <p:sp>
+        <p:nvSpPr>
+          <p:cNvPr id="17" name="Text 15">
+            <a:extLst xmlns:a="http://schemas.openxmlformats.org/drawingml/2006/main">
+              <a:ext uri="{FF2B5EF4-FFF2-40B4-BE49-F238E27FC236}">
+                <a16:creationId xmlns:a16="http://schemas.microsoft.com/office/drawing/2014/main" id="{2DCBE953-6A86-459F-9542-B51A4CD8E16F}"/>
+              </a:ext>
+            </a:extLst>
+          </p:cNvPr>
+          <p:cNvSpPr>
+            <a:spLocks xmlns:a="http://schemas.openxmlformats.org/drawingml/2006/main" noGrp="1"/>
+          </p:cNvSpPr>
+          <p:nvPr/>
+        </p:nvSpPr>
+        <p:spPr>
+          <a:xfrm xmlns:a="http://schemas.openxmlformats.org/drawingml/2006/main">
+            <a:off x="7818120" y="4407408"/>
+            <a:ext cx="2834640" cy="658368"/>
+          </a:xfrm>
+          <a:prstGeom xmlns:a="http://schemas.openxmlformats.org/drawingml/2006/main" prst="rect">
+            <a:avLst/>
+          </a:prstGeom>
+          <a:noFill xmlns:a="http://schemas.openxmlformats.org/drawingml/2006/main"/>
+        </p:spPr>
+        <p:txBody>
+          <a:bodyPr xmlns:a="http://schemas.openxmlformats.org/drawingml/2006/main" wrap="square" lIns="0" tIns="0" rIns="0" bIns="0" anchor="t">
+            <a:normAutofit/>
+          </a:bodyPr>
+          <a:lstStyle xmlns:a="http://schemas.openxmlformats.org/drawingml/2006/main"/>
+          <a:p xmlns:a="http://schemas.openxmlformats.org/drawingml/2006/main">
+            <a:pPr marL="0" indent="0">
+              <a:buNone/>
+            </a:pPr>
+            <a:r>
+              <a:rPr sz="1500">
+                <a:solidFill>
+                  <a:srgbClr val="8CA399"/>
                 </a:solidFill>
                 <a:latin typeface="Aptos"/>
                 <a:ea typeface="Aptos"/>
                 <a:cs typeface="Aptos"/>
               </a:rPr>
-              <a:t>consenting pilot participants</a:t>
-            </a:r>
-            <a:endParaRPr sz="1600"/>
-          </a:p>
-        </p:txBody>
-      </p:sp>
-      <p:sp>
-        <p:nvSpPr>
-          <p:cNvPr id="7" name="Text 5">
-            <a:extLst xmlns:a="http://schemas.openxmlformats.org/drawingml/2006/main">
-              <a:ext uri="{FF2B5EF4-FFF2-40B4-BE49-F238E27FC236}">
-                <a16:creationId xmlns:a16="http://schemas.microsoft.com/office/drawing/2014/main" id="{6949FD3E-1427-44A9-B460-82D196B9B8C1}"/>
-              </a:ext>
-            </a:extLst>
-          </p:cNvPr>
-          <p:cNvSpPr>
-            <a:spLocks xmlns:a="http://schemas.openxmlformats.org/drawingml/2006/main" noGrp="1"/>
-          </p:cNvSpPr>
-          <p:nvPr/>
-        </p:nvSpPr>
-        <p:spPr>
-          <a:xfrm xmlns:a="http://schemas.openxmlformats.org/drawingml/2006/main">
-            <a:off x="4709160" y="2788920"/>
-            <a:ext cx="3200400" cy="685800"/>
+              <a:t>Worker groups</a:t>
+            </a:r>
+            <a:endParaRPr sz="1500"/>
+          </a:p>
+          <a:p xmlns:a="http://schemas.openxmlformats.org/drawingml/2006/main">
+            <a:pPr marL="0" indent="0">
+              <a:buNone/>
+            </a:pPr>
+            <a:r>
+              <a:rPr sz="1500">
+                <a:solidFill>
+                  <a:srgbClr val="8CA399"/>
+                </a:solidFill>
+                <a:latin typeface="Aptos"/>
+                <a:ea typeface="Aptos"/>
+                <a:cs typeface="Aptos"/>
+              </a:rPr>
+              <a:t>Platforms or educators</a:t>
+            </a:r>
+            <a:endParaRPr sz="1500"/>
+          </a:p>
+        </p:txBody>
+      </p:sp>
+      <p:sp>
+        <p:nvSpPr>
+          <p:cNvPr id="18" name="Text 16">
+            <a:extLst xmlns:a="http://schemas.openxmlformats.org/drawingml/2006/main">
+              <a:ext uri="{FF2B5EF4-FFF2-40B4-BE49-F238E27FC236}">
+                <a16:creationId xmlns:a16="http://schemas.microsoft.com/office/drawing/2014/main" id="{878467C2-D6FF-499F-A4C6-2192492230B1}"/>
+              </a:ext>
+            </a:extLst>
+          </p:cNvPr>
+          <p:cNvSpPr>
+            <a:spLocks xmlns:a="http://schemas.openxmlformats.org/drawingml/2006/main" noGrp="1"/>
+          </p:cNvSpPr>
+          <p:nvPr/>
+        </p:nvSpPr>
+        <p:spPr>
+          <a:xfrm xmlns:a="http://schemas.openxmlformats.org/drawingml/2006/main">
+            <a:off x="1005840" y="5669280"/>
+            <a:ext cx="10241280" cy="365760"/>
           </a:xfrm>
           <a:prstGeom xmlns:a="http://schemas.openxmlformats.org/drawingml/2006/main" prst="rect">
             <a:avLst/>
@@ -6717,55 +9554,7 @@
               <a:buNone/>
             </a:pPr>
             <a:r>
-              <a:rPr sz="3600" b="1">
-                <a:solidFill>
-                  <a:srgbClr val="32D6A6"/>
-                </a:solidFill>
-                <a:latin typeface="Aptos Display"/>
-                <a:ea typeface="Aptos Display"/>
-                <a:cs typeface="Aptos Display"/>
-              </a:rPr>
-              <a:t>4 weeks</a:t>
-            </a:r>
-            <a:endParaRPr sz="3600"/>
-          </a:p>
-        </p:txBody>
-      </p:sp>
-      <p:sp>
-        <p:nvSpPr>
-          <p:cNvPr id="8" name="Text 6">
-            <a:extLst xmlns:a="http://schemas.openxmlformats.org/drawingml/2006/main">
-              <a:ext uri="{FF2B5EF4-FFF2-40B4-BE49-F238E27FC236}">
-                <a16:creationId xmlns:a16="http://schemas.microsoft.com/office/drawing/2014/main" id="{1312E58E-3898-47D8-81CE-CA2125750286}"/>
-              </a:ext>
-            </a:extLst>
-          </p:cNvPr>
-          <p:cNvSpPr>
-            <a:spLocks xmlns:a="http://schemas.openxmlformats.org/drawingml/2006/main" noGrp="1"/>
-          </p:cNvSpPr>
-          <p:nvPr/>
-        </p:nvSpPr>
-        <p:spPr>
-          <a:xfrm xmlns:a="http://schemas.openxmlformats.org/drawingml/2006/main">
-            <a:off x="4754880" y="3584448"/>
-            <a:ext cx="3657600" cy="329184"/>
-          </a:xfrm>
-          <a:prstGeom xmlns:a="http://schemas.openxmlformats.org/drawingml/2006/main" prst="rect">
-            <a:avLst/>
-          </a:prstGeom>
-          <a:noFill xmlns:a="http://schemas.openxmlformats.org/drawingml/2006/main"/>
-        </p:spPr>
-        <p:txBody>
-          <a:bodyPr xmlns:a="http://schemas.openxmlformats.org/drawingml/2006/main" wrap="square" lIns="0" tIns="0" rIns="0" bIns="0" anchor="ctr">
-            <a:normAutofit/>
-          </a:bodyPr>
-          <a:lstStyle xmlns:a="http://schemas.openxmlformats.org/drawingml/2006/main"/>
-          <a:p xmlns:a="http://schemas.openxmlformats.org/drawingml/2006/main">
-            <a:pPr marL="0" indent="0">
-              <a:buNone/>
-            </a:pPr>
-            <a:r>
-              <a:rPr sz="1600">
+              <a:rPr sz="1300">
                 <a:solidFill>
                   <a:srgbClr val="F3F7F4"/>
                 </a:solidFill>
@@ -6773,201 +9562,9 @@
                 <a:ea typeface="Aptos"/>
                 <a:cs typeface="Aptos"/>
               </a:rPr>
-              <a:t>to test the weekly habit</a:t>
-            </a:r>
-            <a:endParaRPr sz="1600"/>
-          </a:p>
-        </p:txBody>
-      </p:sp>
-      <p:sp>
-        <p:nvSpPr>
-          <p:cNvPr id="9" name="Text 7">
-            <a:extLst xmlns:a="http://schemas.openxmlformats.org/drawingml/2006/main">
-              <a:ext uri="{FF2B5EF4-FFF2-40B4-BE49-F238E27FC236}">
-                <a16:creationId xmlns:a16="http://schemas.microsoft.com/office/drawing/2014/main" id="{8DFABEE3-50D1-44A9-B478-6E1821918B88}"/>
-              </a:ext>
-            </a:extLst>
-          </p:cNvPr>
-          <p:cNvSpPr>
-            <a:spLocks xmlns:a="http://schemas.openxmlformats.org/drawingml/2006/main" noGrp="1"/>
-          </p:cNvSpPr>
-          <p:nvPr/>
-        </p:nvSpPr>
-        <p:spPr>
-          <a:xfrm xmlns:a="http://schemas.openxmlformats.org/drawingml/2006/main">
-            <a:off x="868680" y="4572000"/>
-            <a:ext cx="1463040" cy="256032"/>
-          </a:xfrm>
-          <a:prstGeom xmlns:a="http://schemas.openxmlformats.org/drawingml/2006/main" prst="rect">
-            <a:avLst/>
-          </a:prstGeom>
-          <a:noFill xmlns:a="http://schemas.openxmlformats.org/drawingml/2006/main"/>
-        </p:spPr>
-        <p:txBody>
-          <a:bodyPr xmlns:a="http://schemas.openxmlformats.org/drawingml/2006/main" wrap="square" lIns="0" tIns="0" rIns="0" bIns="0" anchor="ctr">
-            <a:normAutofit/>
-          </a:bodyPr>
-          <a:lstStyle xmlns:a="http://schemas.openxmlformats.org/drawingml/2006/main"/>
-          <a:p xmlns:a="http://schemas.openxmlformats.org/drawingml/2006/main">
-            <a:pPr marL="0" indent="0">
-              <a:buNone/>
-            </a:pPr>
-            <a:r>
-              <a:rPr sz="1100" b="1" spc="100">
-                <a:solidFill>
-                  <a:srgbClr val="8CA399"/>
-                </a:solidFill>
-                <a:latin typeface="Aptos Display"/>
-                <a:ea typeface="Aptos Display"/>
-                <a:cs typeface="Aptos Display"/>
-              </a:rPr>
-              <a:t>MEASURE</a:t>
-            </a:r>
-            <a:endParaRPr sz="1100"/>
-          </a:p>
-        </p:txBody>
-      </p:sp>
-      <p:sp>
-        <p:nvSpPr>
-          <p:cNvPr id="10" name="Text 8">
-            <a:extLst xmlns:a="http://schemas.openxmlformats.org/drawingml/2006/main">
-              <a:ext uri="{FF2B5EF4-FFF2-40B4-BE49-F238E27FC236}">
-                <a16:creationId xmlns:a16="http://schemas.microsoft.com/office/drawing/2014/main" id="{C12BCFCB-1A23-4B67-93ED-35F8595CEC24}"/>
-              </a:ext>
-            </a:extLst>
-          </p:cNvPr>
-          <p:cNvSpPr>
-            <a:spLocks xmlns:a="http://schemas.openxmlformats.org/drawingml/2006/main" noGrp="1"/>
-          </p:cNvSpPr>
-          <p:nvPr/>
-        </p:nvSpPr>
-        <p:spPr>
-          <a:xfrm xmlns:a="http://schemas.openxmlformats.org/drawingml/2006/main">
-            <a:off x="1965960" y="4535424"/>
-            <a:ext cx="8778240" cy="548640"/>
-          </a:xfrm>
-          <a:prstGeom xmlns:a="http://schemas.openxmlformats.org/drawingml/2006/main" prst="rect">
-            <a:avLst/>
-          </a:prstGeom>
-          <a:noFill xmlns:a="http://schemas.openxmlformats.org/drawingml/2006/main"/>
-        </p:spPr>
-        <p:txBody>
-          <a:bodyPr xmlns:a="http://schemas.openxmlformats.org/drawingml/2006/main" wrap="square" lIns="0" tIns="0" rIns="0" bIns="0" anchor="ctr">
-            <a:normAutofit/>
-          </a:bodyPr>
-          <a:lstStyle xmlns:a="http://schemas.openxmlformats.org/drawingml/2006/main"/>
-          <a:p xmlns:a="http://schemas.openxmlformats.org/drawingml/2006/main">
-            <a:pPr marL="0" indent="0">
-              <a:buNone/>
-            </a:pPr>
-            <a:r>
-              <a:rPr sz="1600">
-                <a:solidFill>
-                  <a:srgbClr val="F3F7F4"/>
-                </a:solidFill>
-                <a:latin typeface="Aptos"/>
-                <a:ea typeface="Aptos"/>
-                <a:cs typeface="Aptos"/>
-              </a:rPr>
-              <a:t>Weekly logging  •  set-aside action  •  forecast calibration  •  4-week return rate</a:t>
-            </a:r>
-            <a:endParaRPr sz="1600"/>
-          </a:p>
-        </p:txBody>
-      </p:sp>
-      <p:sp>
-        <p:nvSpPr>
-          <p:cNvPr id="11" name="Text 9">
-            <a:extLst xmlns:a="http://schemas.openxmlformats.org/drawingml/2006/main">
-              <a:ext uri="{FF2B5EF4-FFF2-40B4-BE49-F238E27FC236}">
-                <a16:creationId xmlns:a16="http://schemas.microsoft.com/office/drawing/2014/main" id="{AC4CC1AF-7FB8-49A8-8E16-6E02865DB313}"/>
-              </a:ext>
-            </a:extLst>
-          </p:cNvPr>
-          <p:cNvSpPr>
-            <a:spLocks xmlns:a="http://schemas.openxmlformats.org/drawingml/2006/main" noGrp="1"/>
-          </p:cNvSpPr>
-          <p:nvPr/>
-        </p:nvSpPr>
-        <p:spPr>
-          <a:xfrm xmlns:a="http://schemas.openxmlformats.org/drawingml/2006/main">
-            <a:off x="868680" y="5715000"/>
-            <a:ext cx="7680960" cy="393192"/>
-          </a:xfrm>
-          <a:prstGeom xmlns:a="http://schemas.openxmlformats.org/drawingml/2006/main" prst="rect">
-            <a:avLst/>
-          </a:prstGeom>
-          <a:noFill xmlns:a="http://schemas.openxmlformats.org/drawingml/2006/main"/>
-        </p:spPr>
-        <p:txBody>
-          <a:bodyPr xmlns:a="http://schemas.openxmlformats.org/drawingml/2006/main" wrap="square" lIns="0" tIns="0" rIns="0" bIns="0" anchor="ctr">
-            <a:normAutofit/>
-          </a:bodyPr>
-          <a:lstStyle xmlns:a="http://schemas.openxmlformats.org/drawingml/2006/main"/>
-          <a:p xmlns:a="http://schemas.openxmlformats.org/drawingml/2006/main">
-            <a:pPr marL="0" indent="0">
-              <a:buNone/>
-            </a:pPr>
-            <a:r>
-              <a:rPr sz="2100" b="1">
-                <a:solidFill>
-                  <a:srgbClr val="F6C14B"/>
-                </a:solidFill>
-                <a:latin typeface="Aptos Display"/>
-                <a:ea typeface="Aptos Display"/>
-                <a:cs typeface="Aptos Display"/>
-              </a:rPr>
-              <a:t>Boloka — Save, before you have to.</a:t>
-            </a:r>
-            <a:endParaRPr sz="2100"/>
-          </a:p>
-        </p:txBody>
-      </p:sp>
-      <p:sp>
-        <p:nvSpPr>
-          <p:cNvPr id="12" name="Text 10">
-            <a:extLst xmlns:a="http://schemas.openxmlformats.org/drawingml/2006/main">
-              <a:ext uri="{FF2B5EF4-FFF2-40B4-BE49-F238E27FC236}">
-                <a16:creationId xmlns:a16="http://schemas.microsoft.com/office/drawing/2014/main" id="{B999EC7A-6D38-441E-A456-C2A07F25FF03}"/>
-              </a:ext>
-            </a:extLst>
-          </p:cNvPr>
-          <p:cNvSpPr>
-            <a:spLocks xmlns:a="http://schemas.openxmlformats.org/drawingml/2006/main" noGrp="1"/>
-          </p:cNvSpPr>
-          <p:nvPr/>
-        </p:nvSpPr>
-        <p:spPr>
-          <a:xfrm xmlns:a="http://schemas.openxmlformats.org/drawingml/2006/main">
-            <a:off x="868680" y="6217920"/>
-            <a:ext cx="7315200" cy="201168"/>
-          </a:xfrm>
-          <a:prstGeom xmlns:a="http://schemas.openxmlformats.org/drawingml/2006/main" prst="rect">
-            <a:avLst/>
-          </a:prstGeom>
-          <a:noFill xmlns:a="http://schemas.openxmlformats.org/drawingml/2006/main"/>
-        </p:spPr>
-        <p:txBody>
-          <a:bodyPr xmlns:a="http://schemas.openxmlformats.org/drawingml/2006/main" wrap="square" lIns="0" tIns="0" rIns="0" bIns="0" anchor="ctr">
-            <a:normAutofit/>
-          </a:bodyPr>
-          <a:lstStyle xmlns:a="http://schemas.openxmlformats.org/drawingml/2006/main"/>
-          <a:p xmlns:a="http://schemas.openxmlformats.org/drawingml/2006/main">
-            <a:pPr marL="0" indent="0">
-              <a:buNone/>
-            </a:pPr>
-            <a:r>
-              <a:rPr sz="1000">
-                <a:solidFill>
-                  <a:srgbClr val="8CA399"/>
-                </a:solidFill>
-                <a:latin typeface="Aptos"/>
-                <a:ea typeface="Aptos"/>
-                <a:cs typeface="Aptos"/>
-              </a:rPr>
-              <a:t>Pilot targets are proposed, not completed results.</a:t>
-            </a:r>
-            <a:endParaRPr sz="1000"/>
+              <a:t>Business model hypothesis: free individual planning; later, opt-in partner support. No personal data sales.</a:t>
+            </a:r>
+            <a:endParaRPr sz="1300"/>
           </a:p>
         </p:txBody>
       </p:sp>
@@ -6976,7 +9573,7 @@
           <p:cNvPr id="25" name="Slide Number Placeholder 0">
             <a:extLst xmlns:a="http://schemas.openxmlformats.org/drawingml/2006/main">
               <a:ext uri="{FF2B5EF4-FFF2-40B4-BE49-F238E27FC236}">
-                <a16:creationId xmlns:a16="http://schemas.microsoft.com/office/drawing/2014/main" id="{C272145B-A7CC-4B34-9A54-07F54B860F16}"/>
+                <a16:creationId xmlns:a16="http://schemas.microsoft.com/office/drawing/2014/main" id="{CD8576D8-B20D-4DA5-BAC7-CC0B75519DF5}"/>
               </a:ext>
             </a:extLst>
           </p:cNvPr>
@@ -7017,7 +9614,609 @@
             </a:pPr>
             <a:fld id="{F7021451-1387-4CA6-816F-3879F97B5CBC}" type="slidenum">
               <a:rPr b="0"/>
-              <a:t>8</a:t>
+              <a:t>7</a:t>
+            </a:fld>
+            <a:endParaRPr/>
+          </a:p>
+        </p:txBody>
+      </p:sp>
+    </p:spTree>
+    <p:extLst>
+      <p:ext uri="{BB962C8B-B14F-4D97-AF65-F5344CB8AC3E}">
+        <p14:creationId xmlns:p14="http://schemas.microsoft.com/office/powerpoint/2010/main" val="2012460123"/>
+      </p:ext>
+    </p:extLst>
+  </p:cSld>
+</p:sld>
+</file>
+
+<file path=ppt/slides/slide9.xml><?xml version="1.0" encoding="utf-8"?>
+<p:sld xmlns:p="http://schemas.openxmlformats.org/presentationml/2006/main">
+  <p:cSld>
+    <p:spTree>
+      <p:nvGrpSpPr>
+        <p:cNvPr id="1" name=""/>
+        <p:cNvGrpSpPr/>
+        <p:nvPr/>
+      </p:nvGrpSpPr>
+      <p:grpSpPr>
+        <a:xfrm xmlns:a="http://schemas.openxmlformats.org/drawingml/2006/main"/>
+      </p:grpSpPr>
+      <p:sp>
+        <p:nvSpPr>
+          <p:cNvPr id="2" name="Text 0">
+            <a:extLst xmlns:a="http://schemas.openxmlformats.org/drawingml/2006/main">
+              <a:ext uri="{FF2B5EF4-FFF2-40B4-BE49-F238E27FC236}">
+                <a16:creationId xmlns:a16="http://schemas.microsoft.com/office/drawing/2014/main" id="{8248621A-7503-4A6F-8FB0-D55B6E41A0C7}"/>
+              </a:ext>
+            </a:extLst>
+          </p:cNvPr>
+          <p:cNvSpPr>
+            <a:spLocks xmlns:a="http://schemas.openxmlformats.org/drawingml/2006/main" noGrp="1"/>
+          </p:cNvSpPr>
+          <p:nvPr/>
+        </p:nvSpPr>
+        <p:spPr>
+          <a:xfrm xmlns:a="http://schemas.openxmlformats.org/drawingml/2006/main">
+            <a:off x="658368" y="475488"/>
+            <a:ext cx="9875520" cy="237744"/>
+          </a:xfrm>
+          <a:prstGeom xmlns:a="http://schemas.openxmlformats.org/drawingml/2006/main" prst="rect">
+            <a:avLst/>
+          </a:prstGeom>
+          <a:noFill xmlns:a="http://schemas.openxmlformats.org/drawingml/2006/main"/>
+        </p:spPr>
+        <p:txBody>
+          <a:bodyPr xmlns:a="http://schemas.openxmlformats.org/drawingml/2006/main" wrap="square" lIns="0" tIns="0" rIns="0" bIns="0" anchor="ctr">
+            <a:normAutofit fontScale="100000"/>
+          </a:bodyPr>
+          <a:lstStyle xmlns:a="http://schemas.openxmlformats.org/drawingml/2006/main"/>
+          <a:p xmlns:a="http://schemas.openxmlformats.org/drawingml/2006/main">
+            <a:pPr marL="0" indent="0">
+              <a:buNone/>
+            </a:pPr>
+            <a:r>
+              <a:rPr sz="1100" b="1" spc="130">
+                <a:solidFill>
+                  <a:srgbClr val="32D6A6"/>
+                </a:solidFill>
+                <a:latin typeface="Aptos Display"/>
+                <a:ea typeface="Aptos Display"/>
+                <a:cs typeface="Aptos Display"/>
+              </a:rPr>
+              <a:t>08 / THE ASK</a:t>
+            </a:r>
+            <a:endParaRPr sz="1100"/>
+          </a:p>
+        </p:txBody>
+      </p:sp>
+      <p:sp>
+        <p:nvSpPr>
+          <p:cNvPr id="3" name="Text 1">
+            <a:extLst xmlns:a="http://schemas.openxmlformats.org/drawingml/2006/main">
+              <a:ext uri="{FF2B5EF4-FFF2-40B4-BE49-F238E27FC236}">
+                <a16:creationId xmlns:a16="http://schemas.microsoft.com/office/drawing/2014/main" id="{22556AD4-835B-4643-952C-0703FBB2EEC6}"/>
+              </a:ext>
+            </a:extLst>
+          </p:cNvPr>
+          <p:cNvSpPr>
+            <a:spLocks xmlns:a="http://schemas.openxmlformats.org/drawingml/2006/main" noGrp="1"/>
+          </p:cNvSpPr>
+          <p:nvPr/>
+        </p:nvSpPr>
+        <p:spPr>
+          <a:xfrm xmlns:a="http://schemas.openxmlformats.org/drawingml/2006/main">
+            <a:off x="658368" y="896112"/>
+            <a:ext cx="10789920" cy="749808"/>
+          </a:xfrm>
+          <a:prstGeom xmlns:a="http://schemas.openxmlformats.org/drawingml/2006/main" prst="rect">
+            <a:avLst/>
+          </a:prstGeom>
+          <a:noFill xmlns:a="http://schemas.openxmlformats.org/drawingml/2006/main"/>
+        </p:spPr>
+        <p:txBody>
+          <a:bodyPr xmlns:a="http://schemas.openxmlformats.org/drawingml/2006/main" wrap="square" lIns="0" tIns="0" rIns="0" bIns="0" anchor="t">
+            <a:normAutofit fontScale="100000"/>
+          </a:bodyPr>
+          <a:lstStyle xmlns:a="http://schemas.openxmlformats.org/drawingml/2006/main"/>
+          <a:p xmlns:a="http://schemas.openxmlformats.org/drawingml/2006/main">
+            <a:pPr marL="0" indent="0">
+              <a:buNone/>
+            </a:pPr>
+            <a:r>
+              <a:rPr sz="3000" b="1">
+                <a:solidFill>
+                  <a:srgbClr val="F3F7F4"/>
+                </a:solidFill>
+                <a:latin typeface="Aptos Display"/>
+                <a:ea typeface="Aptos Display"/>
+                <a:cs typeface="Aptos Display"/>
+              </a:rPr>
+              <a:t>Test whether a cash-flow estimate helps with a weekly decision.</a:t>
+            </a:r>
+            <a:endParaRPr sz="3000"/>
+          </a:p>
+        </p:txBody>
+      </p:sp>
+      <p:sp>
+        <p:nvSpPr>
+          <p:cNvPr id="4" name="Text 2">
+            <a:extLst xmlns:a="http://schemas.openxmlformats.org/drawingml/2006/main">
+              <a:ext uri="{FF2B5EF4-FFF2-40B4-BE49-F238E27FC236}">
+                <a16:creationId xmlns:a16="http://schemas.microsoft.com/office/drawing/2014/main" id="{5C65158D-D6C6-4841-A592-B7ED08F58EA5}"/>
+              </a:ext>
+            </a:extLst>
+          </p:cNvPr>
+          <p:cNvSpPr>
+            <a:spLocks xmlns:a="http://schemas.openxmlformats.org/drawingml/2006/main" noGrp="1"/>
+          </p:cNvSpPr>
+          <p:nvPr/>
+        </p:nvSpPr>
+        <p:spPr>
+          <a:xfrm xmlns:a="http://schemas.openxmlformats.org/drawingml/2006/main">
+            <a:off x="676656" y="1737360"/>
+            <a:ext cx="10424160" cy="475488"/>
+          </a:xfrm>
+          <a:prstGeom xmlns:a="http://schemas.openxmlformats.org/drawingml/2006/main" prst="rect">
+            <a:avLst/>
+          </a:prstGeom>
+          <a:noFill xmlns:a="http://schemas.openxmlformats.org/drawingml/2006/main"/>
+        </p:spPr>
+        <p:txBody>
+          <a:bodyPr xmlns:a="http://schemas.openxmlformats.org/drawingml/2006/main" wrap="square" lIns="0" tIns="0" rIns="0" bIns="0" anchor="t">
+            <a:normAutofit/>
+          </a:bodyPr>
+          <a:lstStyle xmlns:a="http://schemas.openxmlformats.org/drawingml/2006/main"/>
+          <a:p xmlns:a="http://schemas.openxmlformats.org/drawingml/2006/main">
+            <a:pPr marL="0" indent="0">
+              <a:buNone/>
+            </a:pPr>
+            <a:r>
+              <a:rPr sz="1500">
+                <a:solidFill>
+                  <a:srgbClr val="8CA399"/>
+                </a:solidFill>
+                <a:latin typeface="Aptos"/>
+                <a:ea typeface="Aptos"/>
+                <a:cs typeface="Aptos"/>
+              </a:rPr>
+              <a:t>We need evidence of usefulness, not another feature list.</a:t>
+            </a:r>
+            <a:endParaRPr sz="1500"/>
+          </a:p>
+        </p:txBody>
+      </p:sp>
+      <p:sp>
+        <p:nvSpPr>
+          <p:cNvPr id="5" name="Text 3">
+            <a:extLst xmlns:a="http://schemas.openxmlformats.org/drawingml/2006/main">
+              <a:ext uri="{FF2B5EF4-FFF2-40B4-BE49-F238E27FC236}">
+                <a16:creationId xmlns:a16="http://schemas.microsoft.com/office/drawing/2014/main" id="{C97C4E52-930D-417B-989D-FEAF84CA47A8}"/>
+              </a:ext>
+            </a:extLst>
+          </p:cNvPr>
+          <p:cNvSpPr>
+            <a:spLocks xmlns:a="http://schemas.openxmlformats.org/drawingml/2006/main" noGrp="1"/>
+          </p:cNvSpPr>
+          <p:nvPr/>
+        </p:nvSpPr>
+        <p:spPr>
+          <a:xfrm xmlns:a="http://schemas.openxmlformats.org/drawingml/2006/main">
+            <a:off x="822960" y="2788920"/>
+            <a:ext cx="2926080" cy="685800"/>
+          </a:xfrm>
+          <a:prstGeom xmlns:a="http://schemas.openxmlformats.org/drawingml/2006/main" prst="rect">
+            <a:avLst/>
+          </a:prstGeom>
+          <a:noFill xmlns:a="http://schemas.openxmlformats.org/drawingml/2006/main"/>
+        </p:spPr>
+        <p:txBody>
+          <a:bodyPr xmlns:a="http://schemas.openxmlformats.org/drawingml/2006/main" wrap="square" lIns="0" tIns="0" rIns="0" bIns="0" anchor="ctr">
+            <a:normAutofit/>
+          </a:bodyPr>
+          <a:lstStyle xmlns:a="http://schemas.openxmlformats.org/drawingml/2006/main"/>
+          <a:p xmlns:a="http://schemas.openxmlformats.org/drawingml/2006/main">
+            <a:pPr marL="0" indent="0">
+              <a:buNone/>
+            </a:pPr>
+            <a:r>
+              <a:rPr sz="3600" b="1">
+                <a:solidFill>
+                  <a:srgbClr val="F6C14B"/>
+                </a:solidFill>
+                <a:latin typeface="Aptos Display"/>
+                <a:ea typeface="Aptos Display"/>
+                <a:cs typeface="Aptos Display"/>
+              </a:rPr>
+              <a:t>10–20</a:t>
+            </a:r>
+            <a:endParaRPr sz="3600"/>
+          </a:p>
+        </p:txBody>
+      </p:sp>
+      <p:sp>
+        <p:nvSpPr>
+          <p:cNvPr id="6" name="Text 4">
+            <a:extLst xmlns:a="http://schemas.openxmlformats.org/drawingml/2006/main">
+              <a:ext uri="{FF2B5EF4-FFF2-40B4-BE49-F238E27FC236}">
+                <a16:creationId xmlns:a16="http://schemas.microsoft.com/office/drawing/2014/main" id="{EE16F40B-9AEF-4B13-AF61-09B6E470FAB0}"/>
+              </a:ext>
+            </a:extLst>
+          </p:cNvPr>
+          <p:cNvSpPr>
+            <a:spLocks xmlns:a="http://schemas.openxmlformats.org/drawingml/2006/main" noGrp="1"/>
+          </p:cNvSpPr>
+          <p:nvPr/>
+        </p:nvSpPr>
+        <p:spPr>
+          <a:xfrm xmlns:a="http://schemas.openxmlformats.org/drawingml/2006/main">
+            <a:off x="868680" y="3584448"/>
+            <a:ext cx="3657600" cy="329184"/>
+          </a:xfrm>
+          <a:prstGeom xmlns:a="http://schemas.openxmlformats.org/drawingml/2006/main" prst="rect">
+            <a:avLst/>
+          </a:prstGeom>
+          <a:noFill xmlns:a="http://schemas.openxmlformats.org/drawingml/2006/main"/>
+        </p:spPr>
+        <p:txBody>
+          <a:bodyPr xmlns:a="http://schemas.openxmlformats.org/drawingml/2006/main" wrap="square" lIns="0" tIns="0" rIns="0" bIns="0" anchor="ctr">
+            <a:normAutofit/>
+          </a:bodyPr>
+          <a:lstStyle xmlns:a="http://schemas.openxmlformats.org/drawingml/2006/main"/>
+          <a:p xmlns:a="http://schemas.openxmlformats.org/drawingml/2006/main">
+            <a:pPr marL="0" indent="0">
+              <a:buNone/>
+            </a:pPr>
+            <a:r>
+              <a:rPr sz="1600">
+                <a:solidFill>
+                  <a:srgbClr val="F3F7F4"/>
+                </a:solidFill>
+                <a:latin typeface="Aptos"/>
+                <a:ea typeface="Aptos"/>
+                <a:cs typeface="Aptos"/>
+              </a:rPr>
+              <a:t>consenting pilot participants</a:t>
+            </a:r>
+            <a:endParaRPr sz="1600"/>
+          </a:p>
+        </p:txBody>
+      </p:sp>
+      <p:sp>
+        <p:nvSpPr>
+          <p:cNvPr id="7" name="Text 5">
+            <a:extLst xmlns:a="http://schemas.openxmlformats.org/drawingml/2006/main">
+              <a:ext uri="{FF2B5EF4-FFF2-40B4-BE49-F238E27FC236}">
+                <a16:creationId xmlns:a16="http://schemas.microsoft.com/office/drawing/2014/main" id="{6949FD3E-1427-44A9-B460-82D196B9B8C1}"/>
+              </a:ext>
+            </a:extLst>
+          </p:cNvPr>
+          <p:cNvSpPr>
+            <a:spLocks xmlns:a="http://schemas.openxmlformats.org/drawingml/2006/main" noGrp="1"/>
+          </p:cNvSpPr>
+          <p:nvPr/>
+        </p:nvSpPr>
+        <p:spPr>
+          <a:xfrm xmlns:a="http://schemas.openxmlformats.org/drawingml/2006/main">
+            <a:off x="4709160" y="2788920"/>
+            <a:ext cx="3200400" cy="685800"/>
+          </a:xfrm>
+          <a:prstGeom xmlns:a="http://schemas.openxmlformats.org/drawingml/2006/main" prst="rect">
+            <a:avLst/>
+          </a:prstGeom>
+          <a:noFill xmlns:a="http://schemas.openxmlformats.org/drawingml/2006/main"/>
+        </p:spPr>
+        <p:txBody>
+          <a:bodyPr xmlns:a="http://schemas.openxmlformats.org/drawingml/2006/main" wrap="square" lIns="0" tIns="0" rIns="0" bIns="0" anchor="ctr">
+            <a:normAutofit/>
+          </a:bodyPr>
+          <a:lstStyle xmlns:a="http://schemas.openxmlformats.org/drawingml/2006/main"/>
+          <a:p xmlns:a="http://schemas.openxmlformats.org/drawingml/2006/main">
+            <a:pPr marL="0" indent="0">
+              <a:buNone/>
+            </a:pPr>
+            <a:r>
+              <a:rPr sz="3600" b="1">
+                <a:solidFill>
+                  <a:srgbClr val="32D6A6"/>
+                </a:solidFill>
+                <a:latin typeface="Aptos Display"/>
+                <a:ea typeface="Aptos Display"/>
+                <a:cs typeface="Aptos Display"/>
+              </a:rPr>
+              <a:t>4 weeks</a:t>
+            </a:r>
+            <a:endParaRPr sz="3600"/>
+          </a:p>
+        </p:txBody>
+      </p:sp>
+      <p:sp>
+        <p:nvSpPr>
+          <p:cNvPr id="8" name="Text 6">
+            <a:extLst xmlns:a="http://schemas.openxmlformats.org/drawingml/2006/main">
+              <a:ext uri="{FF2B5EF4-FFF2-40B4-BE49-F238E27FC236}">
+                <a16:creationId xmlns:a16="http://schemas.microsoft.com/office/drawing/2014/main" id="{1312E58E-3898-47D8-81CE-CA2125750286}"/>
+              </a:ext>
+            </a:extLst>
+          </p:cNvPr>
+          <p:cNvSpPr>
+            <a:spLocks xmlns:a="http://schemas.openxmlformats.org/drawingml/2006/main" noGrp="1"/>
+          </p:cNvSpPr>
+          <p:nvPr/>
+        </p:nvSpPr>
+        <p:spPr>
+          <a:xfrm xmlns:a="http://schemas.openxmlformats.org/drawingml/2006/main">
+            <a:off x="4754880" y="3584448"/>
+            <a:ext cx="3657600" cy="329184"/>
+          </a:xfrm>
+          <a:prstGeom xmlns:a="http://schemas.openxmlformats.org/drawingml/2006/main" prst="rect">
+            <a:avLst/>
+          </a:prstGeom>
+          <a:noFill xmlns:a="http://schemas.openxmlformats.org/drawingml/2006/main"/>
+        </p:spPr>
+        <p:txBody>
+          <a:bodyPr xmlns:a="http://schemas.openxmlformats.org/drawingml/2006/main" wrap="square" lIns="0" tIns="0" rIns="0" bIns="0" anchor="ctr">
+            <a:normAutofit/>
+          </a:bodyPr>
+          <a:lstStyle xmlns:a="http://schemas.openxmlformats.org/drawingml/2006/main"/>
+          <a:p xmlns:a="http://schemas.openxmlformats.org/drawingml/2006/main">
+            <a:pPr marL="0" indent="0">
+              <a:buNone/>
+            </a:pPr>
+            <a:r>
+              <a:rPr sz="1600">
+                <a:solidFill>
+                  <a:srgbClr val="F3F7F4"/>
+                </a:solidFill>
+                <a:latin typeface="Aptos"/>
+                <a:ea typeface="Aptos"/>
+                <a:cs typeface="Aptos"/>
+              </a:rPr>
+              <a:t>to test the weekly habit</a:t>
+            </a:r>
+            <a:endParaRPr sz="1600"/>
+          </a:p>
+        </p:txBody>
+      </p:sp>
+      <p:sp>
+        <p:nvSpPr>
+          <p:cNvPr id="9" name="Text 7">
+            <a:extLst xmlns:a="http://schemas.openxmlformats.org/drawingml/2006/main">
+              <a:ext uri="{FF2B5EF4-FFF2-40B4-BE49-F238E27FC236}">
+                <a16:creationId xmlns:a16="http://schemas.microsoft.com/office/drawing/2014/main" id="{8DFABEE3-50D1-44A9-B478-6E1821918B88}"/>
+              </a:ext>
+            </a:extLst>
+          </p:cNvPr>
+          <p:cNvSpPr>
+            <a:spLocks xmlns:a="http://schemas.openxmlformats.org/drawingml/2006/main" noGrp="1"/>
+          </p:cNvSpPr>
+          <p:nvPr/>
+        </p:nvSpPr>
+        <p:spPr>
+          <a:xfrm xmlns:a="http://schemas.openxmlformats.org/drawingml/2006/main">
+            <a:off x="868680" y="4572000"/>
+            <a:ext cx="1463040" cy="256032"/>
+          </a:xfrm>
+          <a:prstGeom xmlns:a="http://schemas.openxmlformats.org/drawingml/2006/main" prst="rect">
+            <a:avLst/>
+          </a:prstGeom>
+          <a:noFill xmlns:a="http://schemas.openxmlformats.org/drawingml/2006/main"/>
+        </p:spPr>
+        <p:txBody>
+          <a:bodyPr xmlns:a="http://schemas.openxmlformats.org/drawingml/2006/main" wrap="square" lIns="0" tIns="0" rIns="0" bIns="0" anchor="ctr">
+            <a:normAutofit/>
+          </a:bodyPr>
+          <a:lstStyle xmlns:a="http://schemas.openxmlformats.org/drawingml/2006/main"/>
+          <a:p xmlns:a="http://schemas.openxmlformats.org/drawingml/2006/main">
+            <a:pPr marL="0" indent="0">
+              <a:buNone/>
+            </a:pPr>
+            <a:r>
+              <a:rPr sz="1100" b="1" spc="100">
+                <a:solidFill>
+                  <a:srgbClr val="8CA399"/>
+                </a:solidFill>
+                <a:latin typeface="Aptos Display"/>
+                <a:ea typeface="Aptos Display"/>
+                <a:cs typeface="Aptos Display"/>
+              </a:rPr>
+              <a:t>MEASURE</a:t>
+            </a:r>
+            <a:endParaRPr sz="1100"/>
+          </a:p>
+        </p:txBody>
+      </p:sp>
+      <p:sp>
+        <p:nvSpPr>
+          <p:cNvPr id="10" name="Text 8">
+            <a:extLst xmlns:a="http://schemas.openxmlformats.org/drawingml/2006/main">
+              <a:ext uri="{FF2B5EF4-FFF2-40B4-BE49-F238E27FC236}">
+                <a16:creationId xmlns:a16="http://schemas.microsoft.com/office/drawing/2014/main" id="{C12BCFCB-1A23-4B67-93ED-35F8595CEC24}"/>
+              </a:ext>
+            </a:extLst>
+          </p:cNvPr>
+          <p:cNvSpPr>
+            <a:spLocks xmlns:a="http://schemas.openxmlformats.org/drawingml/2006/main" noGrp="1"/>
+          </p:cNvSpPr>
+          <p:nvPr/>
+        </p:nvSpPr>
+        <p:spPr>
+          <a:xfrm xmlns:a="http://schemas.openxmlformats.org/drawingml/2006/main">
+            <a:off x="1965960" y="4535424"/>
+            <a:ext cx="8778240" cy="548640"/>
+          </a:xfrm>
+          <a:prstGeom xmlns:a="http://schemas.openxmlformats.org/drawingml/2006/main" prst="rect">
+            <a:avLst/>
+          </a:prstGeom>
+          <a:noFill xmlns:a="http://schemas.openxmlformats.org/drawingml/2006/main"/>
+        </p:spPr>
+        <p:txBody>
+          <a:bodyPr xmlns:a="http://schemas.openxmlformats.org/drawingml/2006/main" wrap="square" lIns="0" tIns="0" rIns="0" bIns="0" anchor="ctr">
+            <a:normAutofit/>
+          </a:bodyPr>
+          <a:lstStyle xmlns:a="http://schemas.openxmlformats.org/drawingml/2006/main"/>
+          <a:p xmlns:a="http://schemas.openxmlformats.org/drawingml/2006/main">
+            <a:pPr marL="0" indent="0">
+              <a:buNone/>
+            </a:pPr>
+            <a:r>
+              <a:rPr sz="1600">
+                <a:solidFill>
+                  <a:srgbClr val="F3F7F4"/>
+                </a:solidFill>
+                <a:latin typeface="Aptos"/>
+                <a:ea typeface="Aptos"/>
+                <a:cs typeface="Aptos"/>
+              </a:rPr>
+              <a:t>Weekly logging  •  set-aside action  •  forecast calibration  •  4-week return rate</a:t>
+            </a:r>
+            <a:endParaRPr sz="1600"/>
+          </a:p>
+        </p:txBody>
+      </p:sp>
+      <p:sp>
+        <p:nvSpPr>
+          <p:cNvPr id="11" name="Text 9">
+            <a:extLst xmlns:a="http://schemas.openxmlformats.org/drawingml/2006/main">
+              <a:ext uri="{FF2B5EF4-FFF2-40B4-BE49-F238E27FC236}">
+                <a16:creationId xmlns:a16="http://schemas.microsoft.com/office/drawing/2014/main" id="{AC4CC1AF-7FB8-49A8-8E16-6E02865DB313}"/>
+              </a:ext>
+            </a:extLst>
+          </p:cNvPr>
+          <p:cNvSpPr>
+            <a:spLocks xmlns:a="http://schemas.openxmlformats.org/drawingml/2006/main" noGrp="1"/>
+          </p:cNvSpPr>
+          <p:nvPr/>
+        </p:nvSpPr>
+        <p:spPr>
+          <a:xfrm xmlns:a="http://schemas.openxmlformats.org/drawingml/2006/main">
+            <a:off x="868680" y="5715000"/>
+            <a:ext cx="7680960" cy="393192"/>
+          </a:xfrm>
+          <a:prstGeom xmlns:a="http://schemas.openxmlformats.org/drawingml/2006/main" prst="rect">
+            <a:avLst/>
+          </a:prstGeom>
+          <a:noFill xmlns:a="http://schemas.openxmlformats.org/drawingml/2006/main"/>
+        </p:spPr>
+        <p:txBody>
+          <a:bodyPr xmlns:a="http://schemas.openxmlformats.org/drawingml/2006/main" wrap="square" lIns="0" tIns="0" rIns="0" bIns="0" anchor="ctr">
+            <a:normAutofit/>
+          </a:bodyPr>
+          <a:lstStyle xmlns:a="http://schemas.openxmlformats.org/drawingml/2006/main"/>
+          <a:p xmlns:a="http://schemas.openxmlformats.org/drawingml/2006/main">
+            <a:pPr marL="0" indent="0">
+              <a:buNone/>
+            </a:pPr>
+            <a:r>
+              <a:rPr sz="2100" b="1">
+                <a:solidFill>
+                  <a:srgbClr val="F6C14B"/>
+                </a:solidFill>
+                <a:latin typeface="Aptos Display"/>
+                <a:ea typeface="Aptos Display"/>
+                <a:cs typeface="Aptos Display"/>
+              </a:rPr>
+              <a:t>Boloka — Save, before you have to.</a:t>
+            </a:r>
+            <a:endParaRPr sz="2100"/>
+          </a:p>
+        </p:txBody>
+      </p:sp>
+      <p:sp>
+        <p:nvSpPr>
+          <p:cNvPr id="12" name="Text 10">
+            <a:extLst xmlns:a="http://schemas.openxmlformats.org/drawingml/2006/main">
+              <a:ext uri="{FF2B5EF4-FFF2-40B4-BE49-F238E27FC236}">
+                <a16:creationId xmlns:a16="http://schemas.microsoft.com/office/drawing/2014/main" id="{B999EC7A-6D38-441E-A456-C2A07F25FF03}"/>
+              </a:ext>
+            </a:extLst>
+          </p:cNvPr>
+          <p:cNvSpPr>
+            <a:spLocks xmlns:a="http://schemas.openxmlformats.org/drawingml/2006/main" noGrp="1"/>
+          </p:cNvSpPr>
+          <p:nvPr/>
+        </p:nvSpPr>
+        <p:spPr>
+          <a:xfrm xmlns:a="http://schemas.openxmlformats.org/drawingml/2006/main">
+            <a:off x="868680" y="6217920"/>
+            <a:ext cx="7315200" cy="201168"/>
+          </a:xfrm>
+          <a:prstGeom xmlns:a="http://schemas.openxmlformats.org/drawingml/2006/main" prst="rect">
+            <a:avLst/>
+          </a:prstGeom>
+          <a:noFill xmlns:a="http://schemas.openxmlformats.org/drawingml/2006/main"/>
+        </p:spPr>
+        <p:txBody>
+          <a:bodyPr xmlns:a="http://schemas.openxmlformats.org/drawingml/2006/main" wrap="square" lIns="0" tIns="0" rIns="0" bIns="0" anchor="ctr">
+            <a:normAutofit/>
+          </a:bodyPr>
+          <a:lstStyle xmlns:a="http://schemas.openxmlformats.org/drawingml/2006/main"/>
+          <a:p xmlns:a="http://schemas.openxmlformats.org/drawingml/2006/main">
+            <a:pPr marL="0" indent="0">
+              <a:buNone/>
+            </a:pPr>
+            <a:r>
+              <a:rPr sz="1000">
+                <a:solidFill>
+                  <a:srgbClr val="8CA399"/>
+                </a:solidFill>
+                <a:latin typeface="Aptos"/>
+                <a:ea typeface="Aptos"/>
+                <a:cs typeface="Aptos"/>
+              </a:rPr>
+              <a:t>Pilot targets are proposed, not completed results.</a:t>
+            </a:r>
+            <a:endParaRPr sz="1000"/>
+          </a:p>
+        </p:txBody>
+      </p:sp>
+      <p:sp>
+        <p:nvSpPr>
+          <p:cNvPr id="25" name="Slide Number Placeholder 0">
+            <a:extLst xmlns:a="http://schemas.openxmlformats.org/drawingml/2006/main">
+              <a:ext uri="{FF2B5EF4-FFF2-40B4-BE49-F238E27FC236}">
+                <a16:creationId xmlns:a16="http://schemas.microsoft.com/office/drawing/2014/main" id="{C272145B-A7CC-4B34-9A54-07F54B860F16}"/>
+              </a:ext>
+            </a:extLst>
+          </p:cNvPr>
+          <p:cNvSpPr>
+            <a:spLocks xmlns:a="http://schemas.openxmlformats.org/drawingml/2006/main" noGrp="1"/>
+          </p:cNvSpPr>
+          <p:nvPr>
+            <p:ph type="sldNum" idx="4294967295"/>
+          </p:nvPr>
+        </p:nvSpPr>
+        <p:spPr>
+          <a:xfrm xmlns:a="http://schemas.openxmlformats.org/drawingml/2006/main">
+            <a:off x="11292840" y="6473952"/>
+            <a:ext cx="800000" cy="300000"/>
+          </a:xfrm>
+          <a:prstGeom xmlns:a="http://schemas.openxmlformats.org/drawingml/2006/main" prst="rect">
+            <a:avLst/>
+          </a:prstGeom>
+        </p:spPr>
+        <p:txBody>
+          <a:bodyPr xmlns:a="http://schemas.openxmlformats.org/drawingml/2006/main"/>
+          <a:lstStyle xmlns:a="http://schemas.openxmlformats.org/drawingml/2006/main">
+            <a:lvl1pPr>
+              <a:buNone/>
+              <a:defRPr sz="900">
+                <a:solidFill>
+                  <a:srgbClr val="8CA399"/>
+                </a:solidFill>
+                <a:latin typeface="Aptos"/>
+                <a:ea typeface="Aptos"/>
+                <a:cs typeface="Aptos"/>
+              </a:defRPr>
+            </a:lvl1pPr>
+          </a:lstStyle>
+          <a:p xmlns:a="http://schemas.openxmlformats.org/drawingml/2006/main">
+            <a:pPr algn="l">
+              <a:buNone/>
+            </a:pPr>
+            <a:fld id="{388657AE-30A1-5A7A-6A7F-315D84436430}" type="slidenum">
+              <a:rPr b="0"/>
+              <a:t>9</a:t>
             </a:fld>
             <a:endParaRPr/>
           </a:p>
